--- a/vissim/RealTwin_VISSIM_Pipeline.pptx
+++ b/vissim/RealTwin_VISSIM_Pipeline.pptx
@@ -4,51 +4,54 @@
   <p:sldMasterIdLst>
     <p:sldMasterId id="2147483648" r:id="rId1"/>
   </p:sldMasterIdLst>
+  <p:notesMasterIdLst>
+    <p:notesMasterId r:id="rId44"/>
+  </p:notesMasterIdLst>
   <p:sldIdLst>
-    <p:sldId id="256" r:id="rId7"/>
-    <p:sldId id="257" r:id="rId8"/>
-    <p:sldId id="258" r:id="rId9"/>
-    <p:sldId id="259" r:id="rId11"/>
-    <p:sldId id="260" r:id="rId12"/>
-    <p:sldId id="261" r:id="rId13"/>
-    <p:sldId id="262" r:id="rId14"/>
-    <p:sldId id="263" r:id="rId15"/>
-    <p:sldId id="264" r:id="rId16"/>
-    <p:sldId id="265" r:id="rId17"/>
-    <p:sldId id="266" r:id="rId18"/>
-    <p:sldId id="267" r:id="rId19"/>
-    <p:sldId id="268" r:id="rId20"/>
-    <p:sldId id="269" r:id="rId21"/>
-    <p:sldId id="270" r:id="rId22"/>
-    <p:sldId id="271" r:id="rId23"/>
-    <p:sldId id="272" r:id="rId24"/>
-    <p:sldId id="273" r:id="rId25"/>
-    <p:sldId id="274" r:id="rId26"/>
-    <p:sldId id="275" r:id="rId27"/>
-    <p:sldId id="276" r:id="rId28"/>
-    <p:sldId id="277" r:id="rId29"/>
-    <p:sldId id="278" r:id="rId30"/>
-    <p:sldId id="279" r:id="rId31"/>
-    <p:sldId id="280" r:id="rId32"/>
-    <p:sldId id="281" r:id="rId33"/>
-    <p:sldId id="282" r:id="rId34"/>
-    <p:sldId id="283" r:id="rId35"/>
-    <p:sldId id="284" r:id="rId36"/>
-    <p:sldId id="285" r:id="rId37"/>
-    <p:sldId id="286" r:id="rId38"/>
-    <p:sldId id="287" r:id="rId39"/>
-    <p:sldId id="288" r:id="rId40"/>
-    <p:sldId id="289" r:id="rId41"/>
-    <p:sldId id="290" r:id="rId42"/>
-    <p:sldId id="291" r:id="rId43"/>
-    <p:sldId id="292" r:id="rId44"/>
-    <p:sldId id="293" r:id="rId45"/>
-    <p:sldId id="294" r:id="rId46"/>
-    <p:sldId id="295" r:id="rId47"/>
-    <p:sldId id="296" r:id="rId48"/>
-    <p:sldId id="297" r:id="rId49"/>
+    <p:sldId id="256" r:id="rId2"/>
+    <p:sldId id="257" r:id="rId3"/>
+    <p:sldId id="258" r:id="rId4"/>
+    <p:sldId id="259" r:id="rId5"/>
+    <p:sldId id="260" r:id="rId6"/>
+    <p:sldId id="261" r:id="rId7"/>
+    <p:sldId id="262" r:id="rId8"/>
+    <p:sldId id="263" r:id="rId9"/>
+    <p:sldId id="264" r:id="rId10"/>
+    <p:sldId id="265" r:id="rId11"/>
+    <p:sldId id="266" r:id="rId12"/>
+    <p:sldId id="267" r:id="rId13"/>
+    <p:sldId id="268" r:id="rId14"/>
+    <p:sldId id="269" r:id="rId15"/>
+    <p:sldId id="270" r:id="rId16"/>
+    <p:sldId id="271" r:id="rId17"/>
+    <p:sldId id="272" r:id="rId18"/>
+    <p:sldId id="273" r:id="rId19"/>
+    <p:sldId id="274" r:id="rId20"/>
+    <p:sldId id="275" r:id="rId21"/>
+    <p:sldId id="276" r:id="rId22"/>
+    <p:sldId id="277" r:id="rId23"/>
+    <p:sldId id="278" r:id="rId24"/>
+    <p:sldId id="279" r:id="rId25"/>
+    <p:sldId id="280" r:id="rId26"/>
+    <p:sldId id="281" r:id="rId27"/>
+    <p:sldId id="282" r:id="rId28"/>
+    <p:sldId id="283" r:id="rId29"/>
+    <p:sldId id="284" r:id="rId30"/>
+    <p:sldId id="285" r:id="rId31"/>
+    <p:sldId id="286" r:id="rId32"/>
+    <p:sldId id="287" r:id="rId33"/>
+    <p:sldId id="288" r:id="rId34"/>
+    <p:sldId id="289" r:id="rId35"/>
+    <p:sldId id="290" r:id="rId36"/>
+    <p:sldId id="291" r:id="rId37"/>
+    <p:sldId id="292" r:id="rId38"/>
+    <p:sldId id="293" r:id="rId39"/>
+    <p:sldId id="294" r:id="rId40"/>
+    <p:sldId id="295" r:id="rId41"/>
+    <p:sldId id="296" r:id="rId42"/>
+    <p:sldId id="297" r:id="rId43"/>
   </p:sldIdLst>
-  <p:sldSz cx="12191695" cy="6858000" type="screen4x3"/>
+  <p:sldSz cx="12192000" cy="6858000"/>
   <p:notesSz cx="6858000" cy="9144000"/>
   <p:defaultTextStyle>
     <a:defPPr>
@@ -145,11 +148,56 @@
       </a:defRPr>
     </a:lvl9pPr>
   </p:defaultTextStyle>
+  <p:extLst>
+    <p:ext uri="{EFAFB233-063F-42B5-8137-9DF3F51BA10A}">
+      <p15:sldGuideLst xmlns:p15="http://schemas.microsoft.com/office/powerpoint/2012/main">
+        <p15:guide id="1" orient="horz" pos="2160">
+          <p15:clr>
+            <a:srgbClr val="A4A3A4"/>
+          </p15:clr>
+        </p15:guide>
+        <p15:guide id="2" pos="2880">
+          <p15:clr>
+            <a:srgbClr val="A4A3A4"/>
+          </p15:clr>
+        </p15:guide>
+      </p15:sldGuideLst>
+    </p:ext>
+  </p:extLst>
 </p:presentation>
 </file>
 
+<file path=ppt/changesInfos/changesInfo1.xml><?xml version="1.0" encoding="utf-8"?>
+<pc:chgInfo xmlns:a="http://schemas.openxmlformats.org/drawingml/2006/main" xmlns:r="http://schemas.openxmlformats.org/officeDocument/2006/relationships" xmlns:ac="http://schemas.microsoft.com/office/drawing/2013/main/command" xmlns:pc="http://schemas.microsoft.com/office/powerpoint/2013/main/command">
+  <pc:docChgLst>
+    <pc:chgData name="Saroj, Abhilasha" userId="d67c2eea-89d4-45fa-9ce0-c1ad439feab6" providerId="ADAL" clId="{1F9C6C7C-1283-4544-9D6E-4D9C42D7FCA5}"/>
+    <pc:docChg chg="modSld">
+      <pc:chgData name="Saroj, Abhilasha" userId="d67c2eea-89d4-45fa-9ce0-c1ad439feab6" providerId="ADAL" clId="{1F9C6C7C-1283-4544-9D6E-4D9C42D7FCA5}" dt="2026-08-10T15:13:29.144" v="0" actId="20577"/>
+      <pc:docMkLst>
+        <pc:docMk/>
+      </pc:docMkLst>
+      <pc:sldChg chg="modSp mod">
+        <pc:chgData name="Saroj, Abhilasha" userId="d67c2eea-89d4-45fa-9ce0-c1ad439feab6" providerId="ADAL" clId="{1F9C6C7C-1283-4544-9D6E-4D9C42D7FCA5}" dt="2026-08-10T15:13:29.144" v="0" actId="20577"/>
+        <pc:sldMkLst>
+          <pc:docMk/>
+          <pc:sldMk cId="0" sldId="262"/>
+        </pc:sldMkLst>
+        <pc:spChg chg="mod">
+          <ac:chgData name="Saroj, Abhilasha" userId="d67c2eea-89d4-45fa-9ce0-c1ad439feab6" providerId="ADAL" clId="{1F9C6C7C-1283-4544-9D6E-4D9C42D7FCA5}" dt="2026-08-10T15:13:29.144" v="0" actId="20577"/>
+          <ac:spMkLst>
+            <pc:docMk/>
+            <pc:sldMk cId="0" sldId="262"/>
+            <ac:spMk id="4" creationId="{00000000-0000-0000-0000-000000000000}"/>
+          </ac:spMkLst>
+        </pc:spChg>
+      </pc:sldChg>
+    </pc:docChg>
+  </pc:docChgLst>
+</pc:chgInfo>
+</file>
+
 <file path=ppt/notesMasters/notesMaster1.xml><?xml version="1.0" encoding="utf-8"?>
-<p:notesMaster xmlns:a="http://schemas.openxmlformats.org/drawingml/2006/main" xmlns:p="http://schemas.openxmlformats.org/presentationml/2006/main" xmlns:r="http://schemas.openxmlformats.org/officeDocument/2006/relationships">
+<p:notesMaster xmlns:a="http://schemas.openxmlformats.org/drawingml/2006/main" xmlns:r="http://schemas.openxmlformats.org/officeDocument/2006/relationships" xmlns:p="http://schemas.openxmlformats.org/presentationml/2006/main">
   <p:cSld>
     <p:bg>
       <p:bgRef idx="1001">
@@ -183,7 +231,7 @@
         <p:spPr>
           <a:xfrm>
             <a:off x="0" y="0"/>
-            <a:ext cx="2971800" cy="457200"/>
+            <a:ext cx="2971800" cy="458788"/>
           </a:xfrm>
           <a:prstGeom prst="rect">
             <a:avLst/>
@@ -214,7 +262,7 @@
         <p:spPr>
           <a:xfrm>
             <a:off x="3884613" y="0"/>
-            <a:ext cx="2971800" cy="457200"/>
+            <a:ext cx="2971800" cy="458788"/>
           </a:xfrm>
           <a:prstGeom prst="rect">
             <a:avLst/>
@@ -228,9 +276,9 @@
             </a:lvl1pPr>
           </a:lstStyle>
           <a:p>
-            <a:fld id="{0F89C1C7-3DCD-1040-A9CF-14679D8B5DDD}" type="datetimeFigureOut">
+            <a:fld id="{08626DEF-B097-4EE9-9BB3-D8BB4D65195D}" type="datetimeFigureOut">
               <a:rPr lang="en-US" smtClean="0"/>
-              <a:t>10/17/16</a:t>
+              <a:t>8/10/2026</a:t>
             </a:fld>
             <a:endParaRPr lang="en-US"/>
           </a:p>
@@ -248,8 +296,8 @@
         </p:nvSpPr>
         <p:spPr>
           <a:xfrm>
-            <a:off x="1143000" y="685800"/>
-            <a:ext cx="4572000" cy="3429000"/>
+            <a:off x="685800" y="1143000"/>
+            <a:ext cx="5486400" cy="3086100"/>
           </a:xfrm>
           <a:prstGeom prst="rect">
             <a:avLst/>
@@ -281,8 +329,8 @@
         </p:nvSpPr>
         <p:spPr>
           <a:xfrm>
-            <a:off x="685800" y="4343400"/>
-            <a:ext cx="5486400" cy="4114800"/>
+            <a:off x="685800" y="4400550"/>
+            <a:ext cx="5486400" cy="3600450"/>
           </a:xfrm>
           <a:prstGeom prst="rect">
             <a:avLst/>
@@ -294,38 +342,37 @@
           <a:p>
             <a:pPr lvl="0"/>
             <a:r>
-              <a:rPr lang="en-US" smtClean="0"/>
+              <a:rPr lang="en-US"/>
               <a:t>Click to edit Master text styles</a:t>
             </a:r>
           </a:p>
           <a:p>
             <a:pPr lvl="1"/>
             <a:r>
-              <a:rPr lang="en-US" smtClean="0"/>
+              <a:rPr lang="en-US"/>
               <a:t>Second level</a:t>
             </a:r>
           </a:p>
           <a:p>
             <a:pPr lvl="2"/>
             <a:r>
-              <a:rPr lang="en-US" smtClean="0"/>
+              <a:rPr lang="en-US"/>
               <a:t>Third level</a:t>
             </a:r>
           </a:p>
           <a:p>
             <a:pPr lvl="3"/>
             <a:r>
-              <a:rPr lang="en-US" smtClean="0"/>
+              <a:rPr lang="en-US"/>
               <a:t>Fourth level</a:t>
             </a:r>
           </a:p>
           <a:p>
             <a:pPr lvl="4"/>
             <a:r>
-              <a:rPr lang="en-US" smtClean="0"/>
+              <a:rPr lang="en-US"/>
               <a:t>Fifth level</a:t>
             </a:r>
-            <a:endParaRPr lang="en-US"/>
           </a:p>
         </p:txBody>
       </p:sp>
@@ -342,7 +389,7 @@
         <p:spPr>
           <a:xfrm>
             <a:off x="0" y="8685213"/>
-            <a:ext cx="2971800" cy="457200"/>
+            <a:ext cx="2971800" cy="458787"/>
           </a:xfrm>
           <a:prstGeom prst="rect">
             <a:avLst/>
@@ -373,7 +420,7 @@
         <p:spPr>
           <a:xfrm>
             <a:off x="3884613" y="8685213"/>
-            <a:ext cx="2971800" cy="457200"/>
+            <a:ext cx="2971800" cy="458787"/>
           </a:xfrm>
           <a:prstGeom prst="rect">
             <a:avLst/>
@@ -387,7 +434,7 @@
             </a:lvl1pPr>
           </a:lstStyle>
           <a:p>
-            <a:fld id="{BB5E49A5-4136-284D-997B-48E1D791AD67}" type="slidenum">
+            <a:fld id="{0A445110-32E5-458A-900D-E00E6F521F09}" type="slidenum">
               <a:rPr lang="en-US" smtClean="0"/>
               <a:t>‹#›</a:t>
             </a:fld>
@@ -398,13 +445,13 @@
     </p:spTree>
     <p:extLst>
       <p:ext uri="{BB962C8B-B14F-4D97-AF65-F5344CB8AC3E}">
-        <p14:creationId xmlns:p14="http://schemas.microsoft.com/office/powerpoint/2010/main" val="2623252185"/>
+        <p14:creationId xmlns:p14="http://schemas.microsoft.com/office/powerpoint/2010/main" val="2849513830"/>
       </p:ext>
     </p:extLst>
   </p:cSld>
   <p:clrMap bg1="lt1" tx1="dk1" bg2="lt2" tx2="dk2" accent1="accent1" accent2="accent2" accent3="accent3" accent4="accent4" accent5="accent5" accent6="accent6" hlink="hlink" folHlink="folHlink"/>
   <p:notesStyle>
-    <a:lvl1pPr marL="0" algn="l" defTabSz="457200" rtl="0" eaLnBrk="1" latinLnBrk="0" hangingPunct="1">
+    <a:lvl1pPr marL="0" algn="l" defTabSz="914400" rtl="0" eaLnBrk="1" latinLnBrk="0" hangingPunct="1">
       <a:defRPr sz="1200" kern="1200">
         <a:solidFill>
           <a:schemeClr val="tx1"/>
@@ -414,7 +461,7 @@
         <a:cs typeface="+mn-cs"/>
       </a:defRPr>
     </a:lvl1pPr>
-    <a:lvl2pPr marL="457200" algn="l" defTabSz="457200" rtl="0" eaLnBrk="1" latinLnBrk="0" hangingPunct="1">
+    <a:lvl2pPr marL="457200" algn="l" defTabSz="914400" rtl="0" eaLnBrk="1" latinLnBrk="0" hangingPunct="1">
       <a:defRPr sz="1200" kern="1200">
         <a:solidFill>
           <a:schemeClr val="tx1"/>
@@ -424,7 +471,7 @@
         <a:cs typeface="+mn-cs"/>
       </a:defRPr>
     </a:lvl2pPr>
-    <a:lvl3pPr marL="914400" algn="l" defTabSz="457200" rtl="0" eaLnBrk="1" latinLnBrk="0" hangingPunct="1">
+    <a:lvl3pPr marL="914400" algn="l" defTabSz="914400" rtl="0" eaLnBrk="1" latinLnBrk="0" hangingPunct="1">
       <a:defRPr sz="1200" kern="1200">
         <a:solidFill>
           <a:schemeClr val="tx1"/>
@@ -434,7 +481,7 @@
         <a:cs typeface="+mn-cs"/>
       </a:defRPr>
     </a:lvl3pPr>
-    <a:lvl4pPr marL="1371600" algn="l" defTabSz="457200" rtl="0" eaLnBrk="1" latinLnBrk="0" hangingPunct="1">
+    <a:lvl4pPr marL="1371600" algn="l" defTabSz="914400" rtl="0" eaLnBrk="1" latinLnBrk="0" hangingPunct="1">
       <a:defRPr sz="1200" kern="1200">
         <a:solidFill>
           <a:schemeClr val="tx1"/>
@@ -444,7 +491,7 @@
         <a:cs typeface="+mn-cs"/>
       </a:defRPr>
     </a:lvl4pPr>
-    <a:lvl5pPr marL="1828800" algn="l" defTabSz="457200" rtl="0" eaLnBrk="1" latinLnBrk="0" hangingPunct="1">
+    <a:lvl5pPr marL="1828800" algn="l" defTabSz="914400" rtl="0" eaLnBrk="1" latinLnBrk="0" hangingPunct="1">
       <a:defRPr sz="1200" kern="1200">
         <a:solidFill>
           <a:schemeClr val="tx1"/>
@@ -454,7 +501,7 @@
         <a:cs typeface="+mn-cs"/>
       </a:defRPr>
     </a:lvl5pPr>
-    <a:lvl6pPr marL="2286000" algn="l" defTabSz="457200" rtl="0" eaLnBrk="1" latinLnBrk="0" hangingPunct="1">
+    <a:lvl6pPr marL="2286000" algn="l" defTabSz="914400" rtl="0" eaLnBrk="1" latinLnBrk="0" hangingPunct="1">
       <a:defRPr sz="1200" kern="1200">
         <a:solidFill>
           <a:schemeClr val="tx1"/>
@@ -464,7 +511,7 @@
         <a:cs typeface="+mn-cs"/>
       </a:defRPr>
     </a:lvl6pPr>
-    <a:lvl7pPr marL="2743200" algn="l" defTabSz="457200" rtl="0" eaLnBrk="1" latinLnBrk="0" hangingPunct="1">
+    <a:lvl7pPr marL="2743200" algn="l" defTabSz="914400" rtl="0" eaLnBrk="1" latinLnBrk="0" hangingPunct="1">
       <a:defRPr sz="1200" kern="1200">
         <a:solidFill>
           <a:schemeClr val="tx1"/>
@@ -474,7 +521,7 @@
         <a:cs typeface="+mn-cs"/>
       </a:defRPr>
     </a:lvl7pPr>
-    <a:lvl8pPr marL="3200400" algn="l" defTabSz="457200" rtl="0" eaLnBrk="1" latinLnBrk="0" hangingPunct="1">
+    <a:lvl8pPr marL="3200400" algn="l" defTabSz="914400" rtl="0" eaLnBrk="1" latinLnBrk="0" hangingPunct="1">
       <a:defRPr sz="1200" kern="1200">
         <a:solidFill>
           <a:schemeClr val="tx1"/>
@@ -484,7 +531,7 @@
         <a:cs typeface="+mn-cs"/>
       </a:defRPr>
     </a:lvl8pPr>
-    <a:lvl9pPr marL="3657600" algn="l" defTabSz="457200" rtl="0" eaLnBrk="1" latinLnBrk="0" hangingPunct="1">
+    <a:lvl9pPr marL="3657600" algn="l" defTabSz="914400" rtl="0" eaLnBrk="1" latinLnBrk="0" hangingPunct="1">
       <a:defRPr sz="1200" kern="1200">
         <a:solidFill>
           <a:schemeClr val="tx1"/>
@@ -499,7 +546,7 @@
 </file>
 
 <file path=ppt/notesSlides/notesSlide1.xml><?xml version="1.0" encoding="utf-8"?>
-<p:notes xmlns:a="http://schemas.openxmlformats.org/drawingml/2006/main" xmlns:p="http://schemas.openxmlformats.org/presentationml/2006/main" xmlns:r="http://schemas.openxmlformats.org/officeDocument/2006/relationships">
+<p:notes xmlns:a="http://schemas.openxmlformats.org/drawingml/2006/main" xmlns:r="http://schemas.openxmlformats.org/officeDocument/2006/relationships" xmlns:p="http://schemas.openxmlformats.org/presentationml/2006/main">
   <p:cSld>
     <p:spTree>
       <p:nvGrpSpPr>
@@ -519,7 +566,7 @@
         <p:nvSpPr>
           <p:cNvPr id="2" name="Slide Image Placeholder 1"/>
           <p:cNvSpPr>
-            <a:spLocks noGrp="1"/>
+            <a:spLocks noGrp="1" noRot="1" noChangeAspect="1"/>
           </p:cNvSpPr>
           <p:nvPr>
             <p:ph type="sldImg" idx="2"/>
@@ -534,7 +581,7 @@
             <a:spLocks noGrp="1"/>
           </p:cNvSpPr>
           <p:nvPr>
-            <p:ph type="body" idx="3" sz="quarter"/>
+            <p:ph type="body" sz="quarter" idx="3"/>
           </p:nvPr>
         </p:nvSpPr>
         <p:spPr/>
@@ -555,7 +602,7 @@
             <a:spLocks noGrp="1"/>
           </p:cNvSpPr>
           <p:nvPr>
-            <p:ph type="sldNum" idx="5" sz="quarter"/>
+            <p:ph type="sldNum" sz="quarter" idx="5"/>
           </p:nvPr>
         </p:nvSpPr>
         <p:spPr/>
@@ -569,7 +616,7 @@
 </file>
 
 <file path=ppt/notesSlides/notesSlide10.xml><?xml version="1.0" encoding="utf-8"?>
-<p:notes xmlns:a="http://schemas.openxmlformats.org/drawingml/2006/main" xmlns:p="http://schemas.openxmlformats.org/presentationml/2006/main" xmlns:r="http://schemas.openxmlformats.org/officeDocument/2006/relationships">
+<p:notes xmlns:a="http://schemas.openxmlformats.org/drawingml/2006/main" xmlns:r="http://schemas.openxmlformats.org/officeDocument/2006/relationships" xmlns:p="http://schemas.openxmlformats.org/presentationml/2006/main">
   <p:cSld>
     <p:spTree>
       <p:nvGrpSpPr>
@@ -589,7 +636,7 @@
         <p:nvSpPr>
           <p:cNvPr id="2" name="Slide Image Placeholder 1"/>
           <p:cNvSpPr>
-            <a:spLocks noGrp="1"/>
+            <a:spLocks noGrp="1" noRot="1" noChangeAspect="1"/>
           </p:cNvSpPr>
           <p:nvPr>
             <p:ph type="sldImg" idx="2"/>
@@ -604,7 +651,7 @@
             <a:spLocks noGrp="1"/>
           </p:cNvSpPr>
           <p:nvPr>
-            <p:ph type="body" idx="3" sz="quarter"/>
+            <p:ph type="body" sz="quarter" idx="3"/>
           </p:nvPr>
         </p:nvSpPr>
         <p:spPr/>
@@ -625,7 +672,7 @@
             <a:spLocks noGrp="1"/>
           </p:cNvSpPr>
           <p:nvPr>
-            <p:ph type="sldNum" idx="5" sz="quarter"/>
+            <p:ph type="sldNum" sz="quarter" idx="5"/>
           </p:nvPr>
         </p:nvSpPr>
         <p:spPr/>
@@ -639,7 +686,7 @@
 </file>
 
 <file path=ppt/notesSlides/notesSlide11.xml><?xml version="1.0" encoding="utf-8"?>
-<p:notes xmlns:a="http://schemas.openxmlformats.org/drawingml/2006/main" xmlns:p="http://schemas.openxmlformats.org/presentationml/2006/main" xmlns:r="http://schemas.openxmlformats.org/officeDocument/2006/relationships">
+<p:notes xmlns:a="http://schemas.openxmlformats.org/drawingml/2006/main" xmlns:r="http://schemas.openxmlformats.org/officeDocument/2006/relationships" xmlns:p="http://schemas.openxmlformats.org/presentationml/2006/main">
   <p:cSld>
     <p:spTree>
       <p:nvGrpSpPr>
@@ -659,7 +706,7 @@
         <p:nvSpPr>
           <p:cNvPr id="2" name="Slide Image Placeholder 1"/>
           <p:cNvSpPr>
-            <a:spLocks noGrp="1"/>
+            <a:spLocks noGrp="1" noRot="1" noChangeAspect="1"/>
           </p:cNvSpPr>
           <p:nvPr>
             <p:ph type="sldImg" idx="2"/>
@@ -674,7 +721,7 @@
             <a:spLocks noGrp="1"/>
           </p:cNvSpPr>
           <p:nvPr>
-            <p:ph type="body" idx="3" sz="quarter"/>
+            <p:ph type="body" sz="quarter" idx="3"/>
           </p:nvPr>
         </p:nvSpPr>
         <p:spPr/>
@@ -695,7 +742,7 @@
             <a:spLocks noGrp="1"/>
           </p:cNvSpPr>
           <p:nvPr>
-            <p:ph type="sldNum" idx="5" sz="quarter"/>
+            <p:ph type="sldNum" sz="quarter" idx="5"/>
           </p:nvPr>
         </p:nvSpPr>
         <p:spPr/>
@@ -709,7 +756,7 @@
 </file>
 
 <file path=ppt/notesSlides/notesSlide12.xml><?xml version="1.0" encoding="utf-8"?>
-<p:notes xmlns:a="http://schemas.openxmlformats.org/drawingml/2006/main" xmlns:p="http://schemas.openxmlformats.org/presentationml/2006/main" xmlns:r="http://schemas.openxmlformats.org/officeDocument/2006/relationships">
+<p:notes xmlns:a="http://schemas.openxmlformats.org/drawingml/2006/main" xmlns:r="http://schemas.openxmlformats.org/officeDocument/2006/relationships" xmlns:p="http://schemas.openxmlformats.org/presentationml/2006/main">
   <p:cSld>
     <p:spTree>
       <p:nvGrpSpPr>
@@ -729,7 +776,7 @@
         <p:nvSpPr>
           <p:cNvPr id="2" name="Slide Image Placeholder 1"/>
           <p:cNvSpPr>
-            <a:spLocks noGrp="1"/>
+            <a:spLocks noGrp="1" noRot="1" noChangeAspect="1"/>
           </p:cNvSpPr>
           <p:nvPr>
             <p:ph type="sldImg" idx="2"/>
@@ -744,7 +791,7 @@
             <a:spLocks noGrp="1"/>
           </p:cNvSpPr>
           <p:nvPr>
-            <p:ph type="body" idx="3" sz="quarter"/>
+            <p:ph type="body" sz="quarter" idx="3"/>
           </p:nvPr>
         </p:nvSpPr>
         <p:spPr/>
@@ -765,7 +812,7 @@
             <a:spLocks noGrp="1"/>
           </p:cNvSpPr>
           <p:nvPr>
-            <p:ph type="sldNum" idx="5" sz="quarter"/>
+            <p:ph type="sldNum" sz="quarter" idx="5"/>
           </p:nvPr>
         </p:nvSpPr>
         <p:spPr/>
@@ -779,7 +826,7 @@
 </file>
 
 <file path=ppt/notesSlides/notesSlide13.xml><?xml version="1.0" encoding="utf-8"?>
-<p:notes xmlns:a="http://schemas.openxmlformats.org/drawingml/2006/main" xmlns:p="http://schemas.openxmlformats.org/presentationml/2006/main" xmlns:r="http://schemas.openxmlformats.org/officeDocument/2006/relationships">
+<p:notes xmlns:a="http://schemas.openxmlformats.org/drawingml/2006/main" xmlns:r="http://schemas.openxmlformats.org/officeDocument/2006/relationships" xmlns:p="http://schemas.openxmlformats.org/presentationml/2006/main">
   <p:cSld>
     <p:spTree>
       <p:nvGrpSpPr>
@@ -799,7 +846,7 @@
         <p:nvSpPr>
           <p:cNvPr id="2" name="Slide Image Placeholder 1"/>
           <p:cNvSpPr>
-            <a:spLocks noGrp="1"/>
+            <a:spLocks noGrp="1" noRot="1" noChangeAspect="1"/>
           </p:cNvSpPr>
           <p:nvPr>
             <p:ph type="sldImg" idx="2"/>
@@ -814,7 +861,7 @@
             <a:spLocks noGrp="1"/>
           </p:cNvSpPr>
           <p:nvPr>
-            <p:ph type="body" idx="3" sz="quarter"/>
+            <p:ph type="body" sz="quarter" idx="3"/>
           </p:nvPr>
         </p:nvSpPr>
         <p:spPr/>
@@ -835,7 +882,7 @@
             <a:spLocks noGrp="1"/>
           </p:cNvSpPr>
           <p:nvPr>
-            <p:ph type="sldNum" idx="5" sz="quarter"/>
+            <p:ph type="sldNum" sz="quarter" idx="5"/>
           </p:nvPr>
         </p:nvSpPr>
         <p:spPr/>
@@ -849,7 +896,7 @@
 </file>
 
 <file path=ppt/notesSlides/notesSlide14.xml><?xml version="1.0" encoding="utf-8"?>
-<p:notes xmlns:a="http://schemas.openxmlformats.org/drawingml/2006/main" xmlns:p="http://schemas.openxmlformats.org/presentationml/2006/main" xmlns:r="http://schemas.openxmlformats.org/officeDocument/2006/relationships">
+<p:notes xmlns:a="http://schemas.openxmlformats.org/drawingml/2006/main" xmlns:r="http://schemas.openxmlformats.org/officeDocument/2006/relationships" xmlns:p="http://schemas.openxmlformats.org/presentationml/2006/main">
   <p:cSld>
     <p:spTree>
       <p:nvGrpSpPr>
@@ -869,7 +916,7 @@
         <p:nvSpPr>
           <p:cNvPr id="2" name="Slide Image Placeholder 1"/>
           <p:cNvSpPr>
-            <a:spLocks noGrp="1"/>
+            <a:spLocks noGrp="1" noRot="1" noChangeAspect="1"/>
           </p:cNvSpPr>
           <p:nvPr>
             <p:ph type="sldImg" idx="2"/>
@@ -884,7 +931,7 @@
             <a:spLocks noGrp="1"/>
           </p:cNvSpPr>
           <p:nvPr>
-            <p:ph type="body" idx="3" sz="quarter"/>
+            <p:ph type="body" sz="quarter" idx="3"/>
           </p:nvPr>
         </p:nvSpPr>
         <p:spPr/>
@@ -905,7 +952,7 @@
             <a:spLocks noGrp="1"/>
           </p:cNvSpPr>
           <p:nvPr>
-            <p:ph type="sldNum" idx="5" sz="quarter"/>
+            <p:ph type="sldNum" sz="quarter" idx="5"/>
           </p:nvPr>
         </p:nvSpPr>
         <p:spPr/>
@@ -919,7 +966,7 @@
 </file>
 
 <file path=ppt/notesSlides/notesSlide15.xml><?xml version="1.0" encoding="utf-8"?>
-<p:notes xmlns:a="http://schemas.openxmlformats.org/drawingml/2006/main" xmlns:p="http://schemas.openxmlformats.org/presentationml/2006/main" xmlns:r="http://schemas.openxmlformats.org/officeDocument/2006/relationships">
+<p:notes xmlns:a="http://schemas.openxmlformats.org/drawingml/2006/main" xmlns:r="http://schemas.openxmlformats.org/officeDocument/2006/relationships" xmlns:p="http://schemas.openxmlformats.org/presentationml/2006/main">
   <p:cSld>
     <p:spTree>
       <p:nvGrpSpPr>
@@ -939,7 +986,7 @@
         <p:nvSpPr>
           <p:cNvPr id="2" name="Slide Image Placeholder 1"/>
           <p:cNvSpPr>
-            <a:spLocks noGrp="1"/>
+            <a:spLocks noGrp="1" noRot="1" noChangeAspect="1"/>
           </p:cNvSpPr>
           <p:nvPr>
             <p:ph type="sldImg" idx="2"/>
@@ -954,7 +1001,7 @@
             <a:spLocks noGrp="1"/>
           </p:cNvSpPr>
           <p:nvPr>
-            <p:ph type="body" idx="3" sz="quarter"/>
+            <p:ph type="body" sz="quarter" idx="3"/>
           </p:nvPr>
         </p:nvSpPr>
         <p:spPr/>
@@ -975,7 +1022,7 @@
             <a:spLocks noGrp="1"/>
           </p:cNvSpPr>
           <p:nvPr>
-            <p:ph type="sldNum" idx="5" sz="quarter"/>
+            <p:ph type="sldNum" sz="quarter" idx="5"/>
           </p:nvPr>
         </p:nvSpPr>
         <p:spPr/>
@@ -989,7 +1036,7 @@
 </file>
 
 <file path=ppt/notesSlides/notesSlide16.xml><?xml version="1.0" encoding="utf-8"?>
-<p:notes xmlns:a="http://schemas.openxmlformats.org/drawingml/2006/main" xmlns:p="http://schemas.openxmlformats.org/presentationml/2006/main" xmlns:r="http://schemas.openxmlformats.org/officeDocument/2006/relationships">
+<p:notes xmlns:a="http://schemas.openxmlformats.org/drawingml/2006/main" xmlns:r="http://schemas.openxmlformats.org/officeDocument/2006/relationships" xmlns:p="http://schemas.openxmlformats.org/presentationml/2006/main">
   <p:cSld>
     <p:spTree>
       <p:nvGrpSpPr>
@@ -1009,7 +1056,7 @@
         <p:nvSpPr>
           <p:cNvPr id="2" name="Slide Image Placeholder 1"/>
           <p:cNvSpPr>
-            <a:spLocks noGrp="1"/>
+            <a:spLocks noGrp="1" noRot="1" noChangeAspect="1"/>
           </p:cNvSpPr>
           <p:nvPr>
             <p:ph type="sldImg" idx="2"/>
@@ -1024,7 +1071,7 @@
             <a:spLocks noGrp="1"/>
           </p:cNvSpPr>
           <p:nvPr>
-            <p:ph type="body" idx="3" sz="quarter"/>
+            <p:ph type="body" sz="quarter" idx="3"/>
           </p:nvPr>
         </p:nvSpPr>
         <p:spPr/>
@@ -1045,7 +1092,7 @@
             <a:spLocks noGrp="1"/>
           </p:cNvSpPr>
           <p:nvPr>
-            <p:ph type="sldNum" idx="5" sz="quarter"/>
+            <p:ph type="sldNum" sz="quarter" idx="5"/>
           </p:nvPr>
         </p:nvSpPr>
         <p:spPr/>
@@ -1059,7 +1106,7 @@
 </file>
 
 <file path=ppt/notesSlides/notesSlide17.xml><?xml version="1.0" encoding="utf-8"?>
-<p:notes xmlns:a="http://schemas.openxmlformats.org/drawingml/2006/main" xmlns:p="http://schemas.openxmlformats.org/presentationml/2006/main" xmlns:r="http://schemas.openxmlformats.org/officeDocument/2006/relationships">
+<p:notes xmlns:a="http://schemas.openxmlformats.org/drawingml/2006/main" xmlns:r="http://schemas.openxmlformats.org/officeDocument/2006/relationships" xmlns:p="http://schemas.openxmlformats.org/presentationml/2006/main">
   <p:cSld>
     <p:spTree>
       <p:nvGrpSpPr>
@@ -1079,7 +1126,7 @@
         <p:nvSpPr>
           <p:cNvPr id="2" name="Slide Image Placeholder 1"/>
           <p:cNvSpPr>
-            <a:spLocks noGrp="1"/>
+            <a:spLocks noGrp="1" noRot="1" noChangeAspect="1"/>
           </p:cNvSpPr>
           <p:nvPr>
             <p:ph type="sldImg" idx="2"/>
@@ -1094,7 +1141,7 @@
             <a:spLocks noGrp="1"/>
           </p:cNvSpPr>
           <p:nvPr>
-            <p:ph type="body" idx="3" sz="quarter"/>
+            <p:ph type="body" sz="quarter" idx="3"/>
           </p:nvPr>
         </p:nvSpPr>
         <p:spPr/>
@@ -1115,7 +1162,7 @@
             <a:spLocks noGrp="1"/>
           </p:cNvSpPr>
           <p:nvPr>
-            <p:ph type="sldNum" idx="5" sz="quarter"/>
+            <p:ph type="sldNum" sz="quarter" idx="5"/>
           </p:nvPr>
         </p:nvSpPr>
         <p:spPr/>
@@ -1129,7 +1176,7 @@
 </file>
 
 <file path=ppt/notesSlides/notesSlide18.xml><?xml version="1.0" encoding="utf-8"?>
-<p:notes xmlns:a="http://schemas.openxmlformats.org/drawingml/2006/main" xmlns:p="http://schemas.openxmlformats.org/presentationml/2006/main" xmlns:r="http://schemas.openxmlformats.org/officeDocument/2006/relationships">
+<p:notes xmlns:a="http://schemas.openxmlformats.org/drawingml/2006/main" xmlns:r="http://schemas.openxmlformats.org/officeDocument/2006/relationships" xmlns:p="http://schemas.openxmlformats.org/presentationml/2006/main">
   <p:cSld>
     <p:spTree>
       <p:nvGrpSpPr>
@@ -1149,7 +1196,7 @@
         <p:nvSpPr>
           <p:cNvPr id="2" name="Slide Image Placeholder 1"/>
           <p:cNvSpPr>
-            <a:spLocks noGrp="1"/>
+            <a:spLocks noGrp="1" noRot="1" noChangeAspect="1"/>
           </p:cNvSpPr>
           <p:nvPr>
             <p:ph type="sldImg" idx="2"/>
@@ -1164,7 +1211,7 @@
             <a:spLocks noGrp="1"/>
           </p:cNvSpPr>
           <p:nvPr>
-            <p:ph type="body" idx="3" sz="quarter"/>
+            <p:ph type="body" sz="quarter" idx="3"/>
           </p:nvPr>
         </p:nvSpPr>
         <p:spPr/>
@@ -1185,7 +1232,7 @@
             <a:spLocks noGrp="1"/>
           </p:cNvSpPr>
           <p:nvPr>
-            <p:ph type="sldNum" idx="5" sz="quarter"/>
+            <p:ph type="sldNum" sz="quarter" idx="5"/>
           </p:nvPr>
         </p:nvSpPr>
         <p:spPr/>
@@ -1199,7 +1246,7 @@
 </file>
 
 <file path=ppt/notesSlides/notesSlide19.xml><?xml version="1.0" encoding="utf-8"?>
-<p:notes xmlns:a="http://schemas.openxmlformats.org/drawingml/2006/main" xmlns:p="http://schemas.openxmlformats.org/presentationml/2006/main" xmlns:r="http://schemas.openxmlformats.org/officeDocument/2006/relationships">
+<p:notes xmlns:a="http://schemas.openxmlformats.org/drawingml/2006/main" xmlns:r="http://schemas.openxmlformats.org/officeDocument/2006/relationships" xmlns:p="http://schemas.openxmlformats.org/presentationml/2006/main">
   <p:cSld>
     <p:spTree>
       <p:nvGrpSpPr>
@@ -1219,7 +1266,7 @@
         <p:nvSpPr>
           <p:cNvPr id="2" name="Slide Image Placeholder 1"/>
           <p:cNvSpPr>
-            <a:spLocks noGrp="1"/>
+            <a:spLocks noGrp="1" noRot="1" noChangeAspect="1"/>
           </p:cNvSpPr>
           <p:nvPr>
             <p:ph type="sldImg" idx="2"/>
@@ -1234,7 +1281,7 @@
             <a:spLocks noGrp="1"/>
           </p:cNvSpPr>
           <p:nvPr>
-            <p:ph type="body" idx="3" sz="quarter"/>
+            <p:ph type="body" sz="quarter" idx="3"/>
           </p:nvPr>
         </p:nvSpPr>
         <p:spPr/>
@@ -1255,7 +1302,7 @@
             <a:spLocks noGrp="1"/>
           </p:cNvSpPr>
           <p:nvPr>
-            <p:ph type="sldNum" idx="5" sz="quarter"/>
+            <p:ph type="sldNum" sz="quarter" idx="5"/>
           </p:nvPr>
         </p:nvSpPr>
         <p:spPr/>
@@ -1269,7 +1316,7 @@
 </file>
 
 <file path=ppt/notesSlides/notesSlide2.xml><?xml version="1.0" encoding="utf-8"?>
-<p:notes xmlns:a="http://schemas.openxmlformats.org/drawingml/2006/main" xmlns:p="http://schemas.openxmlformats.org/presentationml/2006/main" xmlns:r="http://schemas.openxmlformats.org/officeDocument/2006/relationships">
+<p:notes xmlns:a="http://schemas.openxmlformats.org/drawingml/2006/main" xmlns:r="http://schemas.openxmlformats.org/officeDocument/2006/relationships" xmlns:p="http://schemas.openxmlformats.org/presentationml/2006/main">
   <p:cSld>
     <p:spTree>
       <p:nvGrpSpPr>
@@ -1289,7 +1336,7 @@
         <p:nvSpPr>
           <p:cNvPr id="2" name="Slide Image Placeholder 1"/>
           <p:cNvSpPr>
-            <a:spLocks noGrp="1"/>
+            <a:spLocks noGrp="1" noRot="1" noChangeAspect="1"/>
           </p:cNvSpPr>
           <p:nvPr>
             <p:ph type="sldImg" idx="2"/>
@@ -1304,7 +1351,7 @@
             <a:spLocks noGrp="1"/>
           </p:cNvSpPr>
           <p:nvPr>
-            <p:ph type="body" idx="3" sz="quarter"/>
+            <p:ph type="body" sz="quarter" idx="3"/>
           </p:nvPr>
         </p:nvSpPr>
         <p:spPr/>
@@ -1325,7 +1372,7 @@
             <a:spLocks noGrp="1"/>
           </p:cNvSpPr>
           <p:nvPr>
-            <p:ph type="sldNum" idx="5" sz="quarter"/>
+            <p:ph type="sldNum" sz="quarter" idx="5"/>
           </p:nvPr>
         </p:nvSpPr>
         <p:spPr/>
@@ -1339,7 +1386,7 @@
 </file>
 
 <file path=ppt/notesSlides/notesSlide20.xml><?xml version="1.0" encoding="utf-8"?>
-<p:notes xmlns:a="http://schemas.openxmlformats.org/drawingml/2006/main" xmlns:p="http://schemas.openxmlformats.org/presentationml/2006/main" xmlns:r="http://schemas.openxmlformats.org/officeDocument/2006/relationships">
+<p:notes xmlns:a="http://schemas.openxmlformats.org/drawingml/2006/main" xmlns:r="http://schemas.openxmlformats.org/officeDocument/2006/relationships" xmlns:p="http://schemas.openxmlformats.org/presentationml/2006/main">
   <p:cSld>
     <p:spTree>
       <p:nvGrpSpPr>
@@ -1359,7 +1406,7 @@
         <p:nvSpPr>
           <p:cNvPr id="2" name="Slide Image Placeholder 1"/>
           <p:cNvSpPr>
-            <a:spLocks noGrp="1"/>
+            <a:spLocks noGrp="1" noRot="1" noChangeAspect="1"/>
           </p:cNvSpPr>
           <p:nvPr>
             <p:ph type="sldImg" idx="2"/>
@@ -1374,7 +1421,7 @@
             <a:spLocks noGrp="1"/>
           </p:cNvSpPr>
           <p:nvPr>
-            <p:ph type="body" idx="3" sz="quarter"/>
+            <p:ph type="body" sz="quarter" idx="3"/>
           </p:nvPr>
         </p:nvSpPr>
         <p:spPr/>
@@ -1395,7 +1442,7 @@
             <a:spLocks noGrp="1"/>
           </p:cNvSpPr>
           <p:nvPr>
-            <p:ph type="sldNum" idx="5" sz="quarter"/>
+            <p:ph type="sldNum" sz="quarter" idx="5"/>
           </p:nvPr>
         </p:nvSpPr>
         <p:spPr/>
@@ -1409,7 +1456,7 @@
 </file>
 
 <file path=ppt/notesSlides/notesSlide21.xml><?xml version="1.0" encoding="utf-8"?>
-<p:notes xmlns:a="http://schemas.openxmlformats.org/drawingml/2006/main" xmlns:p="http://schemas.openxmlformats.org/presentationml/2006/main" xmlns:r="http://schemas.openxmlformats.org/officeDocument/2006/relationships">
+<p:notes xmlns:a="http://schemas.openxmlformats.org/drawingml/2006/main" xmlns:r="http://schemas.openxmlformats.org/officeDocument/2006/relationships" xmlns:p="http://schemas.openxmlformats.org/presentationml/2006/main">
   <p:cSld>
     <p:spTree>
       <p:nvGrpSpPr>
@@ -1429,7 +1476,7 @@
         <p:nvSpPr>
           <p:cNvPr id="2" name="Slide Image Placeholder 1"/>
           <p:cNvSpPr>
-            <a:spLocks noGrp="1"/>
+            <a:spLocks noGrp="1" noRot="1" noChangeAspect="1"/>
           </p:cNvSpPr>
           <p:nvPr>
             <p:ph type="sldImg" idx="2"/>
@@ -1444,7 +1491,7 @@
             <a:spLocks noGrp="1"/>
           </p:cNvSpPr>
           <p:nvPr>
-            <p:ph type="body" idx="3" sz="quarter"/>
+            <p:ph type="body" sz="quarter" idx="3"/>
           </p:nvPr>
         </p:nvSpPr>
         <p:spPr/>
@@ -1465,7 +1512,7 @@
             <a:spLocks noGrp="1"/>
           </p:cNvSpPr>
           <p:nvPr>
-            <p:ph type="sldNum" idx="5" sz="quarter"/>
+            <p:ph type="sldNum" sz="quarter" idx="5"/>
           </p:nvPr>
         </p:nvSpPr>
         <p:spPr/>
@@ -1479,7 +1526,7 @@
 </file>
 
 <file path=ppt/notesSlides/notesSlide22.xml><?xml version="1.0" encoding="utf-8"?>
-<p:notes xmlns:a="http://schemas.openxmlformats.org/drawingml/2006/main" xmlns:p="http://schemas.openxmlformats.org/presentationml/2006/main" xmlns:r="http://schemas.openxmlformats.org/officeDocument/2006/relationships">
+<p:notes xmlns:a="http://schemas.openxmlformats.org/drawingml/2006/main" xmlns:r="http://schemas.openxmlformats.org/officeDocument/2006/relationships" xmlns:p="http://schemas.openxmlformats.org/presentationml/2006/main">
   <p:cSld>
     <p:spTree>
       <p:nvGrpSpPr>
@@ -1499,7 +1546,7 @@
         <p:nvSpPr>
           <p:cNvPr id="2" name="Slide Image Placeholder 1"/>
           <p:cNvSpPr>
-            <a:spLocks noGrp="1"/>
+            <a:spLocks noGrp="1" noRot="1" noChangeAspect="1"/>
           </p:cNvSpPr>
           <p:nvPr>
             <p:ph type="sldImg" idx="2"/>
@@ -1514,7 +1561,7 @@
             <a:spLocks noGrp="1"/>
           </p:cNvSpPr>
           <p:nvPr>
-            <p:ph type="body" idx="3" sz="quarter"/>
+            <p:ph type="body" sz="quarter" idx="3"/>
           </p:nvPr>
         </p:nvSpPr>
         <p:spPr/>
@@ -1535,7 +1582,7 @@
             <a:spLocks noGrp="1"/>
           </p:cNvSpPr>
           <p:nvPr>
-            <p:ph type="sldNum" idx="5" sz="quarter"/>
+            <p:ph type="sldNum" sz="quarter" idx="5"/>
           </p:nvPr>
         </p:nvSpPr>
         <p:spPr/>
@@ -1549,7 +1596,7 @@
 </file>
 
 <file path=ppt/notesSlides/notesSlide23.xml><?xml version="1.0" encoding="utf-8"?>
-<p:notes xmlns:a="http://schemas.openxmlformats.org/drawingml/2006/main" xmlns:p="http://schemas.openxmlformats.org/presentationml/2006/main" xmlns:r="http://schemas.openxmlformats.org/officeDocument/2006/relationships">
+<p:notes xmlns:a="http://schemas.openxmlformats.org/drawingml/2006/main" xmlns:r="http://schemas.openxmlformats.org/officeDocument/2006/relationships" xmlns:p="http://schemas.openxmlformats.org/presentationml/2006/main">
   <p:cSld>
     <p:spTree>
       <p:nvGrpSpPr>
@@ -1569,7 +1616,7 @@
         <p:nvSpPr>
           <p:cNvPr id="2" name="Slide Image Placeholder 1"/>
           <p:cNvSpPr>
-            <a:spLocks noGrp="1"/>
+            <a:spLocks noGrp="1" noRot="1" noChangeAspect="1"/>
           </p:cNvSpPr>
           <p:nvPr>
             <p:ph type="sldImg" idx="2"/>
@@ -1584,7 +1631,7 @@
             <a:spLocks noGrp="1"/>
           </p:cNvSpPr>
           <p:nvPr>
-            <p:ph type="body" idx="3" sz="quarter"/>
+            <p:ph type="body" sz="quarter" idx="3"/>
           </p:nvPr>
         </p:nvSpPr>
         <p:spPr/>
@@ -1605,7 +1652,7 @@
             <a:spLocks noGrp="1"/>
           </p:cNvSpPr>
           <p:nvPr>
-            <p:ph type="sldNum" idx="5" sz="quarter"/>
+            <p:ph type="sldNum" sz="quarter" idx="5"/>
           </p:nvPr>
         </p:nvSpPr>
         <p:spPr/>
@@ -1619,7 +1666,7 @@
 </file>
 
 <file path=ppt/notesSlides/notesSlide24.xml><?xml version="1.0" encoding="utf-8"?>
-<p:notes xmlns:a="http://schemas.openxmlformats.org/drawingml/2006/main" xmlns:p="http://schemas.openxmlformats.org/presentationml/2006/main" xmlns:r="http://schemas.openxmlformats.org/officeDocument/2006/relationships">
+<p:notes xmlns:a="http://schemas.openxmlformats.org/drawingml/2006/main" xmlns:r="http://schemas.openxmlformats.org/officeDocument/2006/relationships" xmlns:p="http://schemas.openxmlformats.org/presentationml/2006/main">
   <p:cSld>
     <p:spTree>
       <p:nvGrpSpPr>
@@ -1639,7 +1686,7 @@
         <p:nvSpPr>
           <p:cNvPr id="2" name="Slide Image Placeholder 1"/>
           <p:cNvSpPr>
-            <a:spLocks noGrp="1"/>
+            <a:spLocks noGrp="1" noRot="1" noChangeAspect="1"/>
           </p:cNvSpPr>
           <p:nvPr>
             <p:ph type="sldImg" idx="2"/>
@@ -1654,7 +1701,7 @@
             <a:spLocks noGrp="1"/>
           </p:cNvSpPr>
           <p:nvPr>
-            <p:ph type="body" idx="3" sz="quarter"/>
+            <p:ph type="body" sz="quarter" idx="3"/>
           </p:nvPr>
         </p:nvSpPr>
         <p:spPr/>
@@ -1675,7 +1722,7 @@
             <a:spLocks noGrp="1"/>
           </p:cNvSpPr>
           <p:nvPr>
-            <p:ph type="sldNum" idx="5" sz="quarter"/>
+            <p:ph type="sldNum" sz="quarter" idx="5"/>
           </p:nvPr>
         </p:nvSpPr>
         <p:spPr/>
@@ -1689,7 +1736,7 @@
 </file>
 
 <file path=ppt/notesSlides/notesSlide25.xml><?xml version="1.0" encoding="utf-8"?>
-<p:notes xmlns:a="http://schemas.openxmlformats.org/drawingml/2006/main" xmlns:p="http://schemas.openxmlformats.org/presentationml/2006/main" xmlns:r="http://schemas.openxmlformats.org/officeDocument/2006/relationships">
+<p:notes xmlns:a="http://schemas.openxmlformats.org/drawingml/2006/main" xmlns:r="http://schemas.openxmlformats.org/officeDocument/2006/relationships" xmlns:p="http://schemas.openxmlformats.org/presentationml/2006/main">
   <p:cSld>
     <p:spTree>
       <p:nvGrpSpPr>
@@ -1709,7 +1756,7 @@
         <p:nvSpPr>
           <p:cNvPr id="2" name="Slide Image Placeholder 1"/>
           <p:cNvSpPr>
-            <a:spLocks noGrp="1"/>
+            <a:spLocks noGrp="1" noRot="1" noChangeAspect="1"/>
           </p:cNvSpPr>
           <p:nvPr>
             <p:ph type="sldImg" idx="2"/>
@@ -1724,7 +1771,7 @@
             <a:spLocks noGrp="1"/>
           </p:cNvSpPr>
           <p:nvPr>
-            <p:ph type="body" idx="3" sz="quarter"/>
+            <p:ph type="body" sz="quarter" idx="3"/>
           </p:nvPr>
         </p:nvSpPr>
         <p:spPr/>
@@ -1733,7 +1780,7 @@
           <a:lstStyle/>
           <a:p>
             <a:r>
-              <a:t>Junction 4's marker gained 110 m, junction 2's gained 348 m. The walk only crosses a road where traffic cannot branch off, or vehicles not heading for the junction would be given a turn through it.</a:t>
+              <a:t>Recomputed from the committed code: junction 2's marker gains 353 m, junction 5's 115 m, junction 10's 83 m, junction 9's 81 m, junction 15's 80 m, junction 4's 43 m and junction 7's 23 m. The walk only crosses a road where traffic cannot branch off, or vehicles not heading for the junction would be given a turn through it. Notice is measured from the decision to the stop bar, so it includes the length of the links skipped plus where the marker now sits on the one it landed on.</a:t>
             </a:r>
           </a:p>
         </p:txBody>
@@ -1745,7 +1792,7 @@
             <a:spLocks noGrp="1"/>
           </p:cNvSpPr>
           <p:nvPr>
-            <p:ph type="sldNum" idx="5" sz="quarter"/>
+            <p:ph type="sldNum" sz="quarter" idx="5"/>
           </p:nvPr>
         </p:nvSpPr>
         <p:spPr/>
@@ -1759,7 +1806,7 @@
 </file>
 
 <file path=ppt/notesSlides/notesSlide26.xml><?xml version="1.0" encoding="utf-8"?>
-<p:notes xmlns:a="http://schemas.openxmlformats.org/drawingml/2006/main" xmlns:p="http://schemas.openxmlformats.org/presentationml/2006/main" xmlns:r="http://schemas.openxmlformats.org/officeDocument/2006/relationships">
+<p:notes xmlns:a="http://schemas.openxmlformats.org/drawingml/2006/main" xmlns:r="http://schemas.openxmlformats.org/officeDocument/2006/relationships" xmlns:p="http://schemas.openxmlformats.org/presentationml/2006/main">
   <p:cSld>
     <p:spTree>
       <p:nvGrpSpPr>
@@ -1779,7 +1826,7 @@
         <p:nvSpPr>
           <p:cNvPr id="2" name="Slide Image Placeholder 1"/>
           <p:cNvSpPr>
-            <a:spLocks noGrp="1"/>
+            <a:spLocks noGrp="1" noRot="1" noChangeAspect="1"/>
           </p:cNvSpPr>
           <p:nvPr>
             <p:ph type="sldImg" idx="2"/>
@@ -1794,7 +1841,7 @@
             <a:spLocks noGrp="1"/>
           </p:cNvSpPr>
           <p:nvPr>
-            <p:ph type="body" idx="3" sz="quarter"/>
+            <p:ph type="body" sz="quarter" idx="3"/>
           </p:nvPr>
         </p:nvSpPr>
         <p:spPr/>
@@ -1815,7 +1862,7 @@
             <a:spLocks noGrp="1"/>
           </p:cNvSpPr>
           <p:nvPr>
-            <p:ph type="sldNum" idx="5" sz="quarter"/>
+            <p:ph type="sldNum" sz="quarter" idx="5"/>
           </p:nvPr>
         </p:nvSpPr>
         <p:spPr/>
@@ -1829,7 +1876,7 @@
 </file>
 
 <file path=ppt/notesSlides/notesSlide27.xml><?xml version="1.0" encoding="utf-8"?>
-<p:notes xmlns:a="http://schemas.openxmlformats.org/drawingml/2006/main" xmlns:p="http://schemas.openxmlformats.org/presentationml/2006/main" xmlns:r="http://schemas.openxmlformats.org/officeDocument/2006/relationships">
+<p:notes xmlns:a="http://schemas.openxmlformats.org/drawingml/2006/main" xmlns:r="http://schemas.openxmlformats.org/officeDocument/2006/relationships" xmlns:p="http://schemas.openxmlformats.org/presentationml/2006/main">
   <p:cSld>
     <p:spTree>
       <p:nvGrpSpPr>
@@ -1849,7 +1896,7 @@
         <p:nvSpPr>
           <p:cNvPr id="2" name="Slide Image Placeholder 1"/>
           <p:cNvSpPr>
-            <a:spLocks noGrp="1"/>
+            <a:spLocks noGrp="1" noRot="1" noChangeAspect="1"/>
           </p:cNvSpPr>
           <p:nvPr>
             <p:ph type="sldImg" idx="2"/>
@@ -1864,7 +1911,7 @@
             <a:spLocks noGrp="1"/>
           </p:cNvSpPr>
           <p:nvPr>
-            <p:ph type="body" idx="3" sz="quarter"/>
+            <p:ph type="body" sz="quarter" idx="3"/>
           </p:nvPr>
         </p:nvSpPr>
         <p:spPr/>
@@ -1873,7 +1920,7 @@
           <a:lstStyle/>
           <a:p>
             <a:r>
-              <a:t>This is the documented answer to the 45.8 m median approach against a 200 m lane-change distance. It is the modeller's call, so the pipeline never turns it on by itself. Verified: 34 of 34 decisions combined when asked, 0 when not.</a:t>
+              <a:t>This is the documented answer to the 45.8 m median approach against a 200 m lane-change distance. It is the modeller's call, so the pipeline never turns it on by itself. Verified: 34 of 34 decisions combined when asked, 0 when not. Combined and uncombined are different models, so they are written to chatt_demand_combined.inpx and chatt_demand.inpx and can be opened side by side; sharing one name meant the second run silently replaced the first.</a:t>
             </a:r>
           </a:p>
         </p:txBody>
@@ -1885,7 +1932,7 @@
             <a:spLocks noGrp="1"/>
           </p:cNvSpPr>
           <p:nvPr>
-            <p:ph type="sldNum" idx="5" sz="quarter"/>
+            <p:ph type="sldNum" sz="quarter" idx="5"/>
           </p:nvPr>
         </p:nvSpPr>
         <p:spPr/>
@@ -1899,7 +1946,7 @@
 </file>
 
 <file path=ppt/notesSlides/notesSlide28.xml><?xml version="1.0" encoding="utf-8"?>
-<p:notes xmlns:a="http://schemas.openxmlformats.org/drawingml/2006/main" xmlns:p="http://schemas.openxmlformats.org/presentationml/2006/main" xmlns:r="http://schemas.openxmlformats.org/officeDocument/2006/relationships">
+<p:notes xmlns:a="http://schemas.openxmlformats.org/drawingml/2006/main" xmlns:r="http://schemas.openxmlformats.org/officeDocument/2006/relationships" xmlns:p="http://schemas.openxmlformats.org/presentationml/2006/main">
   <p:cSld>
     <p:spTree>
       <p:nvGrpSpPr>
@@ -1919,7 +1966,7 @@
         <p:nvSpPr>
           <p:cNvPr id="2" name="Slide Image Placeholder 1"/>
           <p:cNvSpPr>
-            <a:spLocks noGrp="1"/>
+            <a:spLocks noGrp="1" noRot="1" noChangeAspect="1"/>
           </p:cNvSpPr>
           <p:nvPr>
             <p:ph type="sldImg" idx="2"/>
@@ -1934,7 +1981,7 @@
             <a:spLocks noGrp="1"/>
           </p:cNvSpPr>
           <p:nvPr>
-            <p:ph type="body" idx="3" sz="quarter"/>
+            <p:ph type="body" sz="quarter" idx="3"/>
           </p:nvPr>
         </p:nvSpPr>
         <p:spPr/>
@@ -1955,7 +2002,7 @@
             <a:spLocks noGrp="1"/>
           </p:cNvSpPr>
           <p:nvPr>
-            <p:ph type="sldNum" idx="5" sz="quarter"/>
+            <p:ph type="sldNum" sz="quarter" idx="5"/>
           </p:nvPr>
         </p:nvSpPr>
         <p:spPr/>
@@ -1969,7 +2016,7 @@
 </file>
 
 <file path=ppt/notesSlides/notesSlide29.xml><?xml version="1.0" encoding="utf-8"?>
-<p:notes xmlns:a="http://schemas.openxmlformats.org/drawingml/2006/main" xmlns:p="http://schemas.openxmlformats.org/presentationml/2006/main" xmlns:r="http://schemas.openxmlformats.org/officeDocument/2006/relationships">
+<p:notes xmlns:a="http://schemas.openxmlformats.org/drawingml/2006/main" xmlns:r="http://schemas.openxmlformats.org/officeDocument/2006/relationships" xmlns:p="http://schemas.openxmlformats.org/presentationml/2006/main">
   <p:cSld>
     <p:spTree>
       <p:nvGrpSpPr>
@@ -1989,7 +2036,7 @@
         <p:nvSpPr>
           <p:cNvPr id="2" name="Slide Image Placeholder 1"/>
           <p:cNvSpPr>
-            <a:spLocks noGrp="1"/>
+            <a:spLocks noGrp="1" noRot="1" noChangeAspect="1"/>
           </p:cNvSpPr>
           <p:nvPr>
             <p:ph type="sldImg" idx="2"/>
@@ -2004,7 +2051,7 @@
             <a:spLocks noGrp="1"/>
           </p:cNvSpPr>
           <p:nvPr>
-            <p:ph type="body" idx="3" sz="quarter"/>
+            <p:ph type="body" sz="quarter" idx="3"/>
           </p:nvPr>
         </p:nvSpPr>
         <p:spPr/>
@@ -2025,7 +2072,7 @@
             <a:spLocks noGrp="1"/>
           </p:cNvSpPr>
           <p:nvPr>
-            <p:ph type="sldNum" idx="5" sz="quarter"/>
+            <p:ph type="sldNum" sz="quarter" idx="5"/>
           </p:nvPr>
         </p:nvSpPr>
         <p:spPr/>
@@ -2039,7 +2086,7 @@
 </file>
 
 <file path=ppt/notesSlides/notesSlide3.xml><?xml version="1.0" encoding="utf-8"?>
-<p:notes xmlns:a="http://schemas.openxmlformats.org/drawingml/2006/main" xmlns:p="http://schemas.openxmlformats.org/presentationml/2006/main" xmlns:r="http://schemas.openxmlformats.org/officeDocument/2006/relationships">
+<p:notes xmlns:a="http://schemas.openxmlformats.org/drawingml/2006/main" xmlns:r="http://schemas.openxmlformats.org/officeDocument/2006/relationships" xmlns:p="http://schemas.openxmlformats.org/presentationml/2006/main">
   <p:cSld>
     <p:spTree>
       <p:nvGrpSpPr>
@@ -2059,7 +2106,7 @@
         <p:nvSpPr>
           <p:cNvPr id="2" name="Slide Image Placeholder 1"/>
           <p:cNvSpPr>
-            <a:spLocks noGrp="1"/>
+            <a:spLocks noGrp="1" noRot="1" noChangeAspect="1"/>
           </p:cNvSpPr>
           <p:nvPr>
             <p:ph type="sldImg" idx="2"/>
@@ -2074,7 +2121,7 @@
             <a:spLocks noGrp="1"/>
           </p:cNvSpPr>
           <p:nvPr>
-            <p:ph type="body" idx="3" sz="quarter"/>
+            <p:ph type="body" sz="quarter" idx="3"/>
           </p:nvPr>
         </p:nvSpPr>
         <p:spPr/>
@@ -2095,7 +2142,7 @@
             <a:spLocks noGrp="1"/>
           </p:cNvSpPr>
           <p:nvPr>
-            <p:ph type="sldNum" idx="5" sz="quarter"/>
+            <p:ph type="sldNum" sz="quarter" idx="5"/>
           </p:nvPr>
         </p:nvSpPr>
         <p:spPr/>
@@ -2109,7 +2156,7 @@
 </file>
 
 <file path=ppt/notesSlides/notesSlide30.xml><?xml version="1.0" encoding="utf-8"?>
-<p:notes xmlns:a="http://schemas.openxmlformats.org/drawingml/2006/main" xmlns:p="http://schemas.openxmlformats.org/presentationml/2006/main" xmlns:r="http://schemas.openxmlformats.org/officeDocument/2006/relationships">
+<p:notes xmlns:a="http://schemas.openxmlformats.org/drawingml/2006/main" xmlns:r="http://schemas.openxmlformats.org/officeDocument/2006/relationships" xmlns:p="http://schemas.openxmlformats.org/presentationml/2006/main">
   <p:cSld>
     <p:spTree>
       <p:nvGrpSpPr>
@@ -2129,7 +2176,7 @@
         <p:nvSpPr>
           <p:cNvPr id="2" name="Slide Image Placeholder 1"/>
           <p:cNvSpPr>
-            <a:spLocks noGrp="1"/>
+            <a:spLocks noGrp="1" noRot="1" noChangeAspect="1"/>
           </p:cNvSpPr>
           <p:nvPr>
             <p:ph type="sldImg" idx="2"/>
@@ -2144,7 +2191,7 @@
             <a:spLocks noGrp="1"/>
           </p:cNvSpPr>
           <p:nvPr>
-            <p:ph type="body" idx="3" sz="quarter"/>
+            <p:ph type="body" sz="quarter" idx="3"/>
           </p:nvPr>
         </p:nvSpPr>
         <p:spPr/>
@@ -2165,7 +2212,7 @@
             <a:spLocks noGrp="1"/>
           </p:cNvSpPr>
           <p:nvPr>
-            <p:ph type="sldNum" idx="5" sz="quarter"/>
+            <p:ph type="sldNum" sz="quarter" idx="5"/>
           </p:nvPr>
         </p:nvSpPr>
         <p:spPr/>
@@ -2179,7 +2226,7 @@
 </file>
 
 <file path=ppt/notesSlides/notesSlide31.xml><?xml version="1.0" encoding="utf-8"?>
-<p:notes xmlns:a="http://schemas.openxmlformats.org/drawingml/2006/main" xmlns:p="http://schemas.openxmlformats.org/presentationml/2006/main" xmlns:r="http://schemas.openxmlformats.org/officeDocument/2006/relationships">
+<p:notes xmlns:a="http://schemas.openxmlformats.org/drawingml/2006/main" xmlns:r="http://schemas.openxmlformats.org/officeDocument/2006/relationships" xmlns:p="http://schemas.openxmlformats.org/presentationml/2006/main">
   <p:cSld>
     <p:spTree>
       <p:nvGrpSpPr>
@@ -2199,7 +2246,7 @@
         <p:nvSpPr>
           <p:cNvPr id="2" name="Slide Image Placeholder 1"/>
           <p:cNvSpPr>
-            <a:spLocks noGrp="1"/>
+            <a:spLocks noGrp="1" noRot="1" noChangeAspect="1"/>
           </p:cNvSpPr>
           <p:nvPr>
             <p:ph type="sldImg" idx="2"/>
@@ -2214,7 +2261,7 @@
             <a:spLocks noGrp="1"/>
           </p:cNvSpPr>
           <p:nvPr>
-            <p:ph type="body" idx="3" sz="quarter"/>
+            <p:ph type="body" sz="quarter" idx="3"/>
           </p:nvPr>
         </p:nvSpPr>
         <p:spPr/>
@@ -2235,7 +2282,7 @@
             <a:spLocks noGrp="1"/>
           </p:cNvSpPr>
           <p:nvPr>
-            <p:ph type="sldNum" idx="5" sz="quarter"/>
+            <p:ph type="sldNum" sz="quarter" idx="5"/>
           </p:nvPr>
         </p:nvSpPr>
         <p:spPr/>
@@ -2249,7 +2296,7 @@
 </file>
 
 <file path=ppt/notesSlides/notesSlide32.xml><?xml version="1.0" encoding="utf-8"?>
-<p:notes xmlns:a="http://schemas.openxmlformats.org/drawingml/2006/main" xmlns:p="http://schemas.openxmlformats.org/presentationml/2006/main" xmlns:r="http://schemas.openxmlformats.org/officeDocument/2006/relationships">
+<p:notes xmlns:a="http://schemas.openxmlformats.org/drawingml/2006/main" xmlns:r="http://schemas.openxmlformats.org/officeDocument/2006/relationships" xmlns:p="http://schemas.openxmlformats.org/presentationml/2006/main">
   <p:cSld>
     <p:spTree>
       <p:nvGrpSpPr>
@@ -2269,7 +2316,7 @@
         <p:nvSpPr>
           <p:cNvPr id="2" name="Slide Image Placeholder 1"/>
           <p:cNvSpPr>
-            <a:spLocks noGrp="1"/>
+            <a:spLocks noGrp="1" noRot="1" noChangeAspect="1"/>
           </p:cNvSpPr>
           <p:nvPr>
             <p:ph type="sldImg" idx="2"/>
@@ -2284,7 +2331,7 @@
             <a:spLocks noGrp="1"/>
           </p:cNvSpPr>
           <p:nvPr>
-            <p:ph type="body" idx="3" sz="quarter"/>
+            <p:ph type="body" sz="quarter" idx="3"/>
           </p:nvPr>
         </p:nvSpPr>
         <p:spPr/>
@@ -2305,7 +2352,7 @@
             <a:spLocks noGrp="1"/>
           </p:cNvSpPr>
           <p:nvPr>
-            <p:ph type="sldNum" idx="5" sz="quarter"/>
+            <p:ph type="sldNum" sz="quarter" idx="5"/>
           </p:nvPr>
         </p:nvSpPr>
         <p:spPr/>
@@ -2319,7 +2366,7 @@
 </file>
 
 <file path=ppt/notesSlides/notesSlide4.xml><?xml version="1.0" encoding="utf-8"?>
-<p:notes xmlns:a="http://schemas.openxmlformats.org/drawingml/2006/main" xmlns:p="http://schemas.openxmlformats.org/presentationml/2006/main" xmlns:r="http://schemas.openxmlformats.org/officeDocument/2006/relationships">
+<p:notes xmlns:a="http://schemas.openxmlformats.org/drawingml/2006/main" xmlns:r="http://schemas.openxmlformats.org/officeDocument/2006/relationships" xmlns:p="http://schemas.openxmlformats.org/presentationml/2006/main">
   <p:cSld>
     <p:spTree>
       <p:nvGrpSpPr>
@@ -2339,7 +2386,7 @@
         <p:nvSpPr>
           <p:cNvPr id="2" name="Slide Image Placeholder 1"/>
           <p:cNvSpPr>
-            <a:spLocks noGrp="1"/>
+            <a:spLocks noGrp="1" noRot="1" noChangeAspect="1"/>
           </p:cNvSpPr>
           <p:nvPr>
             <p:ph type="sldImg" idx="2"/>
@@ -2354,7 +2401,7 @@
             <a:spLocks noGrp="1"/>
           </p:cNvSpPr>
           <p:nvPr>
-            <p:ph type="body" idx="3" sz="quarter"/>
+            <p:ph type="body" sz="quarter" idx="3"/>
           </p:nvPr>
         </p:nvSpPr>
         <p:spPr/>
@@ -2375,7 +2422,7 @@
             <a:spLocks noGrp="1"/>
           </p:cNvSpPr>
           <p:nvPr>
-            <p:ph type="sldNum" idx="5" sz="quarter"/>
+            <p:ph type="sldNum" sz="quarter" idx="5"/>
           </p:nvPr>
         </p:nvSpPr>
         <p:spPr/>
@@ -2389,7 +2436,7 @@
 </file>
 
 <file path=ppt/notesSlides/notesSlide5.xml><?xml version="1.0" encoding="utf-8"?>
-<p:notes xmlns:a="http://schemas.openxmlformats.org/drawingml/2006/main" xmlns:p="http://schemas.openxmlformats.org/presentationml/2006/main" xmlns:r="http://schemas.openxmlformats.org/officeDocument/2006/relationships">
+<p:notes xmlns:a="http://schemas.openxmlformats.org/drawingml/2006/main" xmlns:r="http://schemas.openxmlformats.org/officeDocument/2006/relationships" xmlns:p="http://schemas.openxmlformats.org/presentationml/2006/main">
   <p:cSld>
     <p:spTree>
       <p:nvGrpSpPr>
@@ -2409,7 +2456,7 @@
         <p:nvSpPr>
           <p:cNvPr id="2" name="Slide Image Placeholder 1"/>
           <p:cNvSpPr>
-            <a:spLocks noGrp="1"/>
+            <a:spLocks noGrp="1" noRot="1" noChangeAspect="1"/>
           </p:cNvSpPr>
           <p:nvPr>
             <p:ph type="sldImg" idx="2"/>
@@ -2424,7 +2471,7 @@
             <a:spLocks noGrp="1"/>
           </p:cNvSpPr>
           <p:nvPr>
-            <p:ph type="body" idx="3" sz="quarter"/>
+            <p:ph type="body" sz="quarter" idx="3"/>
           </p:nvPr>
         </p:nvSpPr>
         <p:spPr/>
@@ -2445,7 +2492,7 @@
             <a:spLocks noGrp="1"/>
           </p:cNvSpPr>
           <p:nvPr>
-            <p:ph type="sldNum" idx="5" sz="quarter"/>
+            <p:ph type="sldNum" sz="quarter" idx="5"/>
           </p:nvPr>
         </p:nvSpPr>
         <p:spPr/>
@@ -2459,7 +2506,7 @@
 </file>
 
 <file path=ppt/notesSlides/notesSlide6.xml><?xml version="1.0" encoding="utf-8"?>
-<p:notes xmlns:a="http://schemas.openxmlformats.org/drawingml/2006/main" xmlns:p="http://schemas.openxmlformats.org/presentationml/2006/main" xmlns:r="http://schemas.openxmlformats.org/officeDocument/2006/relationships">
+<p:notes xmlns:a="http://schemas.openxmlformats.org/drawingml/2006/main" xmlns:r="http://schemas.openxmlformats.org/officeDocument/2006/relationships" xmlns:p="http://schemas.openxmlformats.org/presentationml/2006/main">
   <p:cSld>
     <p:spTree>
       <p:nvGrpSpPr>
@@ -2479,7 +2526,7 @@
         <p:nvSpPr>
           <p:cNvPr id="2" name="Slide Image Placeholder 1"/>
           <p:cNvSpPr>
-            <a:spLocks noGrp="1"/>
+            <a:spLocks noGrp="1" noRot="1" noChangeAspect="1"/>
           </p:cNvSpPr>
           <p:nvPr>
             <p:ph type="sldImg" idx="2"/>
@@ -2494,7 +2541,7 @@
             <a:spLocks noGrp="1"/>
           </p:cNvSpPr>
           <p:nvPr>
-            <p:ph type="body" idx="3" sz="quarter"/>
+            <p:ph type="body" sz="quarter" idx="3"/>
           </p:nvPr>
         </p:nvSpPr>
         <p:spPr/>
@@ -2515,7 +2562,7 @@
             <a:spLocks noGrp="1"/>
           </p:cNvSpPr>
           <p:nvPr>
-            <p:ph type="sldNum" idx="5" sz="quarter"/>
+            <p:ph type="sldNum" sz="quarter" idx="5"/>
           </p:nvPr>
         </p:nvSpPr>
         <p:spPr/>
@@ -2529,7 +2576,7 @@
 </file>
 
 <file path=ppt/notesSlides/notesSlide7.xml><?xml version="1.0" encoding="utf-8"?>
-<p:notes xmlns:a="http://schemas.openxmlformats.org/drawingml/2006/main" xmlns:p="http://schemas.openxmlformats.org/presentationml/2006/main" xmlns:r="http://schemas.openxmlformats.org/officeDocument/2006/relationships">
+<p:notes xmlns:a="http://schemas.openxmlformats.org/drawingml/2006/main" xmlns:r="http://schemas.openxmlformats.org/officeDocument/2006/relationships" xmlns:p="http://schemas.openxmlformats.org/presentationml/2006/main">
   <p:cSld>
     <p:spTree>
       <p:nvGrpSpPr>
@@ -2549,7 +2596,7 @@
         <p:nvSpPr>
           <p:cNvPr id="2" name="Slide Image Placeholder 1"/>
           <p:cNvSpPr>
-            <a:spLocks noGrp="1"/>
+            <a:spLocks noGrp="1" noRot="1" noChangeAspect="1"/>
           </p:cNvSpPr>
           <p:nvPr>
             <p:ph type="sldImg" idx="2"/>
@@ -2564,7 +2611,7 @@
             <a:spLocks noGrp="1"/>
           </p:cNvSpPr>
           <p:nvPr>
-            <p:ph type="body" idx="3" sz="quarter"/>
+            <p:ph type="body" sz="quarter" idx="3"/>
           </p:nvPr>
         </p:nvSpPr>
         <p:spPr/>
@@ -2573,6 +2620,7 @@
           <a:lstStyle/>
           <a:p>
             <a:r>
+              <a:rPr dirty="0"/>
               <a:t>Node membership is 25 links at the largest junction against 17 internal ones, because a node is a polygon over the intersection and approaches poke into it. Useful as a check, not as the source.</a:t>
             </a:r>
           </a:p>
@@ -2585,7 +2633,7 @@
             <a:spLocks noGrp="1"/>
           </p:cNvSpPr>
           <p:nvPr>
-            <p:ph type="sldNum" idx="5" sz="quarter"/>
+            <p:ph type="sldNum" sz="quarter" idx="5"/>
           </p:nvPr>
         </p:nvSpPr>
         <p:spPr/>
@@ -2599,7 +2647,7 @@
 </file>
 
 <file path=ppt/notesSlides/notesSlide8.xml><?xml version="1.0" encoding="utf-8"?>
-<p:notes xmlns:a="http://schemas.openxmlformats.org/drawingml/2006/main" xmlns:p="http://schemas.openxmlformats.org/presentationml/2006/main" xmlns:r="http://schemas.openxmlformats.org/officeDocument/2006/relationships">
+<p:notes xmlns:a="http://schemas.openxmlformats.org/drawingml/2006/main" xmlns:r="http://schemas.openxmlformats.org/officeDocument/2006/relationships" xmlns:p="http://schemas.openxmlformats.org/presentationml/2006/main">
   <p:cSld>
     <p:spTree>
       <p:nvGrpSpPr>
@@ -2619,7 +2667,7 @@
         <p:nvSpPr>
           <p:cNvPr id="2" name="Slide Image Placeholder 1"/>
           <p:cNvSpPr>
-            <a:spLocks noGrp="1"/>
+            <a:spLocks noGrp="1" noRot="1" noChangeAspect="1"/>
           </p:cNvSpPr>
           <p:nvPr>
             <p:ph type="sldImg" idx="2"/>
@@ -2634,7 +2682,7 @@
             <a:spLocks noGrp="1"/>
           </p:cNvSpPr>
           <p:nvPr>
-            <p:ph type="body" idx="3" sz="quarter"/>
+            <p:ph type="body" sz="quarter" idx="3"/>
           </p:nvPr>
         </p:nvSpPr>
         <p:spPr/>
@@ -2655,7 +2703,7 @@
             <a:spLocks noGrp="1"/>
           </p:cNvSpPr>
           <p:nvPr>
-            <p:ph type="sldNum" idx="5" sz="quarter"/>
+            <p:ph type="sldNum" sz="quarter" idx="5"/>
           </p:nvPr>
         </p:nvSpPr>
         <p:spPr/>
@@ -2669,7 +2717,7 @@
 </file>
 
 <file path=ppt/notesSlides/notesSlide9.xml><?xml version="1.0" encoding="utf-8"?>
-<p:notes xmlns:a="http://schemas.openxmlformats.org/drawingml/2006/main" xmlns:p="http://schemas.openxmlformats.org/presentationml/2006/main" xmlns:r="http://schemas.openxmlformats.org/officeDocument/2006/relationships">
+<p:notes xmlns:a="http://schemas.openxmlformats.org/drawingml/2006/main" xmlns:r="http://schemas.openxmlformats.org/officeDocument/2006/relationships" xmlns:p="http://schemas.openxmlformats.org/presentationml/2006/main">
   <p:cSld>
     <p:spTree>
       <p:nvGrpSpPr>
@@ -2689,7 +2737,7 @@
         <p:nvSpPr>
           <p:cNvPr id="2" name="Slide Image Placeholder 1"/>
           <p:cNvSpPr>
-            <a:spLocks noGrp="1"/>
+            <a:spLocks noGrp="1" noRot="1" noChangeAspect="1"/>
           </p:cNvSpPr>
           <p:nvPr>
             <p:ph type="sldImg" idx="2"/>
@@ -2704,7 +2752,7 @@
             <a:spLocks noGrp="1"/>
           </p:cNvSpPr>
           <p:nvPr>
-            <p:ph type="body" idx="3" sz="quarter"/>
+            <p:ph type="body" sz="quarter" idx="3"/>
           </p:nvPr>
         </p:nvSpPr>
         <p:spPr/>
@@ -2725,7 +2773,7 @@
             <a:spLocks noGrp="1"/>
           </p:cNvSpPr>
           <p:nvPr>
-            <p:ph type="sldNum" idx="5" sz="quarter"/>
+            <p:ph type="sldNum" sz="quarter" idx="5"/>
           </p:nvPr>
         </p:nvSpPr>
         <p:spPr/>
@@ -2776,10 +2824,9 @@
           <a:lstStyle/>
           <a:p>
             <a:r>
-              <a:rPr lang="en-US" smtClean="0"/>
+              <a:rPr lang="en-US"/>
               <a:t>Click to edit Master title style</a:t>
             </a:r>
-            <a:endParaRPr lang="en-US"/>
           </a:p>
         </p:txBody>
       </p:sp>
@@ -2895,10 +2942,9 @@
           </a:lstStyle>
           <a:p>
             <a:r>
-              <a:rPr lang="en-US" smtClean="0"/>
+              <a:rPr lang="en-US"/>
               <a:t>Click to edit Master subtitle style</a:t>
             </a:r>
-            <a:endParaRPr lang="en-US"/>
           </a:p>
         </p:txBody>
       </p:sp>
@@ -2919,7 +2965,7 @@
           <a:p>
             <a:fld id="{5BCAD085-E8A6-8845-BD4E-CB4CCA059FC4}" type="datetimeFigureOut">
               <a:rPr lang="en-US" smtClean="0"/>
-              <a:t>1/27/13</a:t>
+              <a:t>8/10/2026</a:t>
             </a:fld>
             <a:endParaRPr lang="en-US"/>
           </a:p>
@@ -3013,10 +3059,9 @@
           <a:lstStyle/>
           <a:p>
             <a:r>
-              <a:rPr lang="en-US" smtClean="0"/>
+              <a:rPr lang="en-US"/>
               <a:t>Click to edit Master title style</a:t>
             </a:r>
-            <a:endParaRPr lang="en-US"/>
           </a:p>
         </p:txBody>
       </p:sp>
@@ -3037,38 +3082,37 @@
           <a:p>
             <a:pPr lvl="0"/>
             <a:r>
-              <a:rPr lang="en-US" smtClean="0"/>
+              <a:rPr lang="en-US"/>
               <a:t>Click to edit Master text styles</a:t>
             </a:r>
           </a:p>
           <a:p>
             <a:pPr lvl="1"/>
             <a:r>
-              <a:rPr lang="en-US" smtClean="0"/>
+              <a:rPr lang="en-US"/>
               <a:t>Second level</a:t>
             </a:r>
           </a:p>
           <a:p>
             <a:pPr lvl="2"/>
             <a:r>
-              <a:rPr lang="en-US" smtClean="0"/>
+              <a:rPr lang="en-US"/>
               <a:t>Third level</a:t>
             </a:r>
           </a:p>
           <a:p>
             <a:pPr lvl="3"/>
             <a:r>
-              <a:rPr lang="en-US" smtClean="0"/>
+              <a:rPr lang="en-US"/>
               <a:t>Fourth level</a:t>
             </a:r>
           </a:p>
           <a:p>
             <a:pPr lvl="4"/>
             <a:r>
-              <a:rPr lang="en-US" smtClean="0"/>
+              <a:rPr lang="en-US"/>
               <a:t>Fifth level</a:t>
             </a:r>
-            <a:endParaRPr lang="en-US"/>
           </a:p>
         </p:txBody>
       </p:sp>
@@ -3089,7 +3133,7 @@
           <a:p>
             <a:fld id="{5BCAD085-E8A6-8845-BD4E-CB4CCA059FC4}" type="datetimeFigureOut">
               <a:rPr lang="en-US" smtClean="0"/>
-              <a:t>1/27/13</a:t>
+              <a:t>8/10/2026</a:t>
             </a:fld>
             <a:endParaRPr lang="en-US"/>
           </a:p>
@@ -3188,10 +3232,9 @@
           <a:lstStyle/>
           <a:p>
             <a:r>
-              <a:rPr lang="en-US" smtClean="0"/>
+              <a:rPr lang="en-US"/>
               <a:t>Click to edit Master title style</a:t>
             </a:r>
-            <a:endParaRPr lang="en-US"/>
           </a:p>
         </p:txBody>
       </p:sp>
@@ -3217,38 +3260,37 @@
           <a:p>
             <a:pPr lvl="0"/>
             <a:r>
-              <a:rPr lang="en-US" smtClean="0"/>
+              <a:rPr lang="en-US"/>
               <a:t>Click to edit Master text styles</a:t>
             </a:r>
           </a:p>
           <a:p>
             <a:pPr lvl="1"/>
             <a:r>
-              <a:rPr lang="en-US" smtClean="0"/>
+              <a:rPr lang="en-US"/>
               <a:t>Second level</a:t>
             </a:r>
           </a:p>
           <a:p>
             <a:pPr lvl="2"/>
             <a:r>
-              <a:rPr lang="en-US" smtClean="0"/>
+              <a:rPr lang="en-US"/>
               <a:t>Third level</a:t>
             </a:r>
           </a:p>
           <a:p>
             <a:pPr lvl="3"/>
             <a:r>
-              <a:rPr lang="en-US" smtClean="0"/>
+              <a:rPr lang="en-US"/>
               <a:t>Fourth level</a:t>
             </a:r>
           </a:p>
           <a:p>
             <a:pPr lvl="4"/>
             <a:r>
-              <a:rPr lang="en-US" smtClean="0"/>
+              <a:rPr lang="en-US"/>
               <a:t>Fifth level</a:t>
             </a:r>
-            <a:endParaRPr lang="en-US"/>
           </a:p>
         </p:txBody>
       </p:sp>
@@ -3269,7 +3311,7 @@
           <a:p>
             <a:fld id="{5BCAD085-E8A6-8845-BD4E-CB4CCA059FC4}" type="datetimeFigureOut">
               <a:rPr lang="en-US" smtClean="0"/>
-              <a:t>1/27/13</a:t>
+              <a:t>8/10/2026</a:t>
             </a:fld>
             <a:endParaRPr lang="en-US"/>
           </a:p>
@@ -3363,10 +3405,9 @@
           <a:lstStyle/>
           <a:p>
             <a:r>
-              <a:rPr lang="en-US" smtClean="0"/>
+              <a:rPr lang="en-US"/>
               <a:t>Click to edit Master title style</a:t>
             </a:r>
-            <a:endParaRPr lang="en-US"/>
           </a:p>
         </p:txBody>
       </p:sp>
@@ -3387,38 +3428,37 @@
           <a:p>
             <a:pPr lvl="0"/>
             <a:r>
-              <a:rPr lang="en-US" smtClean="0"/>
+              <a:rPr lang="en-US"/>
               <a:t>Click to edit Master text styles</a:t>
             </a:r>
           </a:p>
           <a:p>
             <a:pPr lvl="1"/>
             <a:r>
-              <a:rPr lang="en-US" smtClean="0"/>
+              <a:rPr lang="en-US"/>
               <a:t>Second level</a:t>
             </a:r>
           </a:p>
           <a:p>
             <a:pPr lvl="2"/>
             <a:r>
-              <a:rPr lang="en-US" smtClean="0"/>
+              <a:rPr lang="en-US"/>
               <a:t>Third level</a:t>
             </a:r>
           </a:p>
           <a:p>
             <a:pPr lvl="3"/>
             <a:r>
-              <a:rPr lang="en-US" smtClean="0"/>
+              <a:rPr lang="en-US"/>
               <a:t>Fourth level</a:t>
             </a:r>
           </a:p>
           <a:p>
             <a:pPr lvl="4"/>
             <a:r>
-              <a:rPr lang="en-US" smtClean="0"/>
+              <a:rPr lang="en-US"/>
               <a:t>Fifth level</a:t>
             </a:r>
-            <a:endParaRPr lang="en-US"/>
           </a:p>
         </p:txBody>
       </p:sp>
@@ -3439,7 +3479,7 @@
           <a:p>
             <a:fld id="{5BCAD085-E8A6-8845-BD4E-CB4CCA059FC4}" type="datetimeFigureOut">
               <a:rPr lang="en-US" smtClean="0"/>
-              <a:t>1/27/13</a:t>
+              <a:t>8/10/2026</a:t>
             </a:fld>
             <a:endParaRPr lang="en-US"/>
           </a:p>
@@ -3542,10 +3582,9 @@
           </a:lstStyle>
           <a:p>
             <a:r>
-              <a:rPr lang="en-US" smtClean="0"/>
+              <a:rPr lang="en-US"/>
               <a:t>Click to edit Master title style</a:t>
             </a:r>
-            <a:endParaRPr lang="en-US"/>
           </a:p>
         </p:txBody>
       </p:sp>
@@ -3662,7 +3701,7 @@
           <a:p>
             <a:pPr lvl="0"/>
             <a:r>
-              <a:rPr lang="en-US" smtClean="0"/>
+              <a:rPr lang="en-US"/>
               <a:t>Click to edit Master text styles</a:t>
             </a:r>
           </a:p>
@@ -3685,7 +3724,7 @@
           <a:p>
             <a:fld id="{5BCAD085-E8A6-8845-BD4E-CB4CCA059FC4}" type="datetimeFigureOut">
               <a:rPr lang="en-US" smtClean="0"/>
-              <a:t>1/27/13</a:t>
+              <a:t>8/10/2026</a:t>
             </a:fld>
             <a:endParaRPr lang="en-US"/>
           </a:p>
@@ -3779,10 +3818,9 @@
           <a:lstStyle/>
           <a:p>
             <a:r>
-              <a:rPr lang="en-US" smtClean="0"/>
+              <a:rPr lang="en-US"/>
               <a:t>Click to edit Master title style</a:t>
             </a:r>
-            <a:endParaRPr lang="en-US"/>
           </a:p>
         </p:txBody>
       </p:sp>
@@ -3836,38 +3874,37 @@
           <a:p>
             <a:pPr lvl="0"/>
             <a:r>
-              <a:rPr lang="en-US" smtClean="0"/>
+              <a:rPr lang="en-US"/>
               <a:t>Click to edit Master text styles</a:t>
             </a:r>
           </a:p>
           <a:p>
             <a:pPr lvl="1"/>
             <a:r>
-              <a:rPr lang="en-US" smtClean="0"/>
+              <a:rPr lang="en-US"/>
               <a:t>Second level</a:t>
             </a:r>
           </a:p>
           <a:p>
             <a:pPr lvl="2"/>
             <a:r>
-              <a:rPr lang="en-US" smtClean="0"/>
+              <a:rPr lang="en-US"/>
               <a:t>Third level</a:t>
             </a:r>
           </a:p>
           <a:p>
             <a:pPr lvl="3"/>
             <a:r>
-              <a:rPr lang="en-US" smtClean="0"/>
+              <a:rPr lang="en-US"/>
               <a:t>Fourth level</a:t>
             </a:r>
           </a:p>
           <a:p>
             <a:pPr lvl="4"/>
             <a:r>
-              <a:rPr lang="en-US" smtClean="0"/>
+              <a:rPr lang="en-US"/>
               <a:t>Fifth level</a:t>
             </a:r>
-            <a:endParaRPr lang="en-US"/>
           </a:p>
         </p:txBody>
       </p:sp>
@@ -3921,38 +3958,37 @@
           <a:p>
             <a:pPr lvl="0"/>
             <a:r>
-              <a:rPr lang="en-US" smtClean="0"/>
+              <a:rPr lang="en-US"/>
               <a:t>Click to edit Master text styles</a:t>
             </a:r>
           </a:p>
           <a:p>
             <a:pPr lvl="1"/>
             <a:r>
-              <a:rPr lang="en-US" smtClean="0"/>
+              <a:rPr lang="en-US"/>
               <a:t>Second level</a:t>
             </a:r>
           </a:p>
           <a:p>
             <a:pPr lvl="2"/>
             <a:r>
-              <a:rPr lang="en-US" smtClean="0"/>
+              <a:rPr lang="en-US"/>
               <a:t>Third level</a:t>
             </a:r>
           </a:p>
           <a:p>
             <a:pPr lvl="3"/>
             <a:r>
-              <a:rPr lang="en-US" smtClean="0"/>
+              <a:rPr lang="en-US"/>
               <a:t>Fourth level</a:t>
             </a:r>
           </a:p>
           <a:p>
             <a:pPr lvl="4"/>
             <a:r>
-              <a:rPr lang="en-US" smtClean="0"/>
+              <a:rPr lang="en-US"/>
               <a:t>Fifth level</a:t>
             </a:r>
-            <a:endParaRPr lang="en-US"/>
           </a:p>
         </p:txBody>
       </p:sp>
@@ -3973,7 +4009,7 @@
           <a:p>
             <a:fld id="{5BCAD085-E8A6-8845-BD4E-CB4CCA059FC4}" type="datetimeFigureOut">
               <a:rPr lang="en-US" smtClean="0"/>
-              <a:t>1/27/13</a:t>
+              <a:t>8/10/2026</a:t>
             </a:fld>
             <a:endParaRPr lang="en-US"/>
           </a:p>
@@ -4071,10 +4107,9 @@
           </a:lstStyle>
           <a:p>
             <a:r>
-              <a:rPr lang="en-US" smtClean="0"/>
+              <a:rPr lang="en-US"/>
               <a:t>Click to edit Master title style</a:t>
             </a:r>
-            <a:endParaRPr lang="en-US"/>
           </a:p>
         </p:txBody>
       </p:sp>
@@ -4137,7 +4172,7 @@
           <a:p>
             <a:pPr lvl="0"/>
             <a:r>
-              <a:rPr lang="en-US" smtClean="0"/>
+              <a:rPr lang="en-US"/>
               <a:t>Click to edit Master text styles</a:t>
             </a:r>
           </a:p>
@@ -4193,38 +4228,37 @@
           <a:p>
             <a:pPr lvl="0"/>
             <a:r>
-              <a:rPr lang="en-US" smtClean="0"/>
+              <a:rPr lang="en-US"/>
               <a:t>Click to edit Master text styles</a:t>
             </a:r>
           </a:p>
           <a:p>
             <a:pPr lvl="1"/>
             <a:r>
-              <a:rPr lang="en-US" smtClean="0"/>
+              <a:rPr lang="en-US"/>
               <a:t>Second level</a:t>
             </a:r>
           </a:p>
           <a:p>
             <a:pPr lvl="2"/>
             <a:r>
-              <a:rPr lang="en-US" smtClean="0"/>
+              <a:rPr lang="en-US"/>
               <a:t>Third level</a:t>
             </a:r>
           </a:p>
           <a:p>
             <a:pPr lvl="3"/>
             <a:r>
-              <a:rPr lang="en-US" smtClean="0"/>
+              <a:rPr lang="en-US"/>
               <a:t>Fourth level</a:t>
             </a:r>
           </a:p>
           <a:p>
             <a:pPr lvl="4"/>
             <a:r>
-              <a:rPr lang="en-US" smtClean="0"/>
+              <a:rPr lang="en-US"/>
               <a:t>Fifth level</a:t>
             </a:r>
-            <a:endParaRPr lang="en-US"/>
           </a:p>
         </p:txBody>
       </p:sp>
@@ -4287,7 +4321,7 @@
           <a:p>
             <a:pPr lvl="0"/>
             <a:r>
-              <a:rPr lang="en-US" smtClean="0"/>
+              <a:rPr lang="en-US"/>
               <a:t>Click to edit Master text styles</a:t>
             </a:r>
           </a:p>
@@ -4343,38 +4377,37 @@
           <a:p>
             <a:pPr lvl="0"/>
             <a:r>
-              <a:rPr lang="en-US" smtClean="0"/>
+              <a:rPr lang="en-US"/>
               <a:t>Click to edit Master text styles</a:t>
             </a:r>
           </a:p>
           <a:p>
             <a:pPr lvl="1"/>
             <a:r>
-              <a:rPr lang="en-US" smtClean="0"/>
+              <a:rPr lang="en-US"/>
               <a:t>Second level</a:t>
             </a:r>
           </a:p>
           <a:p>
             <a:pPr lvl="2"/>
             <a:r>
-              <a:rPr lang="en-US" smtClean="0"/>
+              <a:rPr lang="en-US"/>
               <a:t>Third level</a:t>
             </a:r>
           </a:p>
           <a:p>
             <a:pPr lvl="3"/>
             <a:r>
-              <a:rPr lang="en-US" smtClean="0"/>
+              <a:rPr lang="en-US"/>
               <a:t>Fourth level</a:t>
             </a:r>
           </a:p>
           <a:p>
             <a:pPr lvl="4"/>
             <a:r>
-              <a:rPr lang="en-US" smtClean="0"/>
+              <a:rPr lang="en-US"/>
               <a:t>Fifth level</a:t>
             </a:r>
-            <a:endParaRPr lang="en-US"/>
           </a:p>
         </p:txBody>
       </p:sp>
@@ -4395,7 +4428,7 @@
           <a:p>
             <a:fld id="{5BCAD085-E8A6-8845-BD4E-CB4CCA059FC4}" type="datetimeFigureOut">
               <a:rPr lang="en-US" smtClean="0"/>
-              <a:t>1/27/13</a:t>
+              <a:t>8/10/2026</a:t>
             </a:fld>
             <a:endParaRPr lang="en-US"/>
           </a:p>
@@ -4489,10 +4522,9 @@
           <a:lstStyle/>
           <a:p>
             <a:r>
-              <a:rPr lang="en-US" smtClean="0"/>
+              <a:rPr lang="en-US"/>
               <a:t>Click to edit Master title style</a:t>
             </a:r>
-            <a:endParaRPr lang="en-US"/>
           </a:p>
         </p:txBody>
       </p:sp>
@@ -4513,7 +4545,7 @@
           <a:p>
             <a:fld id="{5BCAD085-E8A6-8845-BD4E-CB4CCA059FC4}" type="datetimeFigureOut">
               <a:rPr lang="en-US" smtClean="0"/>
-              <a:t>1/27/13</a:t>
+              <a:t>8/10/2026</a:t>
             </a:fld>
             <a:endParaRPr lang="en-US"/>
           </a:p>
@@ -4608,7 +4640,7 @@
           <a:p>
             <a:fld id="{5BCAD085-E8A6-8845-BD4E-CB4CCA059FC4}" type="datetimeFigureOut">
               <a:rPr lang="en-US" smtClean="0"/>
-              <a:t>1/27/13</a:t>
+              <a:t>8/10/2026</a:t>
             </a:fld>
             <a:endParaRPr lang="en-US"/>
           </a:p>
@@ -4711,10 +4743,9 @@
           </a:lstStyle>
           <a:p>
             <a:r>
-              <a:rPr lang="en-US" smtClean="0"/>
+              <a:rPr lang="en-US"/>
               <a:t>Click to edit Master title style</a:t>
             </a:r>
-            <a:endParaRPr lang="en-US"/>
           </a:p>
         </p:txBody>
       </p:sp>
@@ -4768,38 +4799,37 @@
           <a:p>
             <a:pPr lvl="0"/>
             <a:r>
-              <a:rPr lang="en-US" smtClean="0"/>
+              <a:rPr lang="en-US"/>
               <a:t>Click to edit Master text styles</a:t>
             </a:r>
           </a:p>
           <a:p>
             <a:pPr lvl="1"/>
             <a:r>
-              <a:rPr lang="en-US" smtClean="0"/>
+              <a:rPr lang="en-US"/>
               <a:t>Second level</a:t>
             </a:r>
           </a:p>
           <a:p>
             <a:pPr lvl="2"/>
             <a:r>
-              <a:rPr lang="en-US" smtClean="0"/>
+              <a:rPr lang="en-US"/>
               <a:t>Third level</a:t>
             </a:r>
           </a:p>
           <a:p>
             <a:pPr lvl="3"/>
             <a:r>
-              <a:rPr lang="en-US" smtClean="0"/>
+              <a:rPr lang="en-US"/>
               <a:t>Fourth level</a:t>
             </a:r>
           </a:p>
           <a:p>
             <a:pPr lvl="4"/>
             <a:r>
-              <a:rPr lang="en-US" smtClean="0"/>
+              <a:rPr lang="en-US"/>
               <a:t>Fifth level</a:t>
             </a:r>
-            <a:endParaRPr lang="en-US"/>
           </a:p>
         </p:txBody>
       </p:sp>
@@ -4862,7 +4892,7 @@
           <a:p>
             <a:pPr lvl="0"/>
             <a:r>
-              <a:rPr lang="en-US" smtClean="0"/>
+              <a:rPr lang="en-US"/>
               <a:t>Click to edit Master text styles</a:t>
             </a:r>
           </a:p>
@@ -4885,7 +4915,7 @@
           <a:p>
             <a:fld id="{5BCAD085-E8A6-8845-BD4E-CB4CCA059FC4}" type="datetimeFigureOut">
               <a:rPr lang="en-US" smtClean="0"/>
-              <a:t>1/27/13</a:t>
+              <a:t>8/10/2026</a:t>
             </a:fld>
             <a:endParaRPr lang="en-US"/>
           </a:p>
@@ -4988,10 +5018,9 @@
           </a:lstStyle>
           <a:p>
             <a:r>
-              <a:rPr lang="en-US" smtClean="0"/>
+              <a:rPr lang="en-US"/>
               <a:t>Click to edit Master title style</a:t>
             </a:r>
-            <a:endParaRPr lang="en-US"/>
           </a:p>
         </p:txBody>
       </p:sp>
@@ -5115,7 +5144,7 @@
           <a:p>
             <a:pPr lvl="0"/>
             <a:r>
-              <a:rPr lang="en-US" smtClean="0"/>
+              <a:rPr lang="en-US"/>
               <a:t>Click to edit Master text styles</a:t>
             </a:r>
           </a:p>
@@ -5138,7 +5167,7 @@
           <a:p>
             <a:fld id="{5BCAD085-E8A6-8845-BD4E-CB4CCA059FC4}" type="datetimeFigureOut">
               <a:rPr lang="en-US" smtClean="0"/>
-              <a:t>1/27/13</a:t>
+              <a:t>8/10/2026</a:t>
             </a:fld>
             <a:endParaRPr lang="en-US"/>
           </a:p>
@@ -5247,10 +5276,9 @@
           <a:lstStyle/>
           <a:p>
             <a:r>
-              <a:rPr lang="en-US" smtClean="0"/>
+              <a:rPr lang="en-US"/>
               <a:t>Click to edit Master title style</a:t>
             </a:r>
-            <a:endParaRPr lang="en-US"/>
           </a:p>
         </p:txBody>
       </p:sp>
@@ -5281,38 +5309,37 @@
           <a:p>
             <a:pPr lvl="0"/>
             <a:r>
-              <a:rPr lang="en-US" smtClean="0"/>
+              <a:rPr lang="en-US"/>
               <a:t>Click to edit Master text styles</a:t>
             </a:r>
           </a:p>
           <a:p>
             <a:pPr lvl="1"/>
             <a:r>
-              <a:rPr lang="en-US" smtClean="0"/>
+              <a:rPr lang="en-US"/>
               <a:t>Second level</a:t>
             </a:r>
           </a:p>
           <a:p>
             <a:pPr lvl="2"/>
             <a:r>
-              <a:rPr lang="en-US" smtClean="0"/>
+              <a:rPr lang="en-US"/>
               <a:t>Third level</a:t>
             </a:r>
           </a:p>
           <a:p>
             <a:pPr lvl="3"/>
             <a:r>
-              <a:rPr lang="en-US" smtClean="0"/>
+              <a:rPr lang="en-US"/>
               <a:t>Fourth level</a:t>
             </a:r>
           </a:p>
           <a:p>
             <a:pPr lvl="4"/>
             <a:r>
-              <a:rPr lang="en-US" smtClean="0"/>
+              <a:rPr lang="en-US"/>
               <a:t>Fifth level</a:t>
             </a:r>
-            <a:endParaRPr lang="en-US"/>
           </a:p>
         </p:txBody>
       </p:sp>
@@ -5351,7 +5378,7 @@
           <a:p>
             <a:fld id="{5BCAD085-E8A6-8845-BD4E-CB4CCA059FC4}" type="datetimeFigureOut">
               <a:rPr lang="en-US" smtClean="0"/>
-              <a:t>1/27/13</a:t>
+              <a:t>8/10/2026</a:t>
             </a:fld>
             <a:endParaRPr lang="en-US"/>
           </a:p>
@@ -5710,7 +5737,7 @@
 </file>
 
 <file path=ppt/slides/slide1.xml><?xml version="1.0" encoding="utf-8"?>
-<p:sld xmlns:a="http://schemas.openxmlformats.org/drawingml/2006/main" xmlns:p="http://schemas.openxmlformats.org/presentationml/2006/main" xmlns:r="http://schemas.openxmlformats.org/officeDocument/2006/relationships">
+<p:sld xmlns:a="http://schemas.openxmlformats.org/drawingml/2006/main" xmlns:r="http://schemas.openxmlformats.org/officeDocument/2006/relationships" xmlns:p="http://schemas.openxmlformats.org/presentationml/2006/main">
   <p:cSld>
     <p:spTree>
       <p:nvGrpSpPr>
@@ -5718,7 +5745,14 @@
         <p:cNvGrpSpPr/>
         <p:nvPr/>
       </p:nvGrpSpPr>
-      <p:grpSpPr/>
+      <p:grpSpPr>
+        <a:xfrm>
+          <a:off x="0" y="0"/>
+          <a:ext cx="0" cy="0"/>
+          <a:chOff x="0" y="0"/>
+          <a:chExt cx="0" cy="0"/>
+        </a:xfrm>
+      </p:grpSpPr>
       <p:sp>
         <p:nvSpPr>
           <p:cNvPr id="2" name="Rectangle 1"/>
@@ -5760,6 +5794,7 @@
           <a:lstStyle/>
           <a:p>
             <a:pPr algn="ctr"/>
+            <a:endParaRPr/>
           </a:p>
         </p:txBody>
       </p:sp>
@@ -5842,7 +5877,7 @@
 </file>
 
 <file path=ppt/slides/slide10.xml><?xml version="1.0" encoding="utf-8"?>
-<p:sld xmlns:a="http://schemas.openxmlformats.org/drawingml/2006/main" xmlns:p="http://schemas.openxmlformats.org/presentationml/2006/main" xmlns:r="http://schemas.openxmlformats.org/officeDocument/2006/relationships">
+<p:sld xmlns:a="http://schemas.openxmlformats.org/drawingml/2006/main" xmlns:r="http://schemas.openxmlformats.org/officeDocument/2006/relationships" xmlns:p="http://schemas.openxmlformats.org/presentationml/2006/main">
   <p:cSld>
     <p:spTree>
       <p:nvGrpSpPr>
@@ -5850,7 +5885,14 @@
         <p:cNvGrpSpPr/>
         <p:nvPr/>
       </p:nvGrpSpPr>
-      <p:grpSpPr/>
+      <p:grpSpPr>
+        <a:xfrm>
+          <a:off x="0" y="0"/>
+          <a:ext cx="0" cy="0"/>
+          <a:chOff x="0" y="0"/>
+          <a:chExt cx="0" cy="0"/>
+        </a:xfrm>
+      </p:grpSpPr>
       <p:sp>
         <p:nvSpPr>
           <p:cNvPr id="2" name="Rectangle 1"/>
@@ -5892,6 +5934,7 @@
           <a:lstStyle/>
           <a:p>
             <a:pPr algn="ctr"/>
+            <a:endParaRPr/>
           </a:p>
         </p:txBody>
       </p:sp>
@@ -5958,7 +6001,7 @@
               </a:spcAft>
             </a:pPr>
             <a:r>
-              <a:rPr sz="1800" b="0">
+              <a:rPr sz="1800" b="0" dirty="0">
                 <a:solidFill>
                   <a:srgbClr val="1A1A1A"/>
                 </a:solidFill>
@@ -5968,13 +6011,13 @@
             </a:r>
           </a:p>
           <a:p>
-            <a:pPr algn="l" lvl="1">
+            <a:pPr lvl="1" algn="l">
               <a:spcAft>
                 <a:spcPts val="800"/>
               </a:spcAft>
             </a:pPr>
             <a:r>
-              <a:rPr sz="1800" b="0">
+              <a:rPr sz="1800" b="0" dirty="0">
                 <a:solidFill>
                   <a:srgbClr val="1A1A1A"/>
                 </a:solidFill>
@@ -5984,13 +6027,13 @@
             </a:r>
           </a:p>
           <a:p>
-            <a:pPr algn="l" lvl="1">
+            <a:pPr lvl="1" algn="l">
               <a:spcAft>
                 <a:spcPts val="800"/>
               </a:spcAft>
             </a:pPr>
             <a:r>
-              <a:rPr sz="1800" b="0">
+              <a:rPr sz="1800" b="0" dirty="0">
                 <a:solidFill>
                   <a:srgbClr val="1A1A1A"/>
                 </a:solidFill>
@@ -6006,23 +6049,41 @@
               </a:spcAft>
             </a:pPr>
             <a:r>
-              <a:rPr sz="1800" b="0">
+              <a:rPr sz="1800" b="0" dirty="0">
                 <a:solidFill>
                   <a:srgbClr val="1A1A1A"/>
                 </a:solidFill>
                 <a:latin typeface="Calibri"/>
               </a:rPr>
-              <a:t>• Vissim builds its own 'segment node' per junction when it imports</a:t>
-            </a:r>
-          </a:p>
-          <a:p>
-            <a:pPr algn="l" lvl="1">
+              <a:t>• </a:t>
+            </a:r>
+            <a:r>
+              <a:rPr sz="1800" b="0" dirty="0" err="1">
+                <a:solidFill>
+                  <a:srgbClr val="1A1A1A"/>
+                </a:solidFill>
+                <a:latin typeface="Calibri"/>
+              </a:rPr>
+              <a:t>Vissim</a:t>
+            </a:r>
+            <a:r>
+              <a:rPr sz="1800" b="0" dirty="0">
+                <a:solidFill>
+                  <a:srgbClr val="1A1A1A"/>
+                </a:solidFill>
+                <a:latin typeface="Calibri"/>
+              </a:rPr>
+              <a:t> builds its own 'segment node' per junction when it imports</a:t>
+            </a:r>
+          </a:p>
+          <a:p>
+            <a:pPr lvl="1" algn="l">
               <a:spcAft>
                 <a:spcPts val="800"/>
               </a:spcAft>
             </a:pPr>
             <a:r>
-              <a:rPr sz="1800" b="0">
+              <a:rPr sz="1800" b="0" dirty="0">
                 <a:solidFill>
                   <a:srgbClr val="1A1A1A"/>
                 </a:solidFill>
@@ -6032,13 +6093,13 @@
             </a:r>
           </a:p>
           <a:p>
-            <a:pPr algn="l" lvl="1">
+            <a:pPr lvl="1" algn="l">
               <a:spcAft>
                 <a:spcPts val="800"/>
               </a:spcAft>
             </a:pPr>
             <a:r>
-              <a:rPr sz="1800" b="0">
+              <a:rPr sz="1800" b="0" dirty="0">
                 <a:solidFill>
                   <a:srgbClr val="1A1A1A"/>
                 </a:solidFill>
@@ -6058,7 +6119,7 @@
 </file>
 
 <file path=ppt/slides/slide11.xml><?xml version="1.0" encoding="utf-8"?>
-<p:sld xmlns:a="http://schemas.openxmlformats.org/drawingml/2006/main" xmlns:p="http://schemas.openxmlformats.org/presentationml/2006/main" xmlns:r="http://schemas.openxmlformats.org/officeDocument/2006/relationships">
+<p:sld xmlns:a="http://schemas.openxmlformats.org/drawingml/2006/main" xmlns:r="http://schemas.openxmlformats.org/officeDocument/2006/relationships" xmlns:p="http://schemas.openxmlformats.org/presentationml/2006/main">
   <p:cSld>
     <p:spTree>
       <p:nvGrpSpPr>
@@ -6066,7 +6127,14 @@
         <p:cNvGrpSpPr/>
         <p:nvPr/>
       </p:nvGrpSpPr>
-      <p:grpSpPr/>
+      <p:grpSpPr>
+        <a:xfrm>
+          <a:off x="0" y="0"/>
+          <a:ext cx="0" cy="0"/>
+          <a:chOff x="0" y="0"/>
+          <a:chExt cx="0" cy="0"/>
+        </a:xfrm>
+      </p:grpSpPr>
       <p:sp>
         <p:nvSpPr>
           <p:cNvPr id="2" name="Rectangle 1"/>
@@ -6108,6 +6176,7 @@
           <a:lstStyle/>
           <a:p>
             <a:pPr algn="ctr"/>
+            <a:endParaRPr/>
           </a:p>
         </p:txBody>
       </p:sp>
@@ -6190,7 +6259,7 @@
 </file>
 
 <file path=ppt/slides/slide12.xml><?xml version="1.0" encoding="utf-8"?>
-<p:sld xmlns:a="http://schemas.openxmlformats.org/drawingml/2006/main" xmlns:p="http://schemas.openxmlformats.org/presentationml/2006/main" xmlns:r="http://schemas.openxmlformats.org/officeDocument/2006/relationships">
+<p:sld xmlns:a="http://schemas.openxmlformats.org/drawingml/2006/main" xmlns:r="http://schemas.openxmlformats.org/officeDocument/2006/relationships" xmlns:p="http://schemas.openxmlformats.org/presentationml/2006/main">
   <p:cSld>
     <p:spTree>
       <p:nvGrpSpPr>
@@ -6198,7 +6267,14 @@
         <p:cNvGrpSpPr/>
         <p:nvPr/>
       </p:nvGrpSpPr>
-      <p:grpSpPr/>
+      <p:grpSpPr>
+        <a:xfrm>
+          <a:off x="0" y="0"/>
+          <a:ext cx="0" cy="0"/>
+          <a:chOff x="0" y="0"/>
+          <a:chExt cx="0" cy="0"/>
+        </a:xfrm>
+      </p:grpSpPr>
       <p:sp>
         <p:nvSpPr>
           <p:cNvPr id="2" name="Rectangle 1"/>
@@ -6240,6 +6316,7 @@
           <a:lstStyle/>
           <a:p>
             <a:pPr algn="ctr"/>
+            <a:endParaRPr/>
           </a:p>
         </p:txBody>
       </p:sp>
@@ -6406,7 +6483,7 @@
 </file>
 
 <file path=ppt/slides/slide13.xml><?xml version="1.0" encoding="utf-8"?>
-<p:sld xmlns:a="http://schemas.openxmlformats.org/drawingml/2006/main" xmlns:p="http://schemas.openxmlformats.org/presentationml/2006/main" xmlns:r="http://schemas.openxmlformats.org/officeDocument/2006/relationships">
+<p:sld xmlns:a="http://schemas.openxmlformats.org/drawingml/2006/main" xmlns:r="http://schemas.openxmlformats.org/officeDocument/2006/relationships" xmlns:p="http://schemas.openxmlformats.org/presentationml/2006/main">
   <p:cSld>
     <p:spTree>
       <p:nvGrpSpPr>
@@ -6414,7 +6491,14 @@
         <p:cNvGrpSpPr/>
         <p:nvPr/>
       </p:nvGrpSpPr>
-      <p:grpSpPr/>
+      <p:grpSpPr>
+        <a:xfrm>
+          <a:off x="0" y="0"/>
+          <a:ext cx="0" cy="0"/>
+          <a:chOff x="0" y="0"/>
+          <a:chExt cx="0" cy="0"/>
+        </a:xfrm>
+      </p:grpSpPr>
       <p:sp>
         <p:nvSpPr>
           <p:cNvPr id="2" name="Rectangle 1"/>
@@ -6456,6 +6540,7 @@
           <a:lstStyle/>
           <a:p>
             <a:pPr algn="ctr"/>
+            <a:endParaRPr/>
           </a:p>
         </p:txBody>
       </p:sp>
@@ -6622,7 +6707,7 @@
 </file>
 
 <file path=ppt/slides/slide14.xml><?xml version="1.0" encoding="utf-8"?>
-<p:sld xmlns:a="http://schemas.openxmlformats.org/drawingml/2006/main" xmlns:p="http://schemas.openxmlformats.org/presentationml/2006/main" xmlns:r="http://schemas.openxmlformats.org/officeDocument/2006/relationships">
+<p:sld xmlns:a="http://schemas.openxmlformats.org/drawingml/2006/main" xmlns:r="http://schemas.openxmlformats.org/officeDocument/2006/relationships" xmlns:p="http://schemas.openxmlformats.org/presentationml/2006/main">
   <p:cSld>
     <p:spTree>
       <p:nvGrpSpPr>
@@ -6630,7 +6715,14 @@
         <p:cNvGrpSpPr/>
         <p:nvPr/>
       </p:nvGrpSpPr>
-      <p:grpSpPr/>
+      <p:grpSpPr>
+        <a:xfrm>
+          <a:off x="0" y="0"/>
+          <a:ext cx="0" cy="0"/>
+          <a:chOff x="0" y="0"/>
+          <a:chExt cx="0" cy="0"/>
+        </a:xfrm>
+      </p:grpSpPr>
       <p:sp>
         <p:nvSpPr>
           <p:cNvPr id="2" name="Rectangle 1"/>
@@ -6672,6 +6764,7 @@
           <a:lstStyle/>
           <a:p>
             <a:pPr algn="ctr"/>
+            <a:endParaRPr/>
           </a:p>
         </p:txBody>
       </p:sp>
@@ -6838,7 +6931,7 @@
 </file>
 
 <file path=ppt/slides/slide15.xml><?xml version="1.0" encoding="utf-8"?>
-<p:sld xmlns:a="http://schemas.openxmlformats.org/drawingml/2006/main" xmlns:p="http://schemas.openxmlformats.org/presentationml/2006/main" xmlns:r="http://schemas.openxmlformats.org/officeDocument/2006/relationships">
+<p:sld xmlns:a="http://schemas.openxmlformats.org/drawingml/2006/main" xmlns:r="http://schemas.openxmlformats.org/officeDocument/2006/relationships" xmlns:p="http://schemas.openxmlformats.org/presentationml/2006/main">
   <p:cSld>
     <p:spTree>
       <p:nvGrpSpPr>
@@ -6846,7 +6939,14 @@
         <p:cNvGrpSpPr/>
         <p:nvPr/>
       </p:nvGrpSpPr>
-      <p:grpSpPr/>
+      <p:grpSpPr>
+        <a:xfrm>
+          <a:off x="0" y="0"/>
+          <a:ext cx="0" cy="0"/>
+          <a:chOff x="0" y="0"/>
+          <a:chExt cx="0" cy="0"/>
+        </a:xfrm>
+      </p:grpSpPr>
       <p:sp>
         <p:nvSpPr>
           <p:cNvPr id="2" name="Rectangle 1"/>
@@ -6888,6 +6988,7 @@
           <a:lstStyle/>
           <a:p>
             <a:pPr algn="ctr"/>
+            <a:endParaRPr/>
           </a:p>
         </p:txBody>
       </p:sp>
@@ -6945,10 +7046,34 @@
                 <a:tableStyleId>{5C22544A-7EE6-4342-B048-85BDC9FD1C3A}</a:tableStyleId>
               </a:tblPr>
               <a:tblGrid>
-                <a:gridCol w="2766060"/>
-                <a:gridCol w="2766060"/>
-                <a:gridCol w="2766060"/>
-                <a:gridCol w="2766060"/>
+                <a:gridCol w="2766060">
+                  <a:extLst>
+                    <a:ext uri="{9D8B030D-6E8A-4147-A177-3AD203B41FA5}">
+                      <a16:colId xmlns:a16="http://schemas.microsoft.com/office/drawing/2014/main" val="20000"/>
+                    </a:ext>
+                  </a:extLst>
+                </a:gridCol>
+                <a:gridCol w="2766060">
+                  <a:extLst>
+                    <a:ext uri="{9D8B030D-6E8A-4147-A177-3AD203B41FA5}">
+                      <a16:colId xmlns:a16="http://schemas.microsoft.com/office/drawing/2014/main" val="20001"/>
+                    </a:ext>
+                  </a:extLst>
+                </a:gridCol>
+                <a:gridCol w="2766060">
+                  <a:extLst>
+                    <a:ext uri="{9D8B030D-6E8A-4147-A177-3AD203B41FA5}">
+                      <a16:colId xmlns:a16="http://schemas.microsoft.com/office/drawing/2014/main" val="20002"/>
+                    </a:ext>
+                  </a:extLst>
+                </a:gridCol>
+                <a:gridCol w="2766060">
+                  <a:extLst>
+                    <a:ext uri="{9D8B030D-6E8A-4147-A177-3AD203B41FA5}">
+                      <a16:colId xmlns:a16="http://schemas.microsoft.com/office/drawing/2014/main" val="20003"/>
+                    </a:ext>
+                  </a:extLst>
+                </a:gridCol>
               </a:tblGrid>
               <a:tr h="365760">
                 <a:tc>
@@ -7035,6 +7160,11 @@
                     </a:solidFill>
                   </a:tcPr>
                 </a:tc>
+                <a:extLst>
+                  <a:ext uri="{0D108BD9-81ED-4DB2-BD59-A6C34878D82A}">
+                    <a16:rowId xmlns:a16="http://schemas.microsoft.com/office/drawing/2014/main" val="10000"/>
+                  </a:ext>
+                </a:extLst>
               </a:tr>
               <a:tr h="365760">
                 <a:tc>
@@ -7121,6 +7251,11 @@
                     </a:solidFill>
                   </a:tcPr>
                 </a:tc>
+                <a:extLst>
+                  <a:ext uri="{0D108BD9-81ED-4DB2-BD59-A6C34878D82A}">
+                    <a16:rowId xmlns:a16="http://schemas.microsoft.com/office/drawing/2014/main" val="10001"/>
+                  </a:ext>
+                </a:extLst>
               </a:tr>
               <a:tr h="365760">
                 <a:tc>
@@ -7207,6 +7342,11 @@
                     </a:solidFill>
                   </a:tcPr>
                 </a:tc>
+                <a:extLst>
+                  <a:ext uri="{0D108BD9-81ED-4DB2-BD59-A6C34878D82A}">
+                    <a16:rowId xmlns:a16="http://schemas.microsoft.com/office/drawing/2014/main" val="10002"/>
+                  </a:ext>
+                </a:extLst>
               </a:tr>
               <a:tr h="365760">
                 <a:tc>
@@ -7293,6 +7433,11 @@
                     </a:solidFill>
                   </a:tcPr>
                 </a:tc>
+                <a:extLst>
+                  <a:ext uri="{0D108BD9-81ED-4DB2-BD59-A6C34878D82A}">
+                    <a16:rowId xmlns:a16="http://schemas.microsoft.com/office/drawing/2014/main" val="10003"/>
+                  </a:ext>
+                </a:extLst>
               </a:tr>
             </a:tbl>
           </a:graphicData>
@@ -7307,7 +7452,7 @@
 </file>
 
 <file path=ppt/slides/slide16.xml><?xml version="1.0" encoding="utf-8"?>
-<p:sld xmlns:a="http://schemas.openxmlformats.org/drawingml/2006/main" xmlns:p="http://schemas.openxmlformats.org/presentationml/2006/main" xmlns:r="http://schemas.openxmlformats.org/officeDocument/2006/relationships">
+<p:sld xmlns:a="http://schemas.openxmlformats.org/drawingml/2006/main" xmlns:r="http://schemas.openxmlformats.org/officeDocument/2006/relationships" xmlns:p="http://schemas.openxmlformats.org/presentationml/2006/main">
   <p:cSld>
     <p:spTree>
       <p:nvGrpSpPr>
@@ -7315,7 +7460,14 @@
         <p:cNvGrpSpPr/>
         <p:nvPr/>
       </p:nvGrpSpPr>
-      <p:grpSpPr/>
+      <p:grpSpPr>
+        <a:xfrm>
+          <a:off x="0" y="0"/>
+          <a:ext cx="0" cy="0"/>
+          <a:chOff x="0" y="0"/>
+          <a:chExt cx="0" cy="0"/>
+        </a:xfrm>
+      </p:grpSpPr>
       <p:sp>
         <p:nvSpPr>
           <p:cNvPr id="2" name="Rectangle 1"/>
@@ -7357,6 +7509,7 @@
           <a:lstStyle/>
           <a:p>
             <a:pPr algn="ctr"/>
+            <a:endParaRPr/>
           </a:p>
         </p:txBody>
       </p:sp>
@@ -7439,7 +7592,7 @@
 </file>
 
 <file path=ppt/slides/slide17.xml><?xml version="1.0" encoding="utf-8"?>
-<p:sld xmlns:a="http://schemas.openxmlformats.org/drawingml/2006/main" xmlns:p="http://schemas.openxmlformats.org/presentationml/2006/main" xmlns:r="http://schemas.openxmlformats.org/officeDocument/2006/relationships">
+<p:sld xmlns:a="http://schemas.openxmlformats.org/drawingml/2006/main" xmlns:r="http://schemas.openxmlformats.org/officeDocument/2006/relationships" xmlns:p="http://schemas.openxmlformats.org/presentationml/2006/main">
   <p:cSld>
     <p:spTree>
       <p:nvGrpSpPr>
@@ -7447,7 +7600,14 @@
         <p:cNvGrpSpPr/>
         <p:nvPr/>
       </p:nvGrpSpPr>
-      <p:grpSpPr/>
+      <p:grpSpPr>
+        <a:xfrm>
+          <a:off x="0" y="0"/>
+          <a:ext cx="0" cy="0"/>
+          <a:chOff x="0" y="0"/>
+          <a:chExt cx="0" cy="0"/>
+        </a:xfrm>
+      </p:grpSpPr>
       <p:sp>
         <p:nvSpPr>
           <p:cNvPr id="2" name="Rectangle 1"/>
@@ -7489,6 +7649,7 @@
           <a:lstStyle/>
           <a:p>
             <a:pPr algn="ctr"/>
+            <a:endParaRPr/>
           </a:p>
         </p:txBody>
       </p:sp>
@@ -7581,7 +7742,7 @@
             </a:r>
           </a:p>
           <a:p>
-            <a:pPr algn="l" lvl="1">
+            <a:pPr lvl="1" algn="l">
               <a:spcAft>
                 <a:spcPts val="800"/>
               </a:spcAft>
@@ -7597,7 +7758,7 @@
             </a:r>
           </a:p>
           <a:p>
-            <a:pPr algn="l" lvl="1">
+            <a:pPr lvl="1" algn="l">
               <a:spcAft>
                 <a:spcPts val="800"/>
               </a:spcAft>
@@ -7613,7 +7774,7 @@
             </a:r>
           </a:p>
           <a:p>
-            <a:pPr algn="l" lvl="1">
+            <a:pPr lvl="1" algn="l">
               <a:spcAft>
                 <a:spcPts val="800"/>
               </a:spcAft>
@@ -7655,7 +7816,7 @@
 </file>
 
 <file path=ppt/slides/slide18.xml><?xml version="1.0" encoding="utf-8"?>
-<p:sld xmlns:a="http://schemas.openxmlformats.org/drawingml/2006/main" xmlns:p="http://schemas.openxmlformats.org/presentationml/2006/main" xmlns:r="http://schemas.openxmlformats.org/officeDocument/2006/relationships">
+<p:sld xmlns:a="http://schemas.openxmlformats.org/drawingml/2006/main" xmlns:r="http://schemas.openxmlformats.org/officeDocument/2006/relationships" xmlns:p="http://schemas.openxmlformats.org/presentationml/2006/main">
   <p:cSld>
     <p:spTree>
       <p:nvGrpSpPr>
@@ -7663,7 +7824,14 @@
         <p:cNvGrpSpPr/>
         <p:nvPr/>
       </p:nvGrpSpPr>
-      <p:grpSpPr/>
+      <p:grpSpPr>
+        <a:xfrm>
+          <a:off x="0" y="0"/>
+          <a:ext cx="0" cy="0"/>
+          <a:chOff x="0" y="0"/>
+          <a:chExt cx="0" cy="0"/>
+        </a:xfrm>
+      </p:grpSpPr>
       <p:sp>
         <p:nvSpPr>
           <p:cNvPr id="2" name="Rectangle 1"/>
@@ -7705,6 +7873,7 @@
           <a:lstStyle/>
           <a:p>
             <a:pPr algn="ctr"/>
+            <a:endParaRPr/>
           </a:p>
         </p:txBody>
       </p:sp>
@@ -7871,7 +8040,7 @@
 </file>
 
 <file path=ppt/slides/slide19.xml><?xml version="1.0" encoding="utf-8"?>
-<p:sld xmlns:a="http://schemas.openxmlformats.org/drawingml/2006/main" xmlns:p="http://schemas.openxmlformats.org/presentationml/2006/main" xmlns:r="http://schemas.openxmlformats.org/officeDocument/2006/relationships">
+<p:sld xmlns:a="http://schemas.openxmlformats.org/drawingml/2006/main" xmlns:r="http://schemas.openxmlformats.org/officeDocument/2006/relationships" xmlns:p="http://schemas.openxmlformats.org/presentationml/2006/main">
   <p:cSld>
     <p:spTree>
       <p:nvGrpSpPr>
@@ -7879,7 +8048,14 @@
         <p:cNvGrpSpPr/>
         <p:nvPr/>
       </p:nvGrpSpPr>
-      <p:grpSpPr/>
+      <p:grpSpPr>
+        <a:xfrm>
+          <a:off x="0" y="0"/>
+          <a:ext cx="0" cy="0"/>
+          <a:chOff x="0" y="0"/>
+          <a:chExt cx="0" cy="0"/>
+        </a:xfrm>
+      </p:grpSpPr>
       <p:sp>
         <p:nvSpPr>
           <p:cNvPr id="2" name="Rectangle 1"/>
@@ -7921,6 +8097,7 @@
           <a:lstStyle/>
           <a:p>
             <a:pPr algn="ctr"/>
+            <a:endParaRPr/>
           </a:p>
         </p:txBody>
       </p:sp>
@@ -7978,9 +8155,27 @@
                 <a:tableStyleId>{5C22544A-7EE6-4342-B048-85BDC9FD1C3A}</a:tableStyleId>
               </a:tblPr>
               <a:tblGrid>
-                <a:gridCol w="3688080"/>
-                <a:gridCol w="3688080"/>
-                <a:gridCol w="3688080"/>
+                <a:gridCol w="3688080">
+                  <a:extLst>
+                    <a:ext uri="{9D8B030D-6E8A-4147-A177-3AD203B41FA5}">
+                      <a16:colId xmlns:a16="http://schemas.microsoft.com/office/drawing/2014/main" val="20000"/>
+                    </a:ext>
+                  </a:extLst>
+                </a:gridCol>
+                <a:gridCol w="3688080">
+                  <a:extLst>
+                    <a:ext uri="{9D8B030D-6E8A-4147-A177-3AD203B41FA5}">
+                      <a16:colId xmlns:a16="http://schemas.microsoft.com/office/drawing/2014/main" val="20001"/>
+                    </a:ext>
+                  </a:extLst>
+                </a:gridCol>
+                <a:gridCol w="3688080">
+                  <a:extLst>
+                    <a:ext uri="{9D8B030D-6E8A-4147-A177-3AD203B41FA5}">
+                      <a16:colId xmlns:a16="http://schemas.microsoft.com/office/drawing/2014/main" val="20002"/>
+                    </a:ext>
+                  </a:extLst>
+                </a:gridCol>
               </a:tblGrid>
               <a:tr h="365760">
                 <a:tc>
@@ -8046,6 +8241,11 @@
                     </a:solidFill>
                   </a:tcPr>
                 </a:tc>
+                <a:extLst>
+                  <a:ext uri="{0D108BD9-81ED-4DB2-BD59-A6C34878D82A}">
+                    <a16:rowId xmlns:a16="http://schemas.microsoft.com/office/drawing/2014/main" val="10000"/>
+                  </a:ext>
+                </a:extLst>
               </a:tr>
               <a:tr h="365760">
                 <a:tc>
@@ -8111,6 +8311,11 @@
                     </a:solidFill>
                   </a:tcPr>
                 </a:tc>
+                <a:extLst>
+                  <a:ext uri="{0D108BD9-81ED-4DB2-BD59-A6C34878D82A}">
+                    <a16:rowId xmlns:a16="http://schemas.microsoft.com/office/drawing/2014/main" val="10001"/>
+                  </a:ext>
+                </a:extLst>
               </a:tr>
               <a:tr h="365760">
                 <a:tc>
@@ -8176,6 +8381,11 @@
                     </a:solidFill>
                   </a:tcPr>
                 </a:tc>
+                <a:extLst>
+                  <a:ext uri="{0D108BD9-81ED-4DB2-BD59-A6C34878D82A}">
+                    <a16:rowId xmlns:a16="http://schemas.microsoft.com/office/drawing/2014/main" val="10002"/>
+                  </a:ext>
+                </a:extLst>
               </a:tr>
               <a:tr h="365760">
                 <a:tc>
@@ -8241,6 +8451,11 @@
                     </a:solidFill>
                   </a:tcPr>
                 </a:tc>
+                <a:extLst>
+                  <a:ext uri="{0D108BD9-81ED-4DB2-BD59-A6C34878D82A}">
+                    <a16:rowId xmlns:a16="http://schemas.microsoft.com/office/drawing/2014/main" val="10003"/>
+                  </a:ext>
+                </a:extLst>
               </a:tr>
               <a:tr h="365760">
                 <a:tc>
@@ -8306,6 +8521,11 @@
                     </a:solidFill>
                   </a:tcPr>
                 </a:tc>
+                <a:extLst>
+                  <a:ext uri="{0D108BD9-81ED-4DB2-BD59-A6C34878D82A}">
+                    <a16:rowId xmlns:a16="http://schemas.microsoft.com/office/drawing/2014/main" val="10004"/>
+                  </a:ext>
+                </a:extLst>
               </a:tr>
               <a:tr h="365760">
                 <a:tc>
@@ -8371,6 +8591,11 @@
                     </a:solidFill>
                   </a:tcPr>
                 </a:tc>
+                <a:extLst>
+                  <a:ext uri="{0D108BD9-81ED-4DB2-BD59-A6C34878D82A}">
+                    <a16:rowId xmlns:a16="http://schemas.microsoft.com/office/drawing/2014/main" val="10005"/>
+                  </a:ext>
+                </a:extLst>
               </a:tr>
               <a:tr h="365760">
                 <a:tc>
@@ -8436,6 +8661,11 @@
                     </a:solidFill>
                   </a:tcPr>
                 </a:tc>
+                <a:extLst>
+                  <a:ext uri="{0D108BD9-81ED-4DB2-BD59-A6C34878D82A}">
+                    <a16:rowId xmlns:a16="http://schemas.microsoft.com/office/drawing/2014/main" val="10006"/>
+                  </a:ext>
+                </a:extLst>
               </a:tr>
             </a:tbl>
           </a:graphicData>
@@ -8450,7 +8680,7 @@
 </file>
 
 <file path=ppt/slides/slide2.xml><?xml version="1.0" encoding="utf-8"?>
-<p:sld xmlns:a="http://schemas.openxmlformats.org/drawingml/2006/main" xmlns:p="http://schemas.openxmlformats.org/presentationml/2006/main" xmlns:r="http://schemas.openxmlformats.org/officeDocument/2006/relationships">
+<p:sld xmlns:a="http://schemas.openxmlformats.org/drawingml/2006/main" xmlns:r="http://schemas.openxmlformats.org/officeDocument/2006/relationships" xmlns:p="http://schemas.openxmlformats.org/presentationml/2006/main">
   <p:cSld>
     <p:spTree>
       <p:nvGrpSpPr>
@@ -8458,7 +8688,14 @@
         <p:cNvGrpSpPr/>
         <p:nvPr/>
       </p:nvGrpSpPr>
-      <p:grpSpPr/>
+      <p:grpSpPr>
+        <a:xfrm>
+          <a:off x="0" y="0"/>
+          <a:ext cx="0" cy="0"/>
+          <a:chOff x="0" y="0"/>
+          <a:chExt cx="0" cy="0"/>
+        </a:xfrm>
+      </p:grpSpPr>
       <p:sp>
         <p:nvSpPr>
           <p:cNvPr id="2" name="Rectangle 1"/>
@@ -8500,6 +8737,7 @@
           <a:lstStyle/>
           <a:p>
             <a:pPr algn="ctr"/>
+            <a:endParaRPr/>
           </a:p>
         </p:txBody>
       </p:sp>
@@ -8582,7 +8820,7 @@
 </file>
 
 <file path=ppt/slides/slide20.xml><?xml version="1.0" encoding="utf-8"?>
-<p:sld xmlns:a="http://schemas.openxmlformats.org/drawingml/2006/main" xmlns:p="http://schemas.openxmlformats.org/presentationml/2006/main" xmlns:r="http://schemas.openxmlformats.org/officeDocument/2006/relationships">
+<p:sld xmlns:a="http://schemas.openxmlformats.org/drawingml/2006/main" xmlns:r="http://schemas.openxmlformats.org/officeDocument/2006/relationships" xmlns:p="http://schemas.openxmlformats.org/presentationml/2006/main">
   <p:cSld>
     <p:spTree>
       <p:nvGrpSpPr>
@@ -8590,7 +8828,14 @@
         <p:cNvGrpSpPr/>
         <p:nvPr/>
       </p:nvGrpSpPr>
-      <p:grpSpPr/>
+      <p:grpSpPr>
+        <a:xfrm>
+          <a:off x="0" y="0"/>
+          <a:ext cx="0" cy="0"/>
+          <a:chOff x="0" y="0"/>
+          <a:chExt cx="0" cy="0"/>
+        </a:xfrm>
+      </p:grpSpPr>
       <p:sp>
         <p:nvSpPr>
           <p:cNvPr id="2" name="Rectangle 1"/>
@@ -8632,6 +8877,7 @@
           <a:lstStyle/>
           <a:p>
             <a:pPr algn="ctr"/>
+            <a:endParaRPr/>
           </a:p>
         </p:txBody>
       </p:sp>
@@ -8782,7 +9028,7 @@
 </file>
 
 <file path=ppt/slides/slide21.xml><?xml version="1.0" encoding="utf-8"?>
-<p:sld xmlns:a="http://schemas.openxmlformats.org/drawingml/2006/main" xmlns:p="http://schemas.openxmlformats.org/presentationml/2006/main" xmlns:r="http://schemas.openxmlformats.org/officeDocument/2006/relationships">
+<p:sld xmlns:a="http://schemas.openxmlformats.org/drawingml/2006/main" xmlns:r="http://schemas.openxmlformats.org/officeDocument/2006/relationships" xmlns:p="http://schemas.openxmlformats.org/presentationml/2006/main">
   <p:cSld>
     <p:spTree>
       <p:nvGrpSpPr>
@@ -8790,7 +9036,14 @@
         <p:cNvGrpSpPr/>
         <p:nvPr/>
       </p:nvGrpSpPr>
-      <p:grpSpPr/>
+      <p:grpSpPr>
+        <a:xfrm>
+          <a:off x="0" y="0"/>
+          <a:ext cx="0" cy="0"/>
+          <a:chOff x="0" y="0"/>
+          <a:chExt cx="0" cy="0"/>
+        </a:xfrm>
+      </p:grpSpPr>
       <p:sp>
         <p:nvSpPr>
           <p:cNvPr id="2" name="Rectangle 1"/>
@@ -8832,6 +9085,7 @@
           <a:lstStyle/>
           <a:p>
             <a:pPr algn="ctr"/>
+            <a:endParaRPr/>
           </a:p>
         </p:txBody>
       </p:sp>
@@ -8914,7 +9168,7 @@
 </file>
 
 <file path=ppt/slides/slide22.xml><?xml version="1.0" encoding="utf-8"?>
-<p:sld xmlns:a="http://schemas.openxmlformats.org/drawingml/2006/main" xmlns:p="http://schemas.openxmlformats.org/presentationml/2006/main" xmlns:r="http://schemas.openxmlformats.org/officeDocument/2006/relationships">
+<p:sld xmlns:a="http://schemas.openxmlformats.org/drawingml/2006/main" xmlns:r="http://schemas.openxmlformats.org/officeDocument/2006/relationships" xmlns:p="http://schemas.openxmlformats.org/presentationml/2006/main">
   <p:cSld>
     <p:spTree>
       <p:nvGrpSpPr>
@@ -8922,7 +9176,14 @@
         <p:cNvGrpSpPr/>
         <p:nvPr/>
       </p:nvGrpSpPr>
-      <p:grpSpPr/>
+      <p:grpSpPr>
+        <a:xfrm>
+          <a:off x="0" y="0"/>
+          <a:ext cx="0" cy="0"/>
+          <a:chOff x="0" y="0"/>
+          <a:chExt cx="0" cy="0"/>
+        </a:xfrm>
+      </p:grpSpPr>
       <p:sp>
         <p:nvSpPr>
           <p:cNvPr id="2" name="Rectangle 1"/>
@@ -8964,6 +9225,7 @@
           <a:lstStyle/>
           <a:p>
             <a:pPr algn="ctr"/>
+            <a:endParaRPr/>
           </a:p>
         </p:txBody>
       </p:sp>
@@ -9130,7 +9392,7 @@
 </file>
 
 <file path=ppt/slides/slide23.xml><?xml version="1.0" encoding="utf-8"?>
-<p:sld xmlns:a="http://schemas.openxmlformats.org/drawingml/2006/main" xmlns:p="http://schemas.openxmlformats.org/presentationml/2006/main" xmlns:r="http://schemas.openxmlformats.org/officeDocument/2006/relationships">
+<p:sld xmlns:a="http://schemas.openxmlformats.org/drawingml/2006/main" xmlns:r="http://schemas.openxmlformats.org/officeDocument/2006/relationships" xmlns:p="http://schemas.openxmlformats.org/presentationml/2006/main">
   <p:cSld>
     <p:spTree>
       <p:nvGrpSpPr>
@@ -9138,7 +9400,14 @@
         <p:cNvGrpSpPr/>
         <p:nvPr/>
       </p:nvGrpSpPr>
-      <p:grpSpPr/>
+      <p:grpSpPr>
+        <a:xfrm>
+          <a:off x="0" y="0"/>
+          <a:ext cx="0" cy="0"/>
+          <a:chOff x="0" y="0"/>
+          <a:chExt cx="0" cy="0"/>
+        </a:xfrm>
+      </p:grpSpPr>
       <p:sp>
         <p:nvSpPr>
           <p:cNvPr id="2" name="Rectangle 1"/>
@@ -9180,6 +9449,7 @@
           <a:lstStyle/>
           <a:p>
             <a:pPr algn="ctr"/>
+            <a:endParaRPr/>
           </a:p>
         </p:txBody>
       </p:sp>
@@ -9237,10 +9507,34 @@
                 <a:tableStyleId>{5C22544A-7EE6-4342-B048-85BDC9FD1C3A}</a:tableStyleId>
               </a:tblPr>
               <a:tblGrid>
-                <a:gridCol w="2766060"/>
-                <a:gridCol w="2766060"/>
-                <a:gridCol w="2766060"/>
-                <a:gridCol w="2766060"/>
+                <a:gridCol w="2766060">
+                  <a:extLst>
+                    <a:ext uri="{9D8B030D-6E8A-4147-A177-3AD203B41FA5}">
+                      <a16:colId xmlns:a16="http://schemas.microsoft.com/office/drawing/2014/main" val="20000"/>
+                    </a:ext>
+                  </a:extLst>
+                </a:gridCol>
+                <a:gridCol w="2766060">
+                  <a:extLst>
+                    <a:ext uri="{9D8B030D-6E8A-4147-A177-3AD203B41FA5}">
+                      <a16:colId xmlns:a16="http://schemas.microsoft.com/office/drawing/2014/main" val="20001"/>
+                    </a:ext>
+                  </a:extLst>
+                </a:gridCol>
+                <a:gridCol w="2766060">
+                  <a:extLst>
+                    <a:ext uri="{9D8B030D-6E8A-4147-A177-3AD203B41FA5}">
+                      <a16:colId xmlns:a16="http://schemas.microsoft.com/office/drawing/2014/main" val="20002"/>
+                    </a:ext>
+                  </a:extLst>
+                </a:gridCol>
+                <a:gridCol w="2766060">
+                  <a:extLst>
+                    <a:ext uri="{9D8B030D-6E8A-4147-A177-3AD203B41FA5}">
+                      <a16:colId xmlns:a16="http://schemas.microsoft.com/office/drawing/2014/main" val="20003"/>
+                    </a:ext>
+                  </a:extLst>
+                </a:gridCol>
               </a:tblGrid>
               <a:tr h="365760">
                 <a:tc>
@@ -9327,6 +9621,11 @@
                     </a:solidFill>
                   </a:tcPr>
                 </a:tc>
+                <a:extLst>
+                  <a:ext uri="{0D108BD9-81ED-4DB2-BD59-A6C34878D82A}">
+                    <a16:rowId xmlns:a16="http://schemas.microsoft.com/office/drawing/2014/main" val="10000"/>
+                  </a:ext>
+                </a:extLst>
               </a:tr>
               <a:tr h="365760">
                 <a:tc>
@@ -9413,6 +9712,11 @@
                     </a:solidFill>
                   </a:tcPr>
                 </a:tc>
+                <a:extLst>
+                  <a:ext uri="{0D108BD9-81ED-4DB2-BD59-A6C34878D82A}">
+                    <a16:rowId xmlns:a16="http://schemas.microsoft.com/office/drawing/2014/main" val="10001"/>
+                  </a:ext>
+                </a:extLst>
               </a:tr>
               <a:tr h="365760">
                 <a:tc>
@@ -9499,6 +9803,11 @@
                     </a:solidFill>
                   </a:tcPr>
                 </a:tc>
+                <a:extLst>
+                  <a:ext uri="{0D108BD9-81ED-4DB2-BD59-A6C34878D82A}">
+                    <a16:rowId xmlns:a16="http://schemas.microsoft.com/office/drawing/2014/main" val="10002"/>
+                  </a:ext>
+                </a:extLst>
               </a:tr>
               <a:tr h="365760">
                 <a:tc>
@@ -9585,6 +9894,11 @@
                     </a:solidFill>
                   </a:tcPr>
                 </a:tc>
+                <a:extLst>
+                  <a:ext uri="{0D108BD9-81ED-4DB2-BD59-A6C34878D82A}">
+                    <a16:rowId xmlns:a16="http://schemas.microsoft.com/office/drawing/2014/main" val="10003"/>
+                  </a:ext>
+                </a:extLst>
               </a:tr>
               <a:tr h="365760">
                 <a:tc>
@@ -9671,6 +9985,11 @@
                     </a:solidFill>
                   </a:tcPr>
                 </a:tc>
+                <a:extLst>
+                  <a:ext uri="{0D108BD9-81ED-4DB2-BD59-A6C34878D82A}">
+                    <a16:rowId xmlns:a16="http://schemas.microsoft.com/office/drawing/2014/main" val="10004"/>
+                  </a:ext>
+                </a:extLst>
               </a:tr>
               <a:tr h="365760">
                 <a:tc>
@@ -9757,6 +10076,11 @@
                     </a:solidFill>
                   </a:tcPr>
                 </a:tc>
+                <a:extLst>
+                  <a:ext uri="{0D108BD9-81ED-4DB2-BD59-A6C34878D82A}">
+                    <a16:rowId xmlns:a16="http://schemas.microsoft.com/office/drawing/2014/main" val="10005"/>
+                  </a:ext>
+                </a:extLst>
               </a:tr>
               <a:tr h="365760">
                 <a:tc>
@@ -9843,6 +10167,11 @@
                     </a:solidFill>
                   </a:tcPr>
                 </a:tc>
+                <a:extLst>
+                  <a:ext uri="{0D108BD9-81ED-4DB2-BD59-A6C34878D82A}">
+                    <a16:rowId xmlns:a16="http://schemas.microsoft.com/office/drawing/2014/main" val="10006"/>
+                  </a:ext>
+                </a:extLst>
               </a:tr>
             </a:tbl>
           </a:graphicData>
@@ -9857,7 +10186,7 @@
 </file>
 
 <file path=ppt/slides/slide24.xml><?xml version="1.0" encoding="utf-8"?>
-<p:sld xmlns:a="http://schemas.openxmlformats.org/drawingml/2006/main" xmlns:p="http://schemas.openxmlformats.org/presentationml/2006/main" xmlns:r="http://schemas.openxmlformats.org/officeDocument/2006/relationships">
+<p:sld xmlns:a="http://schemas.openxmlformats.org/drawingml/2006/main" xmlns:r="http://schemas.openxmlformats.org/officeDocument/2006/relationships" xmlns:p="http://schemas.openxmlformats.org/presentationml/2006/main">
   <p:cSld>
     <p:spTree>
       <p:nvGrpSpPr>
@@ -9865,7 +10194,14 @@
         <p:cNvGrpSpPr/>
         <p:nvPr/>
       </p:nvGrpSpPr>
-      <p:grpSpPr/>
+      <p:grpSpPr>
+        <a:xfrm>
+          <a:off x="0" y="0"/>
+          <a:ext cx="0" cy="0"/>
+          <a:chOff x="0" y="0"/>
+          <a:chExt cx="0" cy="0"/>
+        </a:xfrm>
+      </p:grpSpPr>
       <p:sp>
         <p:nvSpPr>
           <p:cNvPr id="2" name="Rectangle 1"/>
@@ -9907,6 +10243,7 @@
           <a:lstStyle/>
           <a:p>
             <a:pPr algn="ctr"/>
+            <a:endParaRPr/>
           </a:p>
         </p:txBody>
       </p:sp>
@@ -9964,8 +10301,20 @@
                 <a:tableStyleId>{5C22544A-7EE6-4342-B048-85BDC9FD1C3A}</a:tableStyleId>
               </a:tblPr>
               <a:tblGrid>
-                <a:gridCol w="5532120"/>
-                <a:gridCol w="5532120"/>
+                <a:gridCol w="5532120">
+                  <a:extLst>
+                    <a:ext uri="{9D8B030D-6E8A-4147-A177-3AD203B41FA5}">
+                      <a16:colId xmlns:a16="http://schemas.microsoft.com/office/drawing/2014/main" val="20000"/>
+                    </a:ext>
+                  </a:extLst>
+                </a:gridCol>
+                <a:gridCol w="5532120">
+                  <a:extLst>
+                    <a:ext uri="{9D8B030D-6E8A-4147-A177-3AD203B41FA5}">
+                      <a16:colId xmlns:a16="http://schemas.microsoft.com/office/drawing/2014/main" val="20001"/>
+                    </a:ext>
+                  </a:extLst>
+                </a:gridCol>
               </a:tblGrid>
               <a:tr h="365760">
                 <a:tc>
@@ -10010,6 +10359,11 @@
                     </a:solidFill>
                   </a:tcPr>
                 </a:tc>
+                <a:extLst>
+                  <a:ext uri="{0D108BD9-81ED-4DB2-BD59-A6C34878D82A}">
+                    <a16:rowId xmlns:a16="http://schemas.microsoft.com/office/drawing/2014/main" val="10000"/>
+                  </a:ext>
+                </a:extLst>
               </a:tr>
               <a:tr h="365760">
                 <a:tc>
@@ -10054,6 +10408,11 @@
                     </a:solidFill>
                   </a:tcPr>
                 </a:tc>
+                <a:extLst>
+                  <a:ext uri="{0D108BD9-81ED-4DB2-BD59-A6C34878D82A}">
+                    <a16:rowId xmlns:a16="http://schemas.microsoft.com/office/drawing/2014/main" val="10001"/>
+                  </a:ext>
+                </a:extLst>
               </a:tr>
               <a:tr h="365760">
                 <a:tc>
@@ -10098,6 +10457,11 @@
                     </a:solidFill>
                   </a:tcPr>
                 </a:tc>
+                <a:extLst>
+                  <a:ext uri="{0D108BD9-81ED-4DB2-BD59-A6C34878D82A}">
+                    <a16:rowId xmlns:a16="http://schemas.microsoft.com/office/drawing/2014/main" val="10002"/>
+                  </a:ext>
+                </a:extLst>
               </a:tr>
               <a:tr h="365760">
                 <a:tc>
@@ -10142,6 +10506,11 @@
                     </a:solidFill>
                   </a:tcPr>
                 </a:tc>
+                <a:extLst>
+                  <a:ext uri="{0D108BD9-81ED-4DB2-BD59-A6C34878D82A}">
+                    <a16:rowId xmlns:a16="http://schemas.microsoft.com/office/drawing/2014/main" val="10003"/>
+                  </a:ext>
+                </a:extLst>
               </a:tr>
               <a:tr h="365760">
                 <a:tc>
@@ -10186,6 +10555,11 @@
                     </a:solidFill>
                   </a:tcPr>
                 </a:tc>
+                <a:extLst>
+                  <a:ext uri="{0D108BD9-81ED-4DB2-BD59-A6C34878D82A}">
+                    <a16:rowId xmlns:a16="http://schemas.microsoft.com/office/drawing/2014/main" val="10004"/>
+                  </a:ext>
+                </a:extLst>
               </a:tr>
               <a:tr h="365760">
                 <a:tc>
@@ -10230,6 +10604,11 @@
                     </a:solidFill>
                   </a:tcPr>
                 </a:tc>
+                <a:extLst>
+                  <a:ext uri="{0D108BD9-81ED-4DB2-BD59-A6C34878D82A}">
+                    <a16:rowId xmlns:a16="http://schemas.microsoft.com/office/drawing/2014/main" val="10005"/>
+                  </a:ext>
+                </a:extLst>
               </a:tr>
               <a:tr h="365760">
                 <a:tc>
@@ -10274,6 +10653,11 @@
                     </a:solidFill>
                   </a:tcPr>
                 </a:tc>
+                <a:extLst>
+                  <a:ext uri="{0D108BD9-81ED-4DB2-BD59-A6C34878D82A}">
+                    <a16:rowId xmlns:a16="http://schemas.microsoft.com/office/drawing/2014/main" val="10006"/>
+                  </a:ext>
+                </a:extLst>
               </a:tr>
               <a:tr h="365760">
                 <a:tc>
@@ -10318,6 +10702,11 @@
                     </a:solidFill>
                   </a:tcPr>
                 </a:tc>
+                <a:extLst>
+                  <a:ext uri="{0D108BD9-81ED-4DB2-BD59-A6C34878D82A}">
+                    <a16:rowId xmlns:a16="http://schemas.microsoft.com/office/drawing/2014/main" val="10007"/>
+                  </a:ext>
+                </a:extLst>
               </a:tr>
               <a:tr h="365760">
                 <a:tc>
@@ -10362,6 +10751,11 @@
                     </a:solidFill>
                   </a:tcPr>
                 </a:tc>
+                <a:extLst>
+                  <a:ext uri="{0D108BD9-81ED-4DB2-BD59-A6C34878D82A}">
+                    <a16:rowId xmlns:a16="http://schemas.microsoft.com/office/drawing/2014/main" val="10008"/>
+                  </a:ext>
+                </a:extLst>
               </a:tr>
             </a:tbl>
           </a:graphicData>
@@ -10376,7 +10770,7 @@
 </file>
 
 <file path=ppt/slides/slide25.xml><?xml version="1.0" encoding="utf-8"?>
-<p:sld xmlns:a="http://schemas.openxmlformats.org/drawingml/2006/main" xmlns:p="http://schemas.openxmlformats.org/presentationml/2006/main" xmlns:r="http://schemas.openxmlformats.org/officeDocument/2006/relationships">
+<p:sld xmlns:a="http://schemas.openxmlformats.org/drawingml/2006/main" xmlns:r="http://schemas.openxmlformats.org/officeDocument/2006/relationships" xmlns:p="http://schemas.openxmlformats.org/presentationml/2006/main">
   <p:cSld>
     <p:spTree>
       <p:nvGrpSpPr>
@@ -10384,7 +10778,14 @@
         <p:cNvGrpSpPr/>
         <p:nvPr/>
       </p:nvGrpSpPr>
-      <p:grpSpPr/>
+      <p:grpSpPr>
+        <a:xfrm>
+          <a:off x="0" y="0"/>
+          <a:ext cx="0" cy="0"/>
+          <a:chOff x="0" y="0"/>
+          <a:chExt cx="0" cy="0"/>
+        </a:xfrm>
+      </p:grpSpPr>
       <p:sp>
         <p:nvSpPr>
           <p:cNvPr id="2" name="Rectangle 1"/>
@@ -10426,6 +10827,7 @@
           <a:lstStyle/>
           <a:p>
             <a:pPr algn="ctr"/>
+            <a:endParaRPr/>
           </a:p>
         </p:txBody>
       </p:sp>
@@ -10508,7 +10910,7 @@
 </file>
 
 <file path=ppt/slides/slide26.xml><?xml version="1.0" encoding="utf-8"?>
-<p:sld xmlns:a="http://schemas.openxmlformats.org/drawingml/2006/main" xmlns:p="http://schemas.openxmlformats.org/presentationml/2006/main" xmlns:r="http://schemas.openxmlformats.org/officeDocument/2006/relationships">
+<p:sld xmlns:a="http://schemas.openxmlformats.org/drawingml/2006/main" xmlns:r="http://schemas.openxmlformats.org/officeDocument/2006/relationships" xmlns:p="http://schemas.openxmlformats.org/presentationml/2006/main">
   <p:cSld>
     <p:spTree>
       <p:nvGrpSpPr>
@@ -10516,7 +10918,14 @@
         <p:cNvGrpSpPr/>
         <p:nvPr/>
       </p:nvGrpSpPr>
-      <p:grpSpPr/>
+      <p:grpSpPr>
+        <a:xfrm>
+          <a:off x="0" y="0"/>
+          <a:ext cx="0" cy="0"/>
+          <a:chOff x="0" y="0"/>
+          <a:chExt cx="0" cy="0"/>
+        </a:xfrm>
+      </p:grpSpPr>
       <p:sp>
         <p:nvSpPr>
           <p:cNvPr id="2" name="Rectangle 1"/>
@@ -10558,6 +10967,7 @@
           <a:lstStyle/>
           <a:p>
             <a:pPr algn="ctr"/>
+            <a:endParaRPr/>
           </a:p>
         </p:txBody>
       </p:sp>
@@ -10708,7 +11118,7 @@
 </file>
 
 <file path=ppt/slides/slide27.xml><?xml version="1.0" encoding="utf-8"?>
-<p:sld xmlns:a="http://schemas.openxmlformats.org/drawingml/2006/main" xmlns:p="http://schemas.openxmlformats.org/presentationml/2006/main" xmlns:r="http://schemas.openxmlformats.org/officeDocument/2006/relationships">
+<p:sld xmlns:a="http://schemas.openxmlformats.org/drawingml/2006/main" xmlns:r="http://schemas.openxmlformats.org/officeDocument/2006/relationships" xmlns:p="http://schemas.openxmlformats.org/presentationml/2006/main">
   <p:cSld>
     <p:spTree>
       <p:nvGrpSpPr>
@@ -10716,7 +11126,14 @@
         <p:cNvGrpSpPr/>
         <p:nvPr/>
       </p:nvGrpSpPr>
-      <p:grpSpPr/>
+      <p:grpSpPr>
+        <a:xfrm>
+          <a:off x="0" y="0"/>
+          <a:ext cx="0" cy="0"/>
+          <a:chOff x="0" y="0"/>
+          <a:chExt cx="0" cy="0"/>
+        </a:xfrm>
+      </p:grpSpPr>
       <p:sp>
         <p:nvSpPr>
           <p:cNvPr id="2" name="Rectangle 1"/>
@@ -10758,6 +11175,7 @@
           <a:lstStyle/>
           <a:p>
             <a:pPr algn="ctr"/>
+            <a:endParaRPr/>
           </a:p>
         </p:txBody>
       </p:sp>
@@ -10908,7 +11326,7 @@
 </file>
 
 <file path=ppt/slides/slide28.xml><?xml version="1.0" encoding="utf-8"?>
-<p:sld xmlns:a="http://schemas.openxmlformats.org/drawingml/2006/main" xmlns:p="http://schemas.openxmlformats.org/presentationml/2006/main" xmlns:r="http://schemas.openxmlformats.org/officeDocument/2006/relationships">
+<p:sld xmlns:a="http://schemas.openxmlformats.org/drawingml/2006/main" xmlns:r="http://schemas.openxmlformats.org/officeDocument/2006/relationships" xmlns:p="http://schemas.openxmlformats.org/presentationml/2006/main">
   <p:cSld>
     <p:spTree>
       <p:nvGrpSpPr>
@@ -10916,7 +11334,14 @@
         <p:cNvGrpSpPr/>
         <p:nvPr/>
       </p:nvGrpSpPr>
-      <p:grpSpPr/>
+      <p:grpSpPr>
+        <a:xfrm>
+          <a:off x="0" y="0"/>
+          <a:ext cx="0" cy="0"/>
+          <a:chOff x="0" y="0"/>
+          <a:chExt cx="0" cy="0"/>
+        </a:xfrm>
+      </p:grpSpPr>
       <p:sp>
         <p:nvSpPr>
           <p:cNvPr id="2" name="Rectangle 1"/>
@@ -10958,6 +11383,7 @@
           <a:lstStyle/>
           <a:p>
             <a:pPr algn="ctr"/>
+            <a:endParaRPr/>
           </a:p>
         </p:txBody>
       </p:sp>
@@ -11124,7 +11550,7 @@
 </file>
 
 <file path=ppt/slides/slide29.xml><?xml version="1.0" encoding="utf-8"?>
-<p:sld xmlns:a="http://schemas.openxmlformats.org/drawingml/2006/main" xmlns:p="http://schemas.openxmlformats.org/presentationml/2006/main" xmlns:r="http://schemas.openxmlformats.org/officeDocument/2006/relationships">
+<p:sld xmlns:a="http://schemas.openxmlformats.org/drawingml/2006/main" xmlns:r="http://schemas.openxmlformats.org/officeDocument/2006/relationships" xmlns:p="http://schemas.openxmlformats.org/presentationml/2006/main">
   <p:cSld>
     <p:spTree>
       <p:nvGrpSpPr>
@@ -11132,7 +11558,14 @@
         <p:cNvGrpSpPr/>
         <p:nvPr/>
       </p:nvGrpSpPr>
-      <p:grpSpPr/>
+      <p:grpSpPr>
+        <a:xfrm>
+          <a:off x="0" y="0"/>
+          <a:ext cx="0" cy="0"/>
+          <a:chOff x="0" y="0"/>
+          <a:chExt cx="0" cy="0"/>
+        </a:xfrm>
+      </p:grpSpPr>
       <p:sp>
         <p:nvSpPr>
           <p:cNvPr id="2" name="Rectangle 1"/>
@@ -11174,6 +11607,7 @@
           <a:lstStyle/>
           <a:p>
             <a:pPr algn="ctr"/>
+            <a:endParaRPr/>
           </a:p>
         </p:txBody>
       </p:sp>
@@ -11231,9 +11665,27 @@
                 <a:tableStyleId>{5C22544A-7EE6-4342-B048-85BDC9FD1C3A}</a:tableStyleId>
               </a:tblPr>
               <a:tblGrid>
-                <a:gridCol w="3688080"/>
-                <a:gridCol w="3688080"/>
-                <a:gridCol w="3688080"/>
+                <a:gridCol w="3688080">
+                  <a:extLst>
+                    <a:ext uri="{9D8B030D-6E8A-4147-A177-3AD203B41FA5}">
+                      <a16:colId xmlns:a16="http://schemas.microsoft.com/office/drawing/2014/main" val="20000"/>
+                    </a:ext>
+                  </a:extLst>
+                </a:gridCol>
+                <a:gridCol w="3688080">
+                  <a:extLst>
+                    <a:ext uri="{9D8B030D-6E8A-4147-A177-3AD203B41FA5}">
+                      <a16:colId xmlns:a16="http://schemas.microsoft.com/office/drawing/2014/main" val="20001"/>
+                    </a:ext>
+                  </a:extLst>
+                </a:gridCol>
+                <a:gridCol w="3688080">
+                  <a:extLst>
+                    <a:ext uri="{9D8B030D-6E8A-4147-A177-3AD203B41FA5}">
+                      <a16:colId xmlns:a16="http://schemas.microsoft.com/office/drawing/2014/main" val="20002"/>
+                    </a:ext>
+                  </a:extLst>
+                </a:gridCol>
               </a:tblGrid>
               <a:tr h="365760">
                 <a:tc>
@@ -11299,6 +11751,11 @@
                     </a:solidFill>
                   </a:tcPr>
                 </a:tc>
+                <a:extLst>
+                  <a:ext uri="{0D108BD9-81ED-4DB2-BD59-A6C34878D82A}">
+                    <a16:rowId xmlns:a16="http://schemas.microsoft.com/office/drawing/2014/main" val="10000"/>
+                  </a:ext>
+                </a:extLst>
               </a:tr>
               <a:tr h="365760">
                 <a:tc>
@@ -11364,6 +11821,11 @@
                     </a:solidFill>
                   </a:tcPr>
                 </a:tc>
+                <a:extLst>
+                  <a:ext uri="{0D108BD9-81ED-4DB2-BD59-A6C34878D82A}">
+                    <a16:rowId xmlns:a16="http://schemas.microsoft.com/office/drawing/2014/main" val="10001"/>
+                  </a:ext>
+                </a:extLst>
               </a:tr>
               <a:tr h="365760">
                 <a:tc>
@@ -11429,6 +11891,11 @@
                     </a:solidFill>
                   </a:tcPr>
                 </a:tc>
+                <a:extLst>
+                  <a:ext uri="{0D108BD9-81ED-4DB2-BD59-A6C34878D82A}">
+                    <a16:rowId xmlns:a16="http://schemas.microsoft.com/office/drawing/2014/main" val="10002"/>
+                  </a:ext>
+                </a:extLst>
               </a:tr>
               <a:tr h="365760">
                 <a:tc>
@@ -11494,6 +11961,11 @@
                     </a:solidFill>
                   </a:tcPr>
                 </a:tc>
+                <a:extLst>
+                  <a:ext uri="{0D108BD9-81ED-4DB2-BD59-A6C34878D82A}">
+                    <a16:rowId xmlns:a16="http://schemas.microsoft.com/office/drawing/2014/main" val="10003"/>
+                  </a:ext>
+                </a:extLst>
               </a:tr>
               <a:tr h="365760">
                 <a:tc>
@@ -11559,6 +12031,11 @@
                     </a:solidFill>
                   </a:tcPr>
                 </a:tc>
+                <a:extLst>
+                  <a:ext uri="{0D108BD9-81ED-4DB2-BD59-A6C34878D82A}">
+                    <a16:rowId xmlns:a16="http://schemas.microsoft.com/office/drawing/2014/main" val="10004"/>
+                  </a:ext>
+                </a:extLst>
               </a:tr>
             </a:tbl>
           </a:graphicData>
@@ -11573,7 +12050,7 @@
 </file>
 
 <file path=ppt/slides/slide3.xml><?xml version="1.0" encoding="utf-8"?>
-<p:sld xmlns:a="http://schemas.openxmlformats.org/drawingml/2006/main" xmlns:p="http://schemas.openxmlformats.org/presentationml/2006/main" xmlns:r="http://schemas.openxmlformats.org/officeDocument/2006/relationships">
+<p:sld xmlns:a="http://schemas.openxmlformats.org/drawingml/2006/main" xmlns:r="http://schemas.openxmlformats.org/officeDocument/2006/relationships" xmlns:p="http://schemas.openxmlformats.org/presentationml/2006/main">
   <p:cSld>
     <p:spTree>
       <p:nvGrpSpPr>
@@ -11581,7 +12058,14 @@
         <p:cNvGrpSpPr/>
         <p:nvPr/>
       </p:nvGrpSpPr>
-      <p:grpSpPr/>
+      <p:grpSpPr>
+        <a:xfrm>
+          <a:off x="0" y="0"/>
+          <a:ext cx="0" cy="0"/>
+          <a:chOff x="0" y="0"/>
+          <a:chExt cx="0" cy="0"/>
+        </a:xfrm>
+      </p:grpSpPr>
       <p:sp>
         <p:nvSpPr>
           <p:cNvPr id="2" name="Rectangle 1"/>
@@ -11623,6 +12107,7 @@
           <a:lstStyle/>
           <a:p>
             <a:pPr algn="ctr"/>
+            <a:endParaRPr/>
           </a:p>
         </p:txBody>
       </p:sp>
@@ -11773,7 +12258,7 @@
 </file>
 
 <file path=ppt/slides/slide30.xml><?xml version="1.0" encoding="utf-8"?>
-<p:sld xmlns:a="http://schemas.openxmlformats.org/drawingml/2006/main" xmlns:p="http://schemas.openxmlformats.org/presentationml/2006/main" xmlns:r="http://schemas.openxmlformats.org/officeDocument/2006/relationships">
+<p:sld xmlns:a="http://schemas.openxmlformats.org/drawingml/2006/main" xmlns:r="http://schemas.openxmlformats.org/officeDocument/2006/relationships" xmlns:p="http://schemas.openxmlformats.org/presentationml/2006/main">
   <p:cSld>
     <p:spTree>
       <p:nvGrpSpPr>
@@ -11781,7 +12266,14 @@
         <p:cNvGrpSpPr/>
         <p:nvPr/>
       </p:nvGrpSpPr>
-      <p:grpSpPr/>
+      <p:grpSpPr>
+        <a:xfrm>
+          <a:off x="0" y="0"/>
+          <a:ext cx="0" cy="0"/>
+          <a:chOff x="0" y="0"/>
+          <a:chExt cx="0" cy="0"/>
+        </a:xfrm>
+      </p:grpSpPr>
       <p:sp>
         <p:nvSpPr>
           <p:cNvPr id="2" name="Rectangle 1"/>
@@ -11823,6 +12315,7 @@
           <a:lstStyle/>
           <a:p>
             <a:pPr algn="ctr"/>
+            <a:endParaRPr/>
           </a:p>
         </p:txBody>
       </p:sp>
@@ -11905,7 +12398,7 @@
 </file>
 
 <file path=ppt/slides/slide31.xml><?xml version="1.0" encoding="utf-8"?>
-<p:sld xmlns:a="http://schemas.openxmlformats.org/drawingml/2006/main" xmlns:p="http://schemas.openxmlformats.org/presentationml/2006/main" xmlns:r="http://schemas.openxmlformats.org/officeDocument/2006/relationships">
+<p:sld xmlns:a="http://schemas.openxmlformats.org/drawingml/2006/main" xmlns:r="http://schemas.openxmlformats.org/officeDocument/2006/relationships" xmlns:p="http://schemas.openxmlformats.org/presentationml/2006/main">
   <p:cSld>
     <p:spTree>
       <p:nvGrpSpPr>
@@ -11913,7 +12406,14 @@
         <p:cNvGrpSpPr/>
         <p:nvPr/>
       </p:nvGrpSpPr>
-      <p:grpSpPr/>
+      <p:grpSpPr>
+        <a:xfrm>
+          <a:off x="0" y="0"/>
+          <a:ext cx="0" cy="0"/>
+          <a:chOff x="0" y="0"/>
+          <a:chExt cx="0" cy="0"/>
+        </a:xfrm>
+      </p:grpSpPr>
       <p:sp>
         <p:nvSpPr>
           <p:cNvPr id="2" name="Rectangle 1"/>
@@ -11955,6 +12455,7 @@
           <a:lstStyle/>
           <a:p>
             <a:pPr algn="ctr"/>
+            <a:endParaRPr/>
           </a:p>
         </p:txBody>
       </p:sp>
@@ -12105,7 +12606,7 @@
 </file>
 
 <file path=ppt/slides/slide32.xml><?xml version="1.0" encoding="utf-8"?>
-<p:sld xmlns:a="http://schemas.openxmlformats.org/drawingml/2006/main" xmlns:p="http://schemas.openxmlformats.org/presentationml/2006/main" xmlns:r="http://schemas.openxmlformats.org/officeDocument/2006/relationships">
+<p:sld xmlns:a="http://schemas.openxmlformats.org/drawingml/2006/main" xmlns:r="http://schemas.openxmlformats.org/officeDocument/2006/relationships" xmlns:p="http://schemas.openxmlformats.org/presentationml/2006/main">
   <p:cSld>
     <p:spTree>
       <p:nvGrpSpPr>
@@ -12113,7 +12614,14 @@
         <p:cNvGrpSpPr/>
         <p:nvPr/>
       </p:nvGrpSpPr>
-      <p:grpSpPr/>
+      <p:grpSpPr>
+        <a:xfrm>
+          <a:off x="0" y="0"/>
+          <a:ext cx="0" cy="0"/>
+          <a:chOff x="0" y="0"/>
+          <a:chExt cx="0" cy="0"/>
+        </a:xfrm>
+      </p:grpSpPr>
       <p:sp>
         <p:nvSpPr>
           <p:cNvPr id="2" name="Rectangle 1"/>
@@ -12155,6 +12663,7 @@
           <a:lstStyle/>
           <a:p>
             <a:pPr algn="ctr"/>
+            <a:endParaRPr/>
           </a:p>
         </p:txBody>
       </p:sp>
@@ -12305,7 +12814,7 @@
 </file>
 
 <file path=ppt/slides/slide33.xml><?xml version="1.0" encoding="utf-8"?>
-<p:sld xmlns:a="http://schemas.openxmlformats.org/drawingml/2006/main" xmlns:p="http://schemas.openxmlformats.org/presentationml/2006/main" xmlns:r="http://schemas.openxmlformats.org/officeDocument/2006/relationships">
+<p:sld xmlns:a="http://schemas.openxmlformats.org/drawingml/2006/main" xmlns:r="http://schemas.openxmlformats.org/officeDocument/2006/relationships" xmlns:p="http://schemas.openxmlformats.org/presentationml/2006/main">
   <p:cSld>
     <p:spTree>
       <p:nvGrpSpPr>
@@ -12313,7 +12822,14 @@
         <p:cNvGrpSpPr/>
         <p:nvPr/>
       </p:nvGrpSpPr>
-      <p:grpSpPr/>
+      <p:grpSpPr>
+        <a:xfrm>
+          <a:off x="0" y="0"/>
+          <a:ext cx="0" cy="0"/>
+          <a:chOff x="0" y="0"/>
+          <a:chExt cx="0" cy="0"/>
+        </a:xfrm>
+      </p:grpSpPr>
       <p:sp>
         <p:nvSpPr>
           <p:cNvPr id="2" name="Rectangle 1"/>
@@ -12355,6 +12871,7 @@
           <a:lstStyle/>
           <a:p>
             <a:pPr algn="ctr"/>
+            <a:endParaRPr/>
           </a:p>
         </p:txBody>
       </p:sp>
@@ -12491,7 +13008,7 @@
                 </a:solidFill>
                 <a:latin typeface="Calibri"/>
               </a:rPr>
-              <a:t>• 7 of 34 moved back past their own approach, gaining 741 m of notice in total</a:t>
+              <a:t>• 7 of 34 moved back past their own approach, gaining 778 m of notice in total</a:t>
             </a:r>
           </a:p>
         </p:txBody>
@@ -12505,7 +13022,7 @@
 </file>
 
 <file path=ppt/slides/slide34.xml><?xml version="1.0" encoding="utf-8"?>
-<p:sld xmlns:a="http://schemas.openxmlformats.org/drawingml/2006/main" xmlns:p="http://schemas.openxmlformats.org/presentationml/2006/main" xmlns:r="http://schemas.openxmlformats.org/officeDocument/2006/relationships">
+<p:sld xmlns:a="http://schemas.openxmlformats.org/drawingml/2006/main" xmlns:r="http://schemas.openxmlformats.org/officeDocument/2006/relationships" xmlns:p="http://schemas.openxmlformats.org/presentationml/2006/main">
   <p:cSld>
     <p:spTree>
       <p:nvGrpSpPr>
@@ -12513,7 +13030,14 @@
         <p:cNvGrpSpPr/>
         <p:nvPr/>
       </p:nvGrpSpPr>
-      <p:grpSpPr/>
+      <p:grpSpPr>
+        <a:xfrm>
+          <a:off x="0" y="0"/>
+          <a:ext cx="0" cy="0"/>
+          <a:chOff x="0" y="0"/>
+          <a:chExt cx="0" cy="0"/>
+        </a:xfrm>
+      </p:grpSpPr>
       <p:sp>
         <p:nvSpPr>
           <p:cNvPr id="2" name="Rectangle 1"/>
@@ -12555,6 +13079,7 @@
           <a:lstStyle/>
           <a:p>
             <a:pPr algn="ctr"/>
+            <a:endParaRPr/>
           </a:p>
         </p:txBody>
       </p:sp>
@@ -12612,10 +13137,34 @@
                 <a:tableStyleId>{5C22544A-7EE6-4342-B048-85BDC9FD1C3A}</a:tableStyleId>
               </a:tblPr>
               <a:tblGrid>
-                <a:gridCol w="2766060"/>
-                <a:gridCol w="2766060"/>
-                <a:gridCol w="2766060"/>
-                <a:gridCol w="2766060"/>
+                <a:gridCol w="2766060">
+                  <a:extLst>
+                    <a:ext uri="{9D8B030D-6E8A-4147-A177-3AD203B41FA5}">
+                      <a16:colId xmlns:a16="http://schemas.microsoft.com/office/drawing/2014/main" val="20000"/>
+                    </a:ext>
+                  </a:extLst>
+                </a:gridCol>
+                <a:gridCol w="2766060">
+                  <a:extLst>
+                    <a:ext uri="{9D8B030D-6E8A-4147-A177-3AD203B41FA5}">
+                      <a16:colId xmlns:a16="http://schemas.microsoft.com/office/drawing/2014/main" val="20001"/>
+                    </a:ext>
+                  </a:extLst>
+                </a:gridCol>
+                <a:gridCol w="2766060">
+                  <a:extLst>
+                    <a:ext uri="{9D8B030D-6E8A-4147-A177-3AD203B41FA5}">
+                      <a16:colId xmlns:a16="http://schemas.microsoft.com/office/drawing/2014/main" val="20002"/>
+                    </a:ext>
+                  </a:extLst>
+                </a:gridCol>
+                <a:gridCol w="2766060">
+                  <a:extLst>
+                    <a:ext uri="{9D8B030D-6E8A-4147-A177-3AD203B41FA5}">
+                      <a16:colId xmlns:a16="http://schemas.microsoft.com/office/drawing/2014/main" val="20003"/>
+                    </a:ext>
+                  </a:extLst>
+                </a:gridCol>
               </a:tblGrid>
               <a:tr h="365760">
                 <a:tc>
@@ -12702,6 +13251,11 @@
                     </a:solidFill>
                   </a:tcPr>
                 </a:tc>
+                <a:extLst>
+                  <a:ext uri="{0D108BD9-81ED-4DB2-BD59-A6C34878D82A}">
+                    <a16:rowId xmlns:a16="http://schemas.microsoft.com/office/drawing/2014/main" val="10000"/>
+                  </a:ext>
+                </a:extLst>
               </a:tr>
               <a:tr h="365760">
                 <a:tc>
@@ -12788,6 +13342,11 @@
                     </a:solidFill>
                   </a:tcPr>
                 </a:tc>
+                <a:extLst>
+                  <a:ext uri="{0D108BD9-81ED-4DB2-BD59-A6C34878D82A}">
+                    <a16:rowId xmlns:a16="http://schemas.microsoft.com/office/drawing/2014/main" val="10001"/>
+                  </a:ext>
+                </a:extLst>
               </a:tr>
               <a:tr h="365760">
                 <a:tc>
@@ -12874,6 +13433,11 @@
                     </a:solidFill>
                   </a:tcPr>
                 </a:tc>
+                <a:extLst>
+                  <a:ext uri="{0D108BD9-81ED-4DB2-BD59-A6C34878D82A}">
+                    <a16:rowId xmlns:a16="http://schemas.microsoft.com/office/drawing/2014/main" val="10002"/>
+                  </a:ext>
+                </a:extLst>
               </a:tr>
               <a:tr h="365760">
                 <a:tc>
@@ -12960,6 +13524,11 @@
                     </a:solidFill>
                   </a:tcPr>
                 </a:tc>
+                <a:extLst>
+                  <a:ext uri="{0D108BD9-81ED-4DB2-BD59-A6C34878D82A}">
+                    <a16:rowId xmlns:a16="http://schemas.microsoft.com/office/drawing/2014/main" val="10003"/>
+                  </a:ext>
+                </a:extLst>
               </a:tr>
             </a:tbl>
           </a:graphicData>
@@ -12974,7 +13543,7 @@
 </file>
 
 <file path=ppt/slides/slide35.xml><?xml version="1.0" encoding="utf-8"?>
-<p:sld xmlns:a="http://schemas.openxmlformats.org/drawingml/2006/main" xmlns:p="http://schemas.openxmlformats.org/presentationml/2006/main" xmlns:r="http://schemas.openxmlformats.org/officeDocument/2006/relationships">
+<p:sld xmlns:a="http://schemas.openxmlformats.org/drawingml/2006/main" xmlns:r="http://schemas.openxmlformats.org/officeDocument/2006/relationships" xmlns:p="http://schemas.openxmlformats.org/presentationml/2006/main">
   <p:cSld>
     <p:spTree>
       <p:nvGrpSpPr>
@@ -12982,7 +13551,14 @@
         <p:cNvGrpSpPr/>
         <p:nvPr/>
       </p:nvGrpSpPr>
-      <p:grpSpPr/>
+      <p:grpSpPr>
+        <a:xfrm>
+          <a:off x="0" y="0"/>
+          <a:ext cx="0" cy="0"/>
+          <a:chOff x="0" y="0"/>
+          <a:chExt cx="0" cy="0"/>
+        </a:xfrm>
+      </p:grpSpPr>
       <p:sp>
         <p:nvSpPr>
           <p:cNvPr id="2" name="Rectangle 1"/>
@@ -13024,6 +13600,7 @@
           <a:lstStyle/>
           <a:p>
             <a:pPr algn="ctr"/>
+            <a:endParaRPr/>
           </a:p>
         </p:txBody>
       </p:sp>
@@ -13160,7 +13737,7 @@
                 </a:solidFill>
                 <a:latin typeface="Calibri"/>
               </a:rPr>
-              <a:t>• OFF by default, switched on with --combine-routes</a:t>
+              <a:t>• OFF by default; --combine-routes turns it on and writes its own .inpx</a:t>
             </a:r>
           </a:p>
           <a:p>
@@ -13190,7 +13767,7 @@
 </file>
 
 <file path=ppt/slides/slide36.xml><?xml version="1.0" encoding="utf-8"?>
-<p:sld xmlns:a="http://schemas.openxmlformats.org/drawingml/2006/main" xmlns:p="http://schemas.openxmlformats.org/presentationml/2006/main" xmlns:r="http://schemas.openxmlformats.org/officeDocument/2006/relationships">
+<p:sld xmlns:a="http://schemas.openxmlformats.org/drawingml/2006/main" xmlns:r="http://schemas.openxmlformats.org/officeDocument/2006/relationships" xmlns:p="http://schemas.openxmlformats.org/presentationml/2006/main">
   <p:cSld>
     <p:spTree>
       <p:nvGrpSpPr>
@@ -13198,7 +13775,14 @@
         <p:cNvGrpSpPr/>
         <p:nvPr/>
       </p:nvGrpSpPr>
-      <p:grpSpPr/>
+      <p:grpSpPr>
+        <a:xfrm>
+          <a:off x="0" y="0"/>
+          <a:ext cx="0" cy="0"/>
+          <a:chOff x="0" y="0"/>
+          <a:chExt cx="0" cy="0"/>
+        </a:xfrm>
+      </p:grpSpPr>
       <p:sp>
         <p:nvSpPr>
           <p:cNvPr id="2" name="Rectangle 1"/>
@@ -13240,6 +13824,7 @@
           <a:lstStyle/>
           <a:p>
             <a:pPr algn="ctr"/>
+            <a:endParaRPr/>
           </a:p>
         </p:txBody>
       </p:sp>
@@ -13322,7 +13907,7 @@
 </file>
 
 <file path=ppt/slides/slide37.xml><?xml version="1.0" encoding="utf-8"?>
-<p:sld xmlns:a="http://schemas.openxmlformats.org/drawingml/2006/main" xmlns:p="http://schemas.openxmlformats.org/presentationml/2006/main" xmlns:r="http://schemas.openxmlformats.org/officeDocument/2006/relationships">
+<p:sld xmlns:a="http://schemas.openxmlformats.org/drawingml/2006/main" xmlns:r="http://schemas.openxmlformats.org/officeDocument/2006/relationships" xmlns:p="http://schemas.openxmlformats.org/presentationml/2006/main">
   <p:cSld>
     <p:spTree>
       <p:nvGrpSpPr>
@@ -13330,7 +13915,14 @@
         <p:cNvGrpSpPr/>
         <p:nvPr/>
       </p:nvGrpSpPr>
-      <p:grpSpPr/>
+      <p:grpSpPr>
+        <a:xfrm>
+          <a:off x="0" y="0"/>
+          <a:ext cx="0" cy="0"/>
+          <a:chOff x="0" y="0"/>
+          <a:chExt cx="0" cy="0"/>
+        </a:xfrm>
+      </p:grpSpPr>
       <p:sp>
         <p:nvSpPr>
           <p:cNvPr id="2" name="Rectangle 1"/>
@@ -13372,6 +13964,7 @@
           <a:lstStyle/>
           <a:p>
             <a:pPr algn="ctr"/>
+            <a:endParaRPr/>
           </a:p>
         </p:txBody>
       </p:sp>
@@ -13464,7 +14057,7 @@
             </a:r>
           </a:p>
           <a:p>
-            <a:pPr algn="l" lvl="1">
+            <a:pPr lvl="1" algn="l">
               <a:spcAft>
                 <a:spcPts val="800"/>
               </a:spcAft>
@@ -13522,7 +14115,7 @@
 </file>
 
 <file path=ppt/slides/slide38.xml><?xml version="1.0" encoding="utf-8"?>
-<p:sld xmlns:a="http://schemas.openxmlformats.org/drawingml/2006/main" xmlns:p="http://schemas.openxmlformats.org/presentationml/2006/main" xmlns:r="http://schemas.openxmlformats.org/officeDocument/2006/relationships">
+<p:sld xmlns:a="http://schemas.openxmlformats.org/drawingml/2006/main" xmlns:r="http://schemas.openxmlformats.org/officeDocument/2006/relationships" xmlns:p="http://schemas.openxmlformats.org/presentationml/2006/main">
   <p:cSld>
     <p:spTree>
       <p:nvGrpSpPr>
@@ -13530,7 +14123,14 @@
         <p:cNvGrpSpPr/>
         <p:nvPr/>
       </p:nvGrpSpPr>
-      <p:grpSpPr/>
+      <p:grpSpPr>
+        <a:xfrm>
+          <a:off x="0" y="0"/>
+          <a:ext cx="0" cy="0"/>
+          <a:chOff x="0" y="0"/>
+          <a:chExt cx="0" cy="0"/>
+        </a:xfrm>
+      </p:grpSpPr>
       <p:sp>
         <p:nvSpPr>
           <p:cNvPr id="2" name="Rectangle 1"/>
@@ -13572,6 +14172,7 @@
           <a:lstStyle/>
           <a:p>
             <a:pPr algn="ctr"/>
+            <a:endParaRPr/>
           </a:p>
         </p:txBody>
       </p:sp>
@@ -13738,7 +14339,7 @@
 </file>
 
 <file path=ppt/slides/slide39.xml><?xml version="1.0" encoding="utf-8"?>
-<p:sld xmlns:a="http://schemas.openxmlformats.org/drawingml/2006/main" xmlns:p="http://schemas.openxmlformats.org/presentationml/2006/main" xmlns:r="http://schemas.openxmlformats.org/officeDocument/2006/relationships">
+<p:sld xmlns:a="http://schemas.openxmlformats.org/drawingml/2006/main" xmlns:r="http://schemas.openxmlformats.org/officeDocument/2006/relationships" xmlns:p="http://schemas.openxmlformats.org/presentationml/2006/main">
   <p:cSld>
     <p:spTree>
       <p:nvGrpSpPr>
@@ -13746,7 +14347,14 @@
         <p:cNvGrpSpPr/>
         <p:nvPr/>
       </p:nvGrpSpPr>
-      <p:grpSpPr/>
+      <p:grpSpPr>
+        <a:xfrm>
+          <a:off x="0" y="0"/>
+          <a:ext cx="0" cy="0"/>
+          <a:chOff x="0" y="0"/>
+          <a:chExt cx="0" cy="0"/>
+        </a:xfrm>
+      </p:grpSpPr>
       <p:sp>
         <p:nvSpPr>
           <p:cNvPr id="2" name="Rectangle 1"/>
@@ -13788,6 +14396,7 @@
           <a:lstStyle/>
           <a:p>
             <a:pPr algn="ctr"/>
+            <a:endParaRPr/>
           </a:p>
         </p:txBody>
       </p:sp>
@@ -13938,7 +14547,7 @@
 </file>
 
 <file path=ppt/slides/slide4.xml><?xml version="1.0" encoding="utf-8"?>
-<p:sld xmlns:a="http://schemas.openxmlformats.org/drawingml/2006/main" xmlns:p="http://schemas.openxmlformats.org/presentationml/2006/main" xmlns:r="http://schemas.openxmlformats.org/officeDocument/2006/relationships">
+<p:sld xmlns:a="http://schemas.openxmlformats.org/drawingml/2006/main" xmlns:r="http://schemas.openxmlformats.org/officeDocument/2006/relationships" xmlns:p="http://schemas.openxmlformats.org/presentationml/2006/main">
   <p:cSld>
     <p:spTree>
       <p:nvGrpSpPr>
@@ -13946,7 +14555,14 @@
         <p:cNvGrpSpPr/>
         <p:nvPr/>
       </p:nvGrpSpPr>
-      <p:grpSpPr/>
+      <p:grpSpPr>
+        <a:xfrm>
+          <a:off x="0" y="0"/>
+          <a:ext cx="0" cy="0"/>
+          <a:chOff x="0" y="0"/>
+          <a:chExt cx="0" cy="0"/>
+        </a:xfrm>
+      </p:grpSpPr>
       <p:sp>
         <p:nvSpPr>
           <p:cNvPr id="2" name="Rectangle 1"/>
@@ -13988,6 +14604,7 @@
           <a:lstStyle/>
           <a:p>
             <a:pPr algn="ctr"/>
+            <a:endParaRPr/>
           </a:p>
         </p:txBody>
       </p:sp>
@@ -14036,7 +14653,7 @@
         </p:nvGraphicFramePr>
         <p:xfrm>
           <a:off x="548640" y="1371600"/>
-          <a:ext cx="11064240" cy="2560320"/>
+          <a:ext cx="11064240" cy="2926080"/>
         </p:xfrm>
         <a:graphic>
           <a:graphicData uri="http://schemas.openxmlformats.org/drawingml/2006/table">
@@ -14045,10 +14662,34 @@
                 <a:tableStyleId>{5C22544A-7EE6-4342-B048-85BDC9FD1C3A}</a:tableStyleId>
               </a:tblPr>
               <a:tblGrid>
-                <a:gridCol w="2766060"/>
-                <a:gridCol w="2766060"/>
-                <a:gridCol w="2766060"/>
-                <a:gridCol w="2766060"/>
+                <a:gridCol w="2766060">
+                  <a:extLst>
+                    <a:ext uri="{9D8B030D-6E8A-4147-A177-3AD203B41FA5}">
+                      <a16:colId xmlns:a16="http://schemas.microsoft.com/office/drawing/2014/main" val="20000"/>
+                    </a:ext>
+                  </a:extLst>
+                </a:gridCol>
+                <a:gridCol w="2766060">
+                  <a:extLst>
+                    <a:ext uri="{9D8B030D-6E8A-4147-A177-3AD203B41FA5}">
+                      <a16:colId xmlns:a16="http://schemas.microsoft.com/office/drawing/2014/main" val="20001"/>
+                    </a:ext>
+                  </a:extLst>
+                </a:gridCol>
+                <a:gridCol w="2766060">
+                  <a:extLst>
+                    <a:ext uri="{9D8B030D-6E8A-4147-A177-3AD203B41FA5}">
+                      <a16:colId xmlns:a16="http://schemas.microsoft.com/office/drawing/2014/main" val="20002"/>
+                    </a:ext>
+                  </a:extLst>
+                </a:gridCol>
+                <a:gridCol w="2766060">
+                  <a:extLst>
+                    <a:ext uri="{9D8B030D-6E8A-4147-A177-3AD203B41FA5}">
+                      <a16:colId xmlns:a16="http://schemas.microsoft.com/office/drawing/2014/main" val="20003"/>
+                    </a:ext>
+                  </a:extLst>
+                </a:gridCol>
               </a:tblGrid>
               <a:tr h="365760">
                 <a:tc>
@@ -14135,6 +14776,11 @@
                     </a:solidFill>
                   </a:tcPr>
                 </a:tc>
+                <a:extLst>
+                  <a:ext uri="{0D108BD9-81ED-4DB2-BD59-A6C34878D82A}">
+                    <a16:rowId xmlns:a16="http://schemas.microsoft.com/office/drawing/2014/main" val="10000"/>
+                  </a:ext>
+                </a:extLst>
               </a:tr>
               <a:tr h="365760">
                 <a:tc>
@@ -14221,6 +14867,11 @@
                     </a:solidFill>
                   </a:tcPr>
                 </a:tc>
+                <a:extLst>
+                  <a:ext uri="{0D108BD9-81ED-4DB2-BD59-A6C34878D82A}">
+                    <a16:rowId xmlns:a16="http://schemas.microsoft.com/office/drawing/2014/main" val="10001"/>
+                  </a:ext>
+                </a:extLst>
               </a:tr>
               <a:tr h="365760">
                 <a:tc>
@@ -14307,6 +14958,11 @@
                     </a:solidFill>
                   </a:tcPr>
                 </a:tc>
+                <a:extLst>
+                  <a:ext uri="{0D108BD9-81ED-4DB2-BD59-A6C34878D82A}">
+                    <a16:rowId xmlns:a16="http://schemas.microsoft.com/office/drawing/2014/main" val="10002"/>
+                  </a:ext>
+                </a:extLst>
               </a:tr>
               <a:tr h="365760">
                 <a:tc>
@@ -14393,6 +15049,11 @@
                     </a:solidFill>
                   </a:tcPr>
                 </a:tc>
+                <a:extLst>
+                  <a:ext uri="{0D108BD9-81ED-4DB2-BD59-A6C34878D82A}">
+                    <a16:rowId xmlns:a16="http://schemas.microsoft.com/office/drawing/2014/main" val="10003"/>
+                  </a:ext>
+                </a:extLst>
               </a:tr>
               <a:tr h="365760">
                 <a:tc>
@@ -14479,6 +15140,11 @@
                     </a:solidFill>
                   </a:tcPr>
                 </a:tc>
+                <a:extLst>
+                  <a:ext uri="{0D108BD9-81ED-4DB2-BD59-A6C34878D82A}">
+                    <a16:rowId xmlns:a16="http://schemas.microsoft.com/office/drawing/2014/main" val="10004"/>
+                  </a:ext>
+                </a:extLst>
               </a:tr>
               <a:tr h="365760">
                 <a:tc>
@@ -14565,6 +15231,11 @@
                     </a:solidFill>
                   </a:tcPr>
                 </a:tc>
+                <a:extLst>
+                  <a:ext uri="{0D108BD9-81ED-4DB2-BD59-A6C34878D82A}">
+                    <a16:rowId xmlns:a16="http://schemas.microsoft.com/office/drawing/2014/main" val="10005"/>
+                  </a:ext>
+                </a:extLst>
               </a:tr>
               <a:tr h="365760">
                 <a:tc>
@@ -14651,6 +15322,11 @@
                     </a:solidFill>
                   </a:tcPr>
                 </a:tc>
+                <a:extLst>
+                  <a:ext uri="{0D108BD9-81ED-4DB2-BD59-A6C34878D82A}">
+                    <a16:rowId xmlns:a16="http://schemas.microsoft.com/office/drawing/2014/main" val="10006"/>
+                  </a:ext>
+                </a:extLst>
               </a:tr>
             </a:tbl>
           </a:graphicData>
@@ -14665,7 +15341,7 @@
 </file>
 
 <file path=ppt/slides/slide40.xml><?xml version="1.0" encoding="utf-8"?>
-<p:sld xmlns:a="http://schemas.openxmlformats.org/drawingml/2006/main" xmlns:p="http://schemas.openxmlformats.org/presentationml/2006/main" xmlns:r="http://schemas.openxmlformats.org/officeDocument/2006/relationships">
+<p:sld xmlns:a="http://schemas.openxmlformats.org/drawingml/2006/main" xmlns:r="http://schemas.openxmlformats.org/officeDocument/2006/relationships" xmlns:p="http://schemas.openxmlformats.org/presentationml/2006/main">
   <p:cSld>
     <p:spTree>
       <p:nvGrpSpPr>
@@ -14673,7 +15349,14 @@
         <p:cNvGrpSpPr/>
         <p:nvPr/>
       </p:nvGrpSpPr>
-      <p:grpSpPr/>
+      <p:grpSpPr>
+        <a:xfrm>
+          <a:off x="0" y="0"/>
+          <a:ext cx="0" cy="0"/>
+          <a:chOff x="0" y="0"/>
+          <a:chExt cx="0" cy="0"/>
+        </a:xfrm>
+      </p:grpSpPr>
       <p:sp>
         <p:nvSpPr>
           <p:cNvPr id="2" name="Rectangle 1"/>
@@ -14715,6 +15398,7 @@
           <a:lstStyle/>
           <a:p>
             <a:pPr algn="ctr"/>
+            <a:endParaRPr/>
           </a:p>
         </p:txBody>
       </p:sp>
@@ -14762,7 +15446,7 @@
 </file>
 
 <file path=ppt/slides/slide41.xml><?xml version="1.0" encoding="utf-8"?>
-<p:sld xmlns:a="http://schemas.openxmlformats.org/drawingml/2006/main" xmlns:p="http://schemas.openxmlformats.org/presentationml/2006/main" xmlns:r="http://schemas.openxmlformats.org/officeDocument/2006/relationships">
+<p:sld xmlns:a="http://schemas.openxmlformats.org/drawingml/2006/main" xmlns:r="http://schemas.openxmlformats.org/officeDocument/2006/relationships" xmlns:p="http://schemas.openxmlformats.org/presentationml/2006/main">
   <p:cSld>
     <p:spTree>
       <p:nvGrpSpPr>
@@ -14770,7 +15454,14 @@
         <p:cNvGrpSpPr/>
         <p:nvPr/>
       </p:nvGrpSpPr>
-      <p:grpSpPr/>
+      <p:grpSpPr>
+        <a:xfrm>
+          <a:off x="0" y="0"/>
+          <a:ext cx="0" cy="0"/>
+          <a:chOff x="0" y="0"/>
+          <a:chExt cx="0" cy="0"/>
+        </a:xfrm>
+      </p:grpSpPr>
       <p:sp>
         <p:nvSpPr>
           <p:cNvPr id="2" name="Rectangle 1"/>
@@ -14812,6 +15503,7 @@
           <a:lstStyle/>
           <a:p>
             <a:pPr algn="ctr"/>
+            <a:endParaRPr/>
           </a:p>
         </p:txBody>
       </p:sp>
@@ -14869,9 +15561,27 @@
                 <a:tableStyleId>{5C22544A-7EE6-4342-B048-85BDC9FD1C3A}</a:tableStyleId>
               </a:tblPr>
               <a:tblGrid>
-                <a:gridCol w="3688080"/>
-                <a:gridCol w="3688080"/>
-                <a:gridCol w="3688080"/>
+                <a:gridCol w="3688080">
+                  <a:extLst>
+                    <a:ext uri="{9D8B030D-6E8A-4147-A177-3AD203B41FA5}">
+                      <a16:colId xmlns:a16="http://schemas.microsoft.com/office/drawing/2014/main" val="20000"/>
+                    </a:ext>
+                  </a:extLst>
+                </a:gridCol>
+                <a:gridCol w="3688080">
+                  <a:extLst>
+                    <a:ext uri="{9D8B030D-6E8A-4147-A177-3AD203B41FA5}">
+                      <a16:colId xmlns:a16="http://schemas.microsoft.com/office/drawing/2014/main" val="20001"/>
+                    </a:ext>
+                  </a:extLst>
+                </a:gridCol>
+                <a:gridCol w="3688080">
+                  <a:extLst>
+                    <a:ext uri="{9D8B030D-6E8A-4147-A177-3AD203B41FA5}">
+                      <a16:colId xmlns:a16="http://schemas.microsoft.com/office/drawing/2014/main" val="20002"/>
+                    </a:ext>
+                  </a:extLst>
+                </a:gridCol>
               </a:tblGrid>
               <a:tr h="365760">
                 <a:tc>
@@ -14937,6 +15647,11 @@
                     </a:solidFill>
                   </a:tcPr>
                 </a:tc>
+                <a:extLst>
+                  <a:ext uri="{0D108BD9-81ED-4DB2-BD59-A6C34878D82A}">
+                    <a16:rowId xmlns:a16="http://schemas.microsoft.com/office/drawing/2014/main" val="10000"/>
+                  </a:ext>
+                </a:extLst>
               </a:tr>
               <a:tr h="365760">
                 <a:tc>
@@ -15002,6 +15717,11 @@
                     </a:solidFill>
                   </a:tcPr>
                 </a:tc>
+                <a:extLst>
+                  <a:ext uri="{0D108BD9-81ED-4DB2-BD59-A6C34878D82A}">
+                    <a16:rowId xmlns:a16="http://schemas.microsoft.com/office/drawing/2014/main" val="10001"/>
+                  </a:ext>
+                </a:extLst>
               </a:tr>
               <a:tr h="365760">
                 <a:tc>
@@ -15067,6 +15787,11 @@
                     </a:solidFill>
                   </a:tcPr>
                 </a:tc>
+                <a:extLst>
+                  <a:ext uri="{0D108BD9-81ED-4DB2-BD59-A6C34878D82A}">
+                    <a16:rowId xmlns:a16="http://schemas.microsoft.com/office/drawing/2014/main" val="10002"/>
+                  </a:ext>
+                </a:extLst>
               </a:tr>
               <a:tr h="365760">
                 <a:tc>
@@ -15132,6 +15857,11 @@
                     </a:solidFill>
                   </a:tcPr>
                 </a:tc>
+                <a:extLst>
+                  <a:ext uri="{0D108BD9-81ED-4DB2-BD59-A6C34878D82A}">
+                    <a16:rowId xmlns:a16="http://schemas.microsoft.com/office/drawing/2014/main" val="10003"/>
+                  </a:ext>
+                </a:extLst>
               </a:tr>
               <a:tr h="365760">
                 <a:tc>
@@ -15197,6 +15927,11 @@
                     </a:solidFill>
                   </a:tcPr>
                 </a:tc>
+                <a:extLst>
+                  <a:ext uri="{0D108BD9-81ED-4DB2-BD59-A6C34878D82A}">
+                    <a16:rowId xmlns:a16="http://schemas.microsoft.com/office/drawing/2014/main" val="10004"/>
+                  </a:ext>
+                </a:extLst>
               </a:tr>
               <a:tr h="365760">
                 <a:tc>
@@ -15262,6 +15997,11 @@
                     </a:solidFill>
                   </a:tcPr>
                 </a:tc>
+                <a:extLst>
+                  <a:ext uri="{0D108BD9-81ED-4DB2-BD59-A6C34878D82A}">
+                    <a16:rowId xmlns:a16="http://schemas.microsoft.com/office/drawing/2014/main" val="10005"/>
+                  </a:ext>
+                </a:extLst>
               </a:tr>
               <a:tr h="365760">
                 <a:tc>
@@ -15327,6 +16067,11 @@
                     </a:solidFill>
                   </a:tcPr>
                 </a:tc>
+                <a:extLst>
+                  <a:ext uri="{0D108BD9-81ED-4DB2-BD59-A6C34878D82A}">
+                    <a16:rowId xmlns:a16="http://schemas.microsoft.com/office/drawing/2014/main" val="10006"/>
+                  </a:ext>
+                </a:extLst>
               </a:tr>
               <a:tr h="365760">
                 <a:tc>
@@ -15392,6 +16137,11 @@
                     </a:solidFill>
                   </a:tcPr>
                 </a:tc>
+                <a:extLst>
+                  <a:ext uri="{0D108BD9-81ED-4DB2-BD59-A6C34878D82A}">
+                    <a16:rowId xmlns:a16="http://schemas.microsoft.com/office/drawing/2014/main" val="10007"/>
+                  </a:ext>
+                </a:extLst>
               </a:tr>
             </a:tbl>
           </a:graphicData>
@@ -15406,7 +16156,7 @@
 </file>
 
 <file path=ppt/slides/slide42.xml><?xml version="1.0" encoding="utf-8"?>
-<p:sld xmlns:a="http://schemas.openxmlformats.org/drawingml/2006/main" xmlns:p="http://schemas.openxmlformats.org/presentationml/2006/main" xmlns:r="http://schemas.openxmlformats.org/officeDocument/2006/relationships">
+<p:sld xmlns:a="http://schemas.openxmlformats.org/drawingml/2006/main" xmlns:r="http://schemas.openxmlformats.org/officeDocument/2006/relationships" xmlns:p="http://schemas.openxmlformats.org/presentationml/2006/main">
   <p:cSld>
     <p:spTree>
       <p:nvGrpSpPr>
@@ -15414,7 +16164,14 @@
         <p:cNvGrpSpPr/>
         <p:nvPr/>
       </p:nvGrpSpPr>
-      <p:grpSpPr/>
+      <p:grpSpPr>
+        <a:xfrm>
+          <a:off x="0" y="0"/>
+          <a:ext cx="0" cy="0"/>
+          <a:chOff x="0" y="0"/>
+          <a:chExt cx="0" cy="0"/>
+        </a:xfrm>
+      </p:grpSpPr>
       <p:sp>
         <p:nvSpPr>
           <p:cNvPr id="2" name="Rectangle 1"/>
@@ -15456,6 +16213,7 @@
           <a:lstStyle/>
           <a:p>
             <a:pPr algn="ctr"/>
+            <a:endParaRPr/>
           </a:p>
         </p:txBody>
       </p:sp>
@@ -15532,7 +16290,7 @@
             </a:r>
           </a:p>
           <a:p>
-            <a:pPr algn="l" lvl="1">
+            <a:pPr lvl="1" algn="l">
               <a:spcAft>
                 <a:spcPts val="800"/>
               </a:spcAft>
@@ -15564,7 +16322,7 @@
             </a:r>
           </a:p>
           <a:p>
-            <a:pPr algn="l" lvl="1">
+            <a:pPr lvl="1" algn="l">
               <a:spcAft>
                 <a:spcPts val="800"/>
               </a:spcAft>
@@ -15596,7 +16354,7 @@
             </a:r>
           </a:p>
           <a:p>
-            <a:pPr algn="l" lvl="1">
+            <a:pPr lvl="1" algn="l">
               <a:spcAft>
                 <a:spcPts val="800"/>
               </a:spcAft>
@@ -15622,7 +16380,7 @@
 </file>
 
 <file path=ppt/slides/slide5.xml><?xml version="1.0" encoding="utf-8"?>
-<p:sld xmlns:a="http://schemas.openxmlformats.org/drawingml/2006/main" xmlns:p="http://schemas.openxmlformats.org/presentationml/2006/main" xmlns:r="http://schemas.openxmlformats.org/officeDocument/2006/relationships">
+<p:sld xmlns:a="http://schemas.openxmlformats.org/drawingml/2006/main" xmlns:r="http://schemas.openxmlformats.org/officeDocument/2006/relationships" xmlns:p="http://schemas.openxmlformats.org/presentationml/2006/main">
   <p:cSld>
     <p:spTree>
       <p:nvGrpSpPr>
@@ -15630,7 +16388,14 @@
         <p:cNvGrpSpPr/>
         <p:nvPr/>
       </p:nvGrpSpPr>
-      <p:grpSpPr/>
+      <p:grpSpPr>
+        <a:xfrm>
+          <a:off x="0" y="0"/>
+          <a:ext cx="0" cy="0"/>
+          <a:chOff x="0" y="0"/>
+          <a:chExt cx="0" cy="0"/>
+        </a:xfrm>
+      </p:grpSpPr>
       <p:sp>
         <p:nvSpPr>
           <p:cNvPr id="2" name="Rectangle 1"/>
@@ -15672,6 +16437,7 @@
           <a:lstStyle/>
           <a:p>
             <a:pPr algn="ctr"/>
+            <a:endParaRPr/>
           </a:p>
         </p:txBody>
       </p:sp>
@@ -15838,7 +16604,7 @@
 </file>
 
 <file path=ppt/slides/slide6.xml><?xml version="1.0" encoding="utf-8"?>
-<p:sld xmlns:a="http://schemas.openxmlformats.org/drawingml/2006/main" xmlns:p="http://schemas.openxmlformats.org/presentationml/2006/main" xmlns:r="http://schemas.openxmlformats.org/officeDocument/2006/relationships">
+<p:sld xmlns:a="http://schemas.openxmlformats.org/drawingml/2006/main" xmlns:r="http://schemas.openxmlformats.org/officeDocument/2006/relationships" xmlns:p="http://schemas.openxmlformats.org/presentationml/2006/main">
   <p:cSld>
     <p:spTree>
       <p:nvGrpSpPr>
@@ -15846,7 +16612,14 @@
         <p:cNvGrpSpPr/>
         <p:nvPr/>
       </p:nvGrpSpPr>
-      <p:grpSpPr/>
+      <p:grpSpPr>
+        <a:xfrm>
+          <a:off x="0" y="0"/>
+          <a:ext cx="0" cy="0"/>
+          <a:chOff x="0" y="0"/>
+          <a:chExt cx="0" cy="0"/>
+        </a:xfrm>
+      </p:grpSpPr>
       <p:sp>
         <p:nvSpPr>
           <p:cNvPr id="2" name="Rectangle 1"/>
@@ -15888,6 +16661,7 @@
           <a:lstStyle/>
           <a:p>
             <a:pPr algn="ctr"/>
+            <a:endParaRPr/>
           </a:p>
         </p:txBody>
       </p:sp>
@@ -15970,7 +16744,7 @@
 </file>
 
 <file path=ppt/slides/slide7.xml><?xml version="1.0" encoding="utf-8"?>
-<p:sld xmlns:a="http://schemas.openxmlformats.org/drawingml/2006/main" xmlns:p="http://schemas.openxmlformats.org/presentationml/2006/main" xmlns:r="http://schemas.openxmlformats.org/officeDocument/2006/relationships">
+<p:sld xmlns:a="http://schemas.openxmlformats.org/drawingml/2006/main" xmlns:r="http://schemas.openxmlformats.org/officeDocument/2006/relationships" xmlns:p="http://schemas.openxmlformats.org/presentationml/2006/main">
   <p:cSld>
     <p:spTree>
       <p:nvGrpSpPr>
@@ -15978,7 +16752,14 @@
         <p:cNvGrpSpPr/>
         <p:nvPr/>
       </p:nvGrpSpPr>
-      <p:grpSpPr/>
+      <p:grpSpPr>
+        <a:xfrm>
+          <a:off x="0" y="0"/>
+          <a:ext cx="0" cy="0"/>
+          <a:chOff x="0" y="0"/>
+          <a:chExt cx="0" cy="0"/>
+        </a:xfrm>
+      </p:grpSpPr>
       <p:sp>
         <p:nvSpPr>
           <p:cNvPr id="2" name="Rectangle 1"/>
@@ -16020,6 +16801,7 @@
           <a:lstStyle/>
           <a:p>
             <a:pPr algn="ctr"/>
+            <a:endParaRPr/>
           </a:p>
         </p:txBody>
       </p:sp>
@@ -16067,7 +16849,7 @@
         <p:spPr>
           <a:xfrm>
             <a:off x="640080" y="1371600"/>
-            <a:ext cx="10972800" cy="5120640"/>
+            <a:ext cx="10972800" cy="2267287"/>
           </a:xfrm>
           <a:prstGeom prst="rect">
             <a:avLst/>
@@ -16086,13 +16868,31 @@
               </a:spcAft>
             </a:pPr>
             <a:r>
-              <a:rPr sz="1800" b="0">
+              <a:rPr sz="1800" b="0" dirty="0">
                 <a:solidFill>
                   <a:srgbClr val="1A1A1A"/>
                 </a:solidFill>
                 <a:latin typeface="Calibri"/>
               </a:rPr>
-              <a:t>• Vissim renumbers everything when it imports a network - old IDs are worthless</a:t>
+              <a:t>• </a:t>
+            </a:r>
+            <a:r>
+              <a:rPr sz="1800" b="0" dirty="0" err="1">
+                <a:solidFill>
+                  <a:srgbClr val="1A1A1A"/>
+                </a:solidFill>
+                <a:latin typeface="Calibri"/>
+              </a:rPr>
+              <a:t>Vissim</a:t>
+            </a:r>
+            <a:r>
+              <a:rPr sz="1800" b="0" dirty="0">
+                <a:solidFill>
+                  <a:srgbClr val="1A1A1A"/>
+                </a:solidFill>
+                <a:latin typeface="Calibri"/>
+              </a:rPr>
+              <a:t> renumbers everything when it imports a network</a:t>
             </a:r>
           </a:p>
           <a:p>
@@ -16102,7 +16902,7 @@
               </a:spcAft>
             </a:pPr>
             <a:r>
-              <a:rPr sz="1800" b="0">
+              <a:rPr sz="1800" b="0" dirty="0">
                 <a:solidFill>
                   <a:srgbClr val="1A1A1A"/>
                 </a:solidFill>
@@ -16118,7 +16918,7 @@
               </a:spcAft>
             </a:pPr>
             <a:r>
-              <a:rPr sz="1800" b="0">
+              <a:rPr sz="1800" b="0" dirty="0">
                 <a:solidFill>
                   <a:srgbClr val="1A1A1A"/>
                 </a:solidFill>
@@ -16134,7 +16934,7 @@
               </a:spcAft>
             </a:pPr>
             <a:r>
-              <a:rPr sz="1800" b="0">
+              <a:rPr sz="1800" b="0" dirty="0">
                 <a:solidFill>
                   <a:srgbClr val="1A1A1A"/>
                 </a:solidFill>
@@ -16150,7 +16950,7 @@
               </a:spcAft>
             </a:pPr>
             <a:r>
-              <a:rPr sz="1800" b="0">
+              <a:rPr sz="1800" b="0" dirty="0">
                 <a:solidFill>
                   <a:srgbClr val="1A1A1A"/>
                 </a:solidFill>
@@ -16166,13 +16966,31 @@
               </a:spcAft>
             </a:pPr>
             <a:r>
-              <a:rPr sz="1800" b="0">
+              <a:rPr sz="1800" b="0" dirty="0">
                 <a:solidFill>
                   <a:srgbClr val="1A1A1A"/>
                 </a:solidFill>
                 <a:latin typeface="Calibri"/>
               </a:rPr>
-              <a:t>• A network from RoadRunner, CARLA or a survey firm has no such names</a:t>
+              <a:t>• A network from </a:t>
+            </a:r>
+            <a:r>
+              <a:rPr sz="1800" b="0" dirty="0" err="1">
+                <a:solidFill>
+                  <a:srgbClr val="1A1A1A"/>
+                </a:solidFill>
+                <a:latin typeface="Calibri"/>
+              </a:rPr>
+              <a:t>RoadRunner</a:t>
+            </a:r>
+            <a:r>
+              <a:rPr sz="1800" b="0" dirty="0">
+                <a:solidFill>
+                  <a:srgbClr val="1A1A1A"/>
+                </a:solidFill>
+                <a:latin typeface="Calibri"/>
+              </a:rPr>
+              <a:t>, CARLA or a survey firm has no such names</a:t>
             </a:r>
           </a:p>
         </p:txBody>
@@ -16186,7 +17004,7 @@
 </file>
 
 <file path=ppt/slides/slide8.xml><?xml version="1.0" encoding="utf-8"?>
-<p:sld xmlns:a="http://schemas.openxmlformats.org/drawingml/2006/main" xmlns:p="http://schemas.openxmlformats.org/presentationml/2006/main" xmlns:r="http://schemas.openxmlformats.org/officeDocument/2006/relationships">
+<p:sld xmlns:a="http://schemas.openxmlformats.org/drawingml/2006/main" xmlns:r="http://schemas.openxmlformats.org/officeDocument/2006/relationships" xmlns:p="http://schemas.openxmlformats.org/presentationml/2006/main">
   <p:cSld>
     <p:spTree>
       <p:nvGrpSpPr>
@@ -16194,7 +17012,14 @@
         <p:cNvGrpSpPr/>
         <p:nvPr/>
       </p:nvGrpSpPr>
-      <p:grpSpPr/>
+      <p:grpSpPr>
+        <a:xfrm>
+          <a:off x="0" y="0"/>
+          <a:ext cx="0" cy="0"/>
+          <a:chOff x="0" y="0"/>
+          <a:chExt cx="0" cy="0"/>
+        </a:xfrm>
+      </p:grpSpPr>
       <p:sp>
         <p:nvSpPr>
           <p:cNvPr id="2" name="Rectangle 1"/>
@@ -16236,6 +17061,7 @@
           <a:lstStyle/>
           <a:p>
             <a:pPr algn="ctr"/>
+            <a:endParaRPr/>
           </a:p>
         </p:txBody>
       </p:sp>
@@ -16302,13 +17128,49 @@
               </a:spcAft>
             </a:pPr>
             <a:r>
-              <a:rPr sz="1800" b="0">
+              <a:rPr sz="1800" b="0" dirty="0">
                 <a:solidFill>
                   <a:srgbClr val="1A1A1A"/>
                 </a:solidFill>
                 <a:latin typeface="Calibri"/>
               </a:rPr>
-              <a:t>• OpenDRIVE is the standard format the network is handed to Vissim in</a:t>
+              <a:t>• </a:t>
+            </a:r>
+            <a:r>
+              <a:rPr sz="1800" b="0" dirty="0" err="1">
+                <a:solidFill>
+                  <a:srgbClr val="1A1A1A"/>
+                </a:solidFill>
+                <a:latin typeface="Calibri"/>
+              </a:rPr>
+              <a:t>OpenDRIVE</a:t>
+            </a:r>
+            <a:r>
+              <a:rPr sz="1800" b="0" dirty="0">
+                <a:solidFill>
+                  <a:srgbClr val="1A1A1A"/>
+                </a:solidFill>
+                <a:latin typeface="Calibri"/>
+              </a:rPr>
+              <a:t> is the standard format the network is handed to </a:t>
+            </a:r>
+            <a:r>
+              <a:rPr sz="1800" b="0" dirty="0" err="1">
+                <a:solidFill>
+                  <a:srgbClr val="1A1A1A"/>
+                </a:solidFill>
+                <a:latin typeface="Calibri"/>
+              </a:rPr>
+              <a:t>Vissim</a:t>
+            </a:r>
+            <a:r>
+              <a:rPr sz="1800" b="0" dirty="0">
+                <a:solidFill>
+                  <a:srgbClr val="1A1A1A"/>
+                </a:solidFill>
+                <a:latin typeface="Calibri"/>
+              </a:rPr>
+              <a:t> in</a:t>
             </a:r>
           </a:p>
           <a:p>
@@ -16318,7 +17180,7 @@
               </a:spcAft>
             </a:pPr>
             <a:r>
-              <a:rPr sz="1800" b="0">
+              <a:rPr sz="1800" b="0" dirty="0">
                 <a:solidFill>
                   <a:srgbClr val="1A1A1A"/>
                 </a:solidFill>
@@ -16334,7 +17196,7 @@
               </a:spcAft>
             </a:pPr>
             <a:r>
-              <a:rPr sz="1800" b="0">
+              <a:rPr sz="1800" b="0" dirty="0">
                 <a:solidFill>
                   <a:srgbClr val="1A1A1A"/>
                 </a:solidFill>
@@ -16350,7 +17212,7 @@
               </a:spcAft>
             </a:pPr>
             <a:r>
-              <a:rPr sz="1800" b="0">
+              <a:rPr sz="1800" b="0" dirty="0">
                 <a:solidFill>
                   <a:srgbClr val="1A1A1A"/>
                 </a:solidFill>
@@ -16366,13 +17228,31 @@
               </a:spcAft>
             </a:pPr>
             <a:r>
-              <a:rPr sz="1800" b="0">
+              <a:rPr sz="1800" b="0" dirty="0">
                 <a:solidFill>
                   <a:srgbClr val="1A1A1A"/>
                 </a:solidFill>
                 <a:latin typeface="Calibri"/>
               </a:rPr>
-              <a:t>• Vissim names each imported link after the road it came from, e.g. '473-0-Right'</a:t>
+              <a:t>• </a:t>
+            </a:r>
+            <a:r>
+              <a:rPr sz="1800" b="0" dirty="0" err="1">
+                <a:solidFill>
+                  <a:srgbClr val="1A1A1A"/>
+                </a:solidFill>
+                <a:latin typeface="Calibri"/>
+              </a:rPr>
+              <a:t>Vissim</a:t>
+            </a:r>
+            <a:r>
+              <a:rPr sz="1800" b="0" dirty="0">
+                <a:solidFill>
+                  <a:srgbClr val="1A1A1A"/>
+                </a:solidFill>
+                <a:latin typeface="Calibri"/>
+              </a:rPr>
+              <a:t> names each imported link after the road it came from, e.g. '473-0-Right'</a:t>
             </a:r>
           </a:p>
           <a:p>
@@ -16382,7 +17262,7 @@
               </a:spcAft>
             </a:pPr>
             <a:r>
-              <a:rPr sz="1800" b="0">
+              <a:rPr sz="1800" b="0" dirty="0">
                 <a:solidFill>
                   <a:srgbClr val="1A1A1A"/>
                 </a:solidFill>
@@ -16402,7 +17282,7 @@
 </file>
 
 <file path=ppt/slides/slide9.xml><?xml version="1.0" encoding="utf-8"?>
-<p:sld xmlns:a="http://schemas.openxmlformats.org/drawingml/2006/main" xmlns:p="http://schemas.openxmlformats.org/presentationml/2006/main" xmlns:r="http://schemas.openxmlformats.org/officeDocument/2006/relationships">
+<p:sld xmlns:a="http://schemas.openxmlformats.org/drawingml/2006/main" xmlns:r="http://schemas.openxmlformats.org/officeDocument/2006/relationships" xmlns:p="http://schemas.openxmlformats.org/presentationml/2006/main">
   <p:cSld>
     <p:spTree>
       <p:nvGrpSpPr>
@@ -16410,7 +17290,14 @@
         <p:cNvGrpSpPr/>
         <p:nvPr/>
       </p:nvGrpSpPr>
-      <p:grpSpPr/>
+      <p:grpSpPr>
+        <a:xfrm>
+          <a:off x="0" y="0"/>
+          <a:ext cx="0" cy="0"/>
+          <a:chOff x="0" y="0"/>
+          <a:chExt cx="0" cy="0"/>
+        </a:xfrm>
+      </p:grpSpPr>
       <p:sp>
         <p:nvSpPr>
           <p:cNvPr id="2" name="Rectangle 1"/>
@@ -16452,6 +17339,7 @@
           <a:lstStyle/>
           <a:p>
             <a:pPr algn="ctr"/>
+            <a:endParaRPr/>
           </a:p>
         </p:txBody>
       </p:sp>
@@ -16509,9 +17397,27 @@
                 <a:tableStyleId>{5C22544A-7EE6-4342-B048-85BDC9FD1C3A}</a:tableStyleId>
               </a:tblPr>
               <a:tblGrid>
-                <a:gridCol w="3688080"/>
-                <a:gridCol w="3688080"/>
-                <a:gridCol w="3688080"/>
+                <a:gridCol w="3688080">
+                  <a:extLst>
+                    <a:ext uri="{9D8B030D-6E8A-4147-A177-3AD203B41FA5}">
+                      <a16:colId xmlns:a16="http://schemas.microsoft.com/office/drawing/2014/main" val="20000"/>
+                    </a:ext>
+                  </a:extLst>
+                </a:gridCol>
+                <a:gridCol w="3688080">
+                  <a:extLst>
+                    <a:ext uri="{9D8B030D-6E8A-4147-A177-3AD203B41FA5}">
+                      <a16:colId xmlns:a16="http://schemas.microsoft.com/office/drawing/2014/main" val="20001"/>
+                    </a:ext>
+                  </a:extLst>
+                </a:gridCol>
+                <a:gridCol w="3688080">
+                  <a:extLst>
+                    <a:ext uri="{9D8B030D-6E8A-4147-A177-3AD203B41FA5}">
+                      <a16:colId xmlns:a16="http://schemas.microsoft.com/office/drawing/2014/main" val="20002"/>
+                    </a:ext>
+                  </a:extLst>
+                </a:gridCol>
               </a:tblGrid>
               <a:tr h="365760">
                 <a:tc>
@@ -16577,6 +17483,11 @@
                     </a:solidFill>
                   </a:tcPr>
                 </a:tc>
+                <a:extLst>
+                  <a:ext uri="{0D108BD9-81ED-4DB2-BD59-A6C34878D82A}">
+                    <a16:rowId xmlns:a16="http://schemas.microsoft.com/office/drawing/2014/main" val="10000"/>
+                  </a:ext>
+                </a:extLst>
               </a:tr>
               <a:tr h="365760">
                 <a:tc>
@@ -16642,6 +17553,11 @@
                     </a:solidFill>
                   </a:tcPr>
                 </a:tc>
+                <a:extLst>
+                  <a:ext uri="{0D108BD9-81ED-4DB2-BD59-A6C34878D82A}">
+                    <a16:rowId xmlns:a16="http://schemas.microsoft.com/office/drawing/2014/main" val="10001"/>
+                  </a:ext>
+                </a:extLst>
               </a:tr>
               <a:tr h="365760">
                 <a:tc>
@@ -16707,6 +17623,11 @@
                     </a:solidFill>
                   </a:tcPr>
                 </a:tc>
+                <a:extLst>
+                  <a:ext uri="{0D108BD9-81ED-4DB2-BD59-A6C34878D82A}">
+                    <a16:rowId xmlns:a16="http://schemas.microsoft.com/office/drawing/2014/main" val="10002"/>
+                  </a:ext>
+                </a:extLst>
               </a:tr>
               <a:tr h="365760">
                 <a:tc>
@@ -16772,6 +17693,11 @@
                     </a:solidFill>
                   </a:tcPr>
                 </a:tc>
+                <a:extLst>
+                  <a:ext uri="{0D108BD9-81ED-4DB2-BD59-A6C34878D82A}">
+                    <a16:rowId xmlns:a16="http://schemas.microsoft.com/office/drawing/2014/main" val="10003"/>
+                  </a:ext>
+                </a:extLst>
               </a:tr>
               <a:tr h="365760">
                 <a:tc>
@@ -16837,6 +17763,11 @@
                     </a:solidFill>
                   </a:tcPr>
                 </a:tc>
+                <a:extLst>
+                  <a:ext uri="{0D108BD9-81ED-4DB2-BD59-A6C34878D82A}">
+                    <a16:rowId xmlns:a16="http://schemas.microsoft.com/office/drawing/2014/main" val="10004"/>
+                  </a:ext>
+                </a:extLst>
               </a:tr>
               <a:tr h="365760">
                 <a:tc>
@@ -16902,6 +17833,11 @@
                     </a:solidFill>
                   </a:tcPr>
                 </a:tc>
+                <a:extLst>
+                  <a:ext uri="{0D108BD9-81ED-4DB2-BD59-A6C34878D82A}">
+                    <a16:rowId xmlns:a16="http://schemas.microsoft.com/office/drawing/2014/main" val="10005"/>
+                  </a:ext>
+                </a:extLst>
               </a:tr>
             </a:tbl>
           </a:graphicData>
@@ -17246,44 +18182,44 @@
         <a:sysClr val="window" lastClr="FFFFFF"/>
       </a:lt1>
       <a:dk2>
-        <a:srgbClr val="1F497D"/>
+        <a:srgbClr val="0E2841"/>
       </a:dk2>
       <a:lt2>
-        <a:srgbClr val="EEECE1"/>
+        <a:srgbClr val="E8E8E8"/>
       </a:lt2>
       <a:accent1>
-        <a:srgbClr val="4F81BD"/>
+        <a:srgbClr val="156082"/>
       </a:accent1>
       <a:accent2>
-        <a:srgbClr val="C0504D"/>
+        <a:srgbClr val="E97132"/>
       </a:accent2>
       <a:accent3>
-        <a:srgbClr val="9BBB59"/>
+        <a:srgbClr val="196B24"/>
       </a:accent3>
       <a:accent4>
-        <a:srgbClr val="8064A2"/>
+        <a:srgbClr val="0F9ED5"/>
       </a:accent4>
       <a:accent5>
-        <a:srgbClr val="4BACC6"/>
+        <a:srgbClr val="A02B93"/>
       </a:accent5>
       <a:accent6>
-        <a:srgbClr val="F79646"/>
+        <a:srgbClr val="4EA72E"/>
       </a:accent6>
       <a:hlink>
-        <a:srgbClr val="0000FF"/>
+        <a:srgbClr val="467886"/>
       </a:hlink>
       <a:folHlink>
-        <a:srgbClr val="800080"/>
+        <a:srgbClr val="96607D"/>
       </a:folHlink>
     </a:clrScheme>
     <a:fontScheme name="Office">
       <a:majorFont>
-        <a:latin typeface="Calibri"/>
+        <a:latin typeface="Aptos Display" panose="02110004020202020204"/>
         <a:ea typeface=""/>
         <a:cs typeface=""/>
-        <a:font script="Jpan" typeface="ＭＳ Ｐゴシック"/>
+        <a:font script="Jpan" typeface="游ゴシック Light"/>
         <a:font script="Hang" typeface="맑은 고딕"/>
-        <a:font script="Hans" typeface="宋体"/>
+        <a:font script="Hans" typeface="等线 Light"/>
         <a:font script="Hant" typeface="新細明體"/>
         <a:font script="Arab" typeface="Times New Roman"/>
         <a:font script="Hebr" typeface="Times New Roman"/>
@@ -17311,14 +18247,31 @@
         <a:font script="Viet" typeface="Times New Roman"/>
         <a:font script="Uigh" typeface="Microsoft Uighur"/>
         <a:font script="Geor" typeface="Sylfaen"/>
+        <a:font script="Armn" typeface="Arial"/>
+        <a:font script="Bugi" typeface="Leelawadee UI"/>
+        <a:font script="Bopo" typeface="Microsoft JhengHei"/>
+        <a:font script="Java" typeface="Javanese Text"/>
+        <a:font script="Lisu" typeface="Segoe UI"/>
+        <a:font script="Mymr" typeface="Myanmar Text"/>
+        <a:font script="Nkoo" typeface="Ebrima"/>
+        <a:font script="Olck" typeface="Nirmala UI"/>
+        <a:font script="Osma" typeface="Ebrima"/>
+        <a:font script="Phag" typeface="Phagspa"/>
+        <a:font script="Syrn" typeface="Estrangelo Edessa"/>
+        <a:font script="Syrj" typeface="Estrangelo Edessa"/>
+        <a:font script="Syre" typeface="Estrangelo Edessa"/>
+        <a:font script="Sora" typeface="Nirmala UI"/>
+        <a:font script="Tale" typeface="Microsoft Tai Le"/>
+        <a:font script="Talu" typeface="Microsoft New Tai Lue"/>
+        <a:font script="Tfng" typeface="Ebrima"/>
       </a:majorFont>
       <a:minorFont>
-        <a:latin typeface="Calibri"/>
+        <a:latin typeface="Aptos" panose="02110004020202020204"/>
         <a:ea typeface=""/>
         <a:cs typeface=""/>
-        <a:font script="Jpan" typeface="ＭＳ Ｐゴシック"/>
+        <a:font script="Jpan" typeface="游ゴシック"/>
         <a:font script="Hang" typeface="맑은 고딕"/>
-        <a:font script="Hans" typeface="宋体"/>
+        <a:font script="Hans" typeface="等线"/>
         <a:font script="Hant" typeface="新細明體"/>
         <a:font script="Arab" typeface="Arial"/>
         <a:font script="Hebr" typeface="Arial"/>
@@ -17346,6 +18299,23 @@
         <a:font script="Viet" typeface="Arial"/>
         <a:font script="Uigh" typeface="Microsoft Uighur"/>
         <a:font script="Geor" typeface="Sylfaen"/>
+        <a:font script="Armn" typeface="Arial"/>
+        <a:font script="Bugi" typeface="Leelawadee UI"/>
+        <a:font script="Bopo" typeface="Microsoft JhengHei"/>
+        <a:font script="Java" typeface="Javanese Text"/>
+        <a:font script="Lisu" typeface="Segoe UI"/>
+        <a:font script="Mymr" typeface="Myanmar Text"/>
+        <a:font script="Nkoo" typeface="Ebrima"/>
+        <a:font script="Olck" typeface="Nirmala UI"/>
+        <a:font script="Osma" typeface="Ebrima"/>
+        <a:font script="Phag" typeface="Phagspa"/>
+        <a:font script="Syrn" typeface="Estrangelo Edessa"/>
+        <a:font script="Syrj" typeface="Estrangelo Edessa"/>
+        <a:font script="Syre" typeface="Estrangelo Edessa"/>
+        <a:font script="Sora" typeface="Nirmala UI"/>
+        <a:font script="Tale" typeface="Microsoft Tai Le"/>
+        <a:font script="Talu" typeface="Microsoft New Tai Lue"/>
+        <a:font script="Tfng" typeface="Ebrima"/>
       </a:minorFont>
     </a:fontScheme>
     <a:fmtScheme name="Office">
@@ -17357,180 +18327,136 @@
           <a:gsLst>
             <a:gs pos="0">
               <a:schemeClr val="phClr">
-                <a:tint val="50000"/>
-                <a:satMod val="300000"/>
+                <a:lumMod val="110000"/>
+                <a:satMod val="105000"/>
+                <a:tint val="67000"/>
               </a:schemeClr>
             </a:gs>
-            <a:gs pos="35000">
+            <a:gs pos="50000">
               <a:schemeClr val="phClr">
-                <a:tint val="37000"/>
-                <a:satMod val="300000"/>
+                <a:lumMod val="105000"/>
+                <a:satMod val="103000"/>
+                <a:tint val="73000"/>
               </a:schemeClr>
             </a:gs>
             <a:gs pos="100000">
               <a:schemeClr val="phClr">
-                <a:tint val="15000"/>
-                <a:satMod val="350000"/>
+                <a:lumMod val="105000"/>
+                <a:satMod val="109000"/>
+                <a:tint val="81000"/>
               </a:schemeClr>
             </a:gs>
           </a:gsLst>
-          <a:lin ang="16200000" scaled="1"/>
+          <a:lin ang="5400000" scaled="0"/>
         </a:gradFill>
         <a:gradFill rotWithShape="1">
           <a:gsLst>
             <a:gs pos="0">
               <a:schemeClr val="phClr">
-                <a:tint val="100000"/>
+                <a:satMod val="103000"/>
+                <a:lumMod val="102000"/>
+                <a:tint val="94000"/>
+              </a:schemeClr>
+            </a:gs>
+            <a:gs pos="50000">
+              <a:schemeClr val="phClr">
+                <a:satMod val="110000"/>
+                <a:lumMod val="100000"/>
                 <a:shade val="100000"/>
-                <a:satMod val="130000"/>
               </a:schemeClr>
             </a:gs>
             <a:gs pos="100000">
               <a:schemeClr val="phClr">
-                <a:tint val="50000"/>
-                <a:shade val="100000"/>
-                <a:satMod val="350000"/>
+                <a:lumMod val="99000"/>
+                <a:satMod val="120000"/>
+                <a:shade val="78000"/>
               </a:schemeClr>
             </a:gs>
           </a:gsLst>
-          <a:lin ang="16200000" scaled="0"/>
+          <a:lin ang="5400000" scaled="0"/>
         </a:gradFill>
       </a:fillStyleLst>
       <a:lnStyleLst>
-        <a:ln w="9525" cap="flat" cmpd="sng" algn="ctr">
+        <a:ln w="12700" cap="flat" cmpd="sng" algn="ctr">
           <a:solidFill>
-            <a:schemeClr val="phClr">
-              <a:shade val="95000"/>
-              <a:satMod val="105000"/>
-            </a:schemeClr>
+            <a:schemeClr val="phClr"/>
           </a:solidFill>
           <a:prstDash val="solid"/>
+          <a:miter lim="800000"/>
+        </a:ln>
+        <a:ln w="19050" cap="flat" cmpd="sng" algn="ctr">
+          <a:solidFill>
+            <a:schemeClr val="phClr"/>
+          </a:solidFill>
+          <a:prstDash val="solid"/>
+          <a:miter lim="800000"/>
         </a:ln>
         <a:ln w="25400" cap="flat" cmpd="sng" algn="ctr">
           <a:solidFill>
             <a:schemeClr val="phClr"/>
           </a:solidFill>
           <a:prstDash val="solid"/>
-        </a:ln>
-        <a:ln w="38100" cap="flat" cmpd="sng" algn="ctr">
-          <a:solidFill>
-            <a:schemeClr val="phClr"/>
-          </a:solidFill>
-          <a:prstDash val="solid"/>
+          <a:miter lim="800000"/>
         </a:ln>
       </a:lnStyleLst>
       <a:effectStyleLst>
         <a:effectStyle>
+          <a:effectLst/>
+        </a:effectStyle>
+        <a:effectStyle>
+          <a:effectLst/>
+        </a:effectStyle>
+        <a:effectStyle>
           <a:effectLst>
-            <a:outerShdw blurRad="40000" dist="20000" dir="5400000" rotWithShape="0">
+            <a:outerShdw blurRad="57150" dist="19050" dir="5400000" algn="ctr" rotWithShape="0">
               <a:srgbClr val="000000">
-                <a:alpha val="38000"/>
+                <a:alpha val="63000"/>
               </a:srgbClr>
             </a:outerShdw>
           </a:effectLst>
-        </a:effectStyle>
-        <a:effectStyle>
-          <a:effectLst>
-            <a:outerShdw blurRad="40000" dist="23000" dir="5400000" rotWithShape="0">
-              <a:srgbClr val="000000">
-                <a:alpha val="35000"/>
-              </a:srgbClr>
-            </a:outerShdw>
-          </a:effectLst>
-        </a:effectStyle>
-        <a:effectStyle>
-          <a:effectLst>
-            <a:outerShdw blurRad="40000" dist="23000" dir="5400000" rotWithShape="0">
-              <a:srgbClr val="000000">
-                <a:alpha val="35000"/>
-              </a:srgbClr>
-            </a:outerShdw>
-          </a:effectLst>
-          <a:scene3d>
-            <a:camera prst="orthographicFront">
-              <a:rot lat="0" lon="0" rev="0"/>
-            </a:camera>
-            <a:lightRig rig="threePt" dir="t">
-              <a:rot lat="0" lon="0" rev="1200000"/>
-            </a:lightRig>
-          </a:scene3d>
-          <a:sp3d>
-            <a:bevelT w="63500" h="25400"/>
-          </a:sp3d>
         </a:effectStyle>
       </a:effectStyleLst>
       <a:bgFillStyleLst>
         <a:solidFill>
           <a:schemeClr val="phClr"/>
         </a:solidFill>
+        <a:solidFill>
+          <a:schemeClr val="phClr">
+            <a:tint val="95000"/>
+            <a:satMod val="170000"/>
+          </a:schemeClr>
+        </a:solidFill>
         <a:gradFill rotWithShape="1">
           <a:gsLst>
             <a:gs pos="0">
               <a:schemeClr val="phClr">
-                <a:tint val="40000"/>
-                <a:satMod val="350000"/>
+                <a:tint val="93000"/>
+                <a:satMod val="150000"/>
+                <a:shade val="98000"/>
+                <a:lumMod val="102000"/>
               </a:schemeClr>
             </a:gs>
-            <a:gs pos="40000">
+            <a:gs pos="50000">
               <a:schemeClr val="phClr">
-                <a:tint val="45000"/>
-                <a:shade val="99000"/>
-                <a:satMod val="350000"/>
+                <a:tint val="98000"/>
+                <a:satMod val="130000"/>
+                <a:shade val="90000"/>
+                <a:lumMod val="103000"/>
               </a:schemeClr>
             </a:gs>
             <a:gs pos="100000">
               <a:schemeClr val="phClr">
-                <a:shade val="20000"/>
-                <a:satMod val="255000"/>
+                <a:shade val="63000"/>
+                <a:satMod val="120000"/>
               </a:schemeClr>
             </a:gs>
           </a:gsLst>
-          <a:path path="circle">
-            <a:fillToRect l="50000" t="-80000" r="50000" b="180000"/>
-          </a:path>
-        </a:gradFill>
-        <a:gradFill rotWithShape="1">
-          <a:gsLst>
-            <a:gs pos="0">
-              <a:schemeClr val="phClr">
-                <a:tint val="80000"/>
-                <a:satMod val="300000"/>
-              </a:schemeClr>
-            </a:gs>
-            <a:gs pos="100000">
-              <a:schemeClr val="phClr">
-                <a:shade val="30000"/>
-                <a:satMod val="200000"/>
-              </a:schemeClr>
-            </a:gs>
-          </a:gsLst>
-          <a:path path="circle">
-            <a:fillToRect l="50000" t="50000" r="50000" b="50000"/>
-          </a:path>
+          <a:lin ang="5400000" scaled="0"/>
         </a:gradFill>
       </a:bgFillStyleLst>
     </a:fmtScheme>
   </a:themeElements>
   <a:objectDefaults>
-    <a:spDef>
-      <a:spPr/>
-      <a:bodyPr/>
-      <a:lstStyle/>
-      <a:style>
-        <a:lnRef idx="1">
-          <a:schemeClr val="accent1"/>
-        </a:lnRef>
-        <a:fillRef idx="3">
-          <a:schemeClr val="accent1"/>
-        </a:fillRef>
-        <a:effectRef idx="2">
-          <a:schemeClr val="accent1"/>
-        </a:effectRef>
-        <a:fontRef idx="minor">
-          <a:schemeClr val="lt1"/>
-        </a:fontRef>
-      </a:style>
-    </a:spDef>
     <a:lnDef>
       <a:spPr/>
       <a:bodyPr/>
@@ -17552,5 +18478,10 @@
     </a:lnDef>
   </a:objectDefaults>
   <a:extraClrSchemeLst/>
+  <a:extLst>
+    <a:ext uri="{05A4C25C-085E-4340-85A3-A5531E510DB2}">
+      <thm15:themeFamily xmlns:thm15="http://schemas.microsoft.com/office/thememl/2012/main" name="Office Theme" id="{2E142A2C-CD16-42D6-873A-C26D2A0506FA}" vid="{1BDDFF52-6CD6-40A5-AB3C-68EB2F1E4D0A}"/>
+    </a:ext>
+  </a:extLst>
 </a:theme>
 </file>